--- a/presentation/final/presentation.pptx
+++ b/presentation/final/presentation.pptx
@@ -511,7 +511,7 @@
           <a:lstStyle/>
           <a:p>
             <a:r>
-              <a:t>기억할 문장: 지역성을 지키는 정적 큐도 작업이 치우치면 Tail latency를 키울 수 있습니다.</a:t>
+              <a:t>기억할 문장: 이 논문은 Work Stealing이 항상 빠르다는 주장이 아니라, 실제 LLM 작업에서 언제 Tail 감소가 이동 비용보다 큰지를 묻습니다.</a:t>
             </a:r>
           </a:p>
           <a:p/>
@@ -599,7 +599,7 @@
           <a:lstStyle/>
           <a:p>
             <a:r>
-              <a:t>기억할 문장: 이 연구의 기여는 Work Stealing의 승리가 아니라 유효 조건과 비용을 함께 밝힌 것입니다.</a:t>
+              <a:t>기억할 문장: 이 논문의 기여는 Work Stealing의 보편적 우월성이 아니라 효과가 생기는 조건과 아직 남은 검증을 함께 제시한 것입니다.</a:t>
             </a:r>
           </a:p>
           <a:p/>
@@ -687,7 +687,7 @@
           <a:lstStyle/>
           <a:p>
             <a:r>
-              <a:t>기억할 문장: 정적 로컬 큐는 지역성을 지키지만 부하 균형을 보장하지 않습니다.</a:t>
+              <a:t>기억할 문장: 연구 공백은 locality와 load balance를 따로 보는 것이 아니라 p95·p99와 원격 byte를 같은 작업에서 연결하는 데 있습니다.</a:t>
             </a:r>
           </a:p>
           <a:p/>
@@ -775,7 +775,7 @@
           <a:lstStyle/>
           <a:p>
             <a:r>
-              <a:t>기억할 문장: 이 구조는 계산할 위치와 데이터를 가져올 위치를 TileJob에서 분리합니다.</a:t>
+              <a:t>기억할 문장: 논문의 시스템 모델은 계산 위치와 데이터 위치를 분리하지만, 닫힌 DDR 응답 경로까지 구현했다고 주장하지 않습니다.</a:t>
             </a:r>
           </a:p>
           <a:p/>
@@ -869,7 +869,7 @@
           <a:lstStyle/>
           <a:p>
             <a:r>
-              <a:t>기억할 문장: S3 지역성 인식 Work Stealing은 가장 오래된 작업이 아니라 이득이 남는 작업을 훔칩니다.</a:t>
+              <a:t>기억할 문장: S3는 가장 오래된 작업을 그대로 가져오지 않고, 대기 이득에서 데이터 이동 비용을 뺀 선택을 합니다.</a:t>
             </a:r>
           </a:p>
           <a:p/>
@@ -969,7 +969,7 @@
           <a:lstStyle/>
           <a:p>
             <a:r>
-              <a:t>기억할 문장: Gemma replay와 조건 분석용 치우침 스트레스는 서로 다른 작업 집합입니다.</a:t>
+              <a:t>기억할 문장: 실제 Gemma replay는 연구의 현실성을, 별도 synthetic stress는 효과가 발생하는 조건을 검증합니다.</a:t>
             </a:r>
           </a:p>
           <a:p/>
@@ -981,7 +981,7 @@
           <a:p/>
           <a:p>
             <a:r>
-              <a:t>Decode-32 조건에서는 183 곱하기 32, 즉 5,856개의 coarse TileJob ledger를 만듭니다. 이 Gemma replay에서 S3의 p95와 p99는 S1보다 각각 15.07%, 14.61% 낮았습니다.</a:t>
+              <a:t>Decode-32 조건에서는 183 곱하기 32, 즉 5,856개의 coarse TileJob ledger를 만듭니다. 이 ledger로 실제 Gemma replay를 만들고, 별도 stress로 효과 조건을 분리해 확인했습니다.</a:t>
             </a:r>
           </a:p>
           <a:p/>
@@ -1063,7 +1063,7 @@
           <a:lstStyle/>
           <a:p>
             <a:r>
-              <a:t>기억할 문장: 제어된 치우침 스트레스에서 S3는 S1의 유휴 클러스터를 실제 steal 작업으로 채웁니다.</a:t>
+              <a:t>기억할 문장: 공정한 비교를 위해 같은 job identity와 resource 조건을 고정하고 scheduler 정책만 바꿨습니다.</a:t>
             </a:r>
           </a:p>
           <a:p/>
@@ -1157,25 +1157,31 @@
           <a:lstStyle/>
           <a:p>
             <a:r>
-              <a:t>기억할 문장: S3의 효과는 p95 한 점이 아니라 p99까지 같은 방향으로 나타납니다.</a:t>
+              <a:t>기억할 문장: 실제 Gemma replay의 감소와 synthetic skew의 조건 분석이 같은 방향을 보이지만, 두 수치를 같은 실험으로 합치면 안 됩니다.</a:t>
             </a:r>
           </a:p>
           <a:p/>
           <a:p>
             <a:r>
-              <a:t>Gemma replay와 별개의 1,000-job synthetic skew workload에서 5개 seed 중앙값을 보겠습니다. full-overlap analytical model이며 물리 timing이 아닙니다. p95는 S1의 285.3k cycle에서 S3의 233.6k cycle로 18.12% 감소했습니다. p99는 302.2k에서 247.3k cycle로 18.16% 감소했습니다.</a:t>
+              <a:t>먼저 실제 Gemma decode-32 graph-derived ledger의 analytical replay입니다. 5,856개 coarse TileJob에서 S3는 S1보다 p95를 15.07%, p99를 14.61% 줄였습니다. 이 값은 실제 graph order와 tensor byte에서 파생됐지만 시간은 보드 측정이 아니라 분석 모델입니다.</a:t>
             </a:r>
           </a:p>
           <a:p/>
           <a:p>
             <a:r>
+              <a:t>아래 보조 수치인 18.12%는 별도의 1,000-job synthetic skew, 5개 seed 중앙값입니다. 실제 replay와 동일한 실험으로 합치는 값이 아니라, queue skew가 Tail 감소의 조건임을 확인하는 stress 결과입니다.</a:t>
+            </a:r>
+          </a:p>
+          <a:p/>
+          <a:p>
+            <a:r>
               <a:t>Mixed workload에서도 p95는 17.59% 줄고 p99도 감소합니다. 반면 balanced와 channel-hotspot에서는 stealing할 불균형이 없거나 memory channel 자체가 병목이어서 S3의 이득이 나타나지 않습니다.</a:t>
             </a:r>
           </a:p>
           <a:p/>
           <a:p>
             <a:r>
-              <a:t>따라서 결론은 S3가 항상 빠르다는 것이 아닙니다. 정적 ownership 때문에 queue skew가 Tail을 지배하는 조건에서 효과가 있다는 것입니다.</a:t>
+              <a:t>따라서 결론은 S3가 항상 빠르다는 것이 아닙니다. 실제 graph-derived replay에서 방향성을 확인하고, 별도 stress로 정적 ownership의 queue skew가 효과 조건임을 분리해 확인했다는 것입니다.</a:t>
             </a:r>
           </a:p>
           <a:p/>
@@ -1251,7 +1257,7 @@
           <a:lstStyle/>
           <a:p>
             <a:r>
-              <a:t>기억할 문장: Tail 감소는 공짜가 아니라 원격 이동과 resource pressure로 지불합니다.</a:t>
+              <a:t>기억할 문장: 지역성 점수는 원격 이동을 줄이지만, 보수적인 선택 때문에 전체 완료시간은 소폭 늘 수 있습니다.</a:t>
             </a:r>
           </a:p>
           <a:p/>
@@ -1264,6 +1270,12 @@
           <a:p>
             <a:r>
               <a:t>오른쪽도 S3와 S2의 비교입니다. 더 보수적인 선택 때문에 마지막 completion은 0.98% 길어집니다. 즉 세 수치는 비교 기준이 서로 다릅니다. S1은 정적 baseline이고, S2는 locality를 고려하지 않는 stealing baseline입니다.</a:t>
+            </a:r>
+          </a:p>
+          <a:p/>
+          <a:p>
+            <a:r>
+              <a:t>그리고 service composition을 sequential 경계로 바꾸면 synthetic skew의 S2/S3 p95 순위가 뒤집힙니다. 따라서 S3의 S2 대비 Tail 우위는 서비스 중첩 가정에 조건부입니다.</a:t>
             </a:r>
           </a:p>
           <a:p/>
@@ -1339,7 +1351,7 @@
           <a:lstStyle/>
           <a:p>
             <a:r>
-              <a:t>기억할 문장: 물리 reference는 실제 KiCad 객체지만 아직 제작 가능한 보드는 아닙니다.</a:t>
+              <a:t>기억할 문장: KiCad coupon의 역할은 제품 보드를 보여주는 것이 아니라 다음 물리 검증의 인터페이스와 범위를 고정하는 것입니다.</a:t>
             </a:r>
           </a:p>
           <a:p/>
@@ -4498,8 +4510,8 @@
           <a:noFill/>
         </p:spPr>
         <p:txBody>
-          <a:bodyPr wrap="square" lIns="0" rIns="0" tIns="0" bIns="0" anchor="t">
-            <a:spAutoFit/>
+          <a:bodyPr wrap="none" lIns="0" rIns="0" tIns="0" bIns="0" anchor="t">
+            <a:normAutofit/>
           </a:bodyPr>
           <a:lstStyle/>
           <a:p>
@@ -4518,8 +4530,8 @@
                 </a:solidFill>
                 <a:latin typeface="NanumSquare"/>
               </a:rPr>
-              <a:t>Work Stealing으로 줄이는
-Tail Latency</a:t>
+              <a:t>정적 큐의 Tail을 줄이는
+Work Stealing</a:t>
             </a:r>
           </a:p>
         </p:txBody>
@@ -4532,8 +4544,8 @@
         </p:nvSpPr>
         <p:spPr>
           <a:xfrm>
-            <a:off x="584200" y="3441700"/>
-            <a:ext cx="5715000" cy="368300"/>
+            <a:off x="584200" y="3492500"/>
+            <a:ext cx="6350000" cy="368300"/>
           </a:xfrm>
           <a:prstGeom prst="rect">
             <a:avLst/>
@@ -4541,8 +4553,8 @@
           <a:noFill/>
         </p:spPr>
         <p:txBody>
-          <a:bodyPr wrap="square" lIns="0" rIns="0" tIns="0" bIns="0" anchor="t">
-            <a:spAutoFit/>
+          <a:bodyPr wrap="none" lIns="0" rIns="0" tIns="0" bIns="0" anchor="t">
+            <a:normAutofit/>
           </a:bodyPr>
           <a:lstStyle/>
           <a:p>
@@ -4555,13 +4567,13 @@
               </a:spcAft>
             </a:pPr>
             <a:r>
-              <a:rPr sz="2300" b="0">
+              <a:rPr sz="2200" b="0">
                 <a:solidFill>
                   <a:srgbClr val="C8D5E3"/>
                 </a:solidFill>
                 <a:latin typeface="NanumSquare"/>
               </a:rPr>
-              <a:t>Gemma 3 1B 기반 K26–Memory FPGA 가속기 구조</a:t>
+              <a:t>Gemma 3 1B · K26–Memory FPGA 논문</a:t>
             </a:r>
           </a:p>
         </p:txBody>
@@ -4574,8 +4586,8 @@
         </p:nvSpPr>
         <p:spPr>
           <a:xfrm>
-            <a:off x="584200" y="3962399"/>
-            <a:ext cx="5524500" cy="584200"/>
+            <a:off x="584200" y="4000500"/>
+            <a:ext cx="6350000" cy="368300"/>
           </a:xfrm>
           <a:prstGeom prst="rect">
             <a:avLst/>
@@ -4583,8 +4595,8 @@
           <a:noFill/>
         </p:spPr>
         <p:txBody>
-          <a:bodyPr wrap="square" lIns="0" rIns="0" tIns="0" bIns="0" anchor="t">
-            <a:spAutoFit/>
+          <a:bodyPr wrap="none" lIns="0" rIns="0" tIns="0" bIns="0" anchor="t">
+            <a:normAutofit/>
           </a:bodyPr>
           <a:lstStyle/>
           <a:p>
@@ -4597,13 +4609,13 @@
               </a:spcAft>
             </a:pPr>
             <a:r>
-              <a:rPr sz="2100" b="0">
+              <a:rPr sz="2200" b="1">
                 <a:solidFill>
-                  <a:srgbClr val="91A5BA"/>
+                  <a:srgbClr val="36D7E7"/>
                 </a:solidFill>
                 <a:latin typeface="NanumSquare"/>
               </a:rPr>
-              <a:t>정적 큐의 지역성을 유지하면서, 치우친 작업은 유휴 클러스터로 재배치한다</a:t>
+              <a:t>연구 질문 | Tail 감소는 언제 이동 비용보다 큰가?</a:t>
             </a:r>
           </a:p>
         </p:txBody>
@@ -4617,7 +4629,7 @@
         <p:spPr>
           <a:xfrm>
             <a:off x="584200" y="5969000"/>
-            <a:ext cx="4826000" cy="266700"/>
+            <a:ext cx="4826000" cy="272288"/>
           </a:xfrm>
           <a:prstGeom prst="rect">
             <a:avLst/>
@@ -4625,8 +4637,8 @@
           <a:noFill/>
         </p:spPr>
         <p:txBody>
-          <a:bodyPr wrap="square" lIns="0" rIns="0" tIns="0" bIns="0" anchor="t">
-            <a:spAutoFit/>
+          <a:bodyPr wrap="none" lIns="0" rIns="0" tIns="0" bIns="0" anchor="t">
+            <a:normAutofit/>
           </a:bodyPr>
           <a:lstStyle/>
           <a:p>
@@ -4736,8 +4748,8 @@
           <a:noFill/>
         </p:spPr>
         <p:txBody>
-          <a:bodyPr wrap="square" lIns="0" rIns="0" tIns="0" bIns="0" anchor="t">
-            <a:spAutoFit/>
+          <a:bodyPr wrap="none" lIns="0" rIns="0" tIns="0" bIns="0" anchor="t">
+            <a:normAutofit/>
           </a:bodyPr>
           <a:lstStyle/>
           <a:p>
@@ -4756,7 +4768,7 @@
                 </a:solidFill>
                 <a:latin typeface="NanumSquare"/>
               </a:rPr>
-              <a:t>조건을 찾았고, 다음은 폐루프 검증이다</a:t>
+              <a:t>기여와 한계: 조건부 효과를 규명했다</a:t>
             </a:r>
           </a:p>
         </p:txBody>
@@ -4778,8 +4790,8 @@
           <a:noFill/>
         </p:spPr>
         <p:txBody>
-          <a:bodyPr wrap="square" lIns="0" rIns="0" tIns="0" bIns="0" anchor="t">
-            <a:spAutoFit/>
+          <a:bodyPr wrap="none" lIns="0" rIns="0" tIns="0" bIns="0" anchor="t">
+            <a:normAutofit/>
           </a:bodyPr>
           <a:lstStyle/>
           <a:p>
@@ -4798,7 +4810,7 @@
                 </a:solidFill>
                 <a:latin typeface="NanumSquare"/>
               </a:rPr>
-              <a:t>실제 작업 부하·스케줄러·물리 참조를 연결해 Work Stealing이 유효한 조건을 제시했다.</a:t>
+              <a:t>실제 workload·스케줄러·제한 물리 근거를 하나의 주장 사슬로 연결했다.</a:t>
             </a:r>
           </a:p>
         </p:txBody>
@@ -4857,7 +4869,7 @@
         <p:spPr>
           <a:xfrm>
             <a:off x="1651000" y="2730500"/>
-            <a:ext cx="571500" cy="444500"/>
+            <a:ext cx="571500" cy="546608"/>
           </a:xfrm>
           <a:prstGeom prst="rect">
             <a:avLst/>
@@ -4865,8 +4877,8 @@
           <a:noFill/>
         </p:spPr>
         <p:txBody>
-          <a:bodyPr wrap="square" lIns="0" rIns="0" tIns="0" bIns="0" anchor="t">
-            <a:spAutoFit/>
+          <a:bodyPr wrap="none" lIns="0" rIns="0" tIns="0" bIns="0" anchor="t">
+            <a:normAutofit/>
           </a:bodyPr>
           <a:lstStyle/>
           <a:p>
@@ -4899,7 +4911,7 @@
         <p:spPr>
           <a:xfrm>
             <a:off x="762000" y="3873499"/>
-            <a:ext cx="2349500" cy="558800"/>
+            <a:ext cx="2349500" cy="601472"/>
           </a:xfrm>
           <a:prstGeom prst="rect">
             <a:avLst/>
@@ -4907,8 +4919,8 @@
           <a:noFill/>
         </p:spPr>
         <p:txBody>
-          <a:bodyPr wrap="square" lIns="0" rIns="0" tIns="0" bIns="0" anchor="ctr">
-            <a:spAutoFit/>
+          <a:bodyPr wrap="none" lIns="0" rIns="0" tIns="0" bIns="0" anchor="ctr">
+            <a:normAutofit/>
           </a:bodyPr>
           <a:lstStyle/>
           <a:p>
@@ -4950,8 +4962,8 @@
           <a:noFill/>
         </p:spPr>
         <p:txBody>
-          <a:bodyPr wrap="square" lIns="0" rIns="0" tIns="0" bIns="0" anchor="t">
-            <a:spAutoFit/>
+          <a:bodyPr wrap="none" lIns="0" rIns="0" tIns="0" bIns="0" anchor="t">
+            <a:normAutofit/>
           </a:bodyPr>
           <a:lstStyle/>
           <a:p>
@@ -5072,7 +5084,7 @@
         <p:spPr>
           <a:xfrm>
             <a:off x="5397500" y="2730500"/>
-            <a:ext cx="571500" cy="444500"/>
+            <a:ext cx="571500" cy="546608"/>
           </a:xfrm>
           <a:prstGeom prst="rect">
             <a:avLst/>
@@ -5080,8 +5092,8 @@
           <a:noFill/>
         </p:spPr>
         <p:txBody>
-          <a:bodyPr wrap="square" lIns="0" rIns="0" tIns="0" bIns="0" anchor="t">
-            <a:spAutoFit/>
+          <a:bodyPr wrap="none" lIns="0" rIns="0" tIns="0" bIns="0" anchor="t">
+            <a:normAutofit/>
           </a:bodyPr>
           <a:lstStyle/>
           <a:p>
@@ -5114,7 +5126,7 @@
         <p:spPr>
           <a:xfrm>
             <a:off x="4508500" y="3873499"/>
-            <a:ext cx="2349500" cy="558800"/>
+            <a:ext cx="2349500" cy="601472"/>
           </a:xfrm>
           <a:prstGeom prst="rect">
             <a:avLst/>
@@ -5122,8 +5134,8 @@
           <a:noFill/>
         </p:spPr>
         <p:txBody>
-          <a:bodyPr wrap="square" lIns="0" rIns="0" tIns="0" bIns="0" anchor="ctr">
-            <a:spAutoFit/>
+          <a:bodyPr wrap="none" lIns="0" rIns="0" tIns="0" bIns="0" anchor="ctr">
+            <a:normAutofit/>
           </a:bodyPr>
           <a:lstStyle/>
           <a:p>
@@ -5165,8 +5177,8 @@
           <a:noFill/>
         </p:spPr>
         <p:txBody>
-          <a:bodyPr wrap="square" lIns="0" rIns="0" tIns="0" bIns="0" anchor="t">
-            <a:spAutoFit/>
+          <a:bodyPr wrap="none" lIns="0" rIns="0" tIns="0" bIns="0" anchor="t">
+            <a:normAutofit/>
           </a:bodyPr>
           <a:lstStyle/>
           <a:p>
@@ -5287,7 +5299,7 @@
         <p:spPr>
           <a:xfrm>
             <a:off x="9144000" y="2730500"/>
-            <a:ext cx="571500" cy="444500"/>
+            <a:ext cx="571500" cy="546608"/>
           </a:xfrm>
           <a:prstGeom prst="rect">
             <a:avLst/>
@@ -5295,8 +5307,8 @@
           <a:noFill/>
         </p:spPr>
         <p:txBody>
-          <a:bodyPr wrap="square" lIns="0" rIns="0" tIns="0" bIns="0" anchor="t">
-            <a:spAutoFit/>
+          <a:bodyPr wrap="none" lIns="0" rIns="0" tIns="0" bIns="0" anchor="t">
+            <a:normAutofit/>
           </a:bodyPr>
           <a:lstStyle/>
           <a:p>
@@ -5337,8 +5349,8 @@
           <a:noFill/>
         </p:spPr>
         <p:txBody>
-          <a:bodyPr wrap="square" lIns="0" rIns="0" tIns="0" bIns="0" anchor="ctr">
-            <a:spAutoFit/>
+          <a:bodyPr wrap="none" lIns="0" rIns="0" tIns="0" bIns="0" anchor="ctr">
+            <a:normAutofit/>
           </a:bodyPr>
           <a:lstStyle/>
           <a:p>
@@ -5379,8 +5391,8 @@
           <a:noFill/>
         </p:spPr>
         <p:txBody>
-          <a:bodyPr wrap="square" lIns="0" rIns="0" tIns="0" bIns="0" anchor="t">
-            <a:spAutoFit/>
+          <a:bodyPr wrap="none" lIns="0" rIns="0" tIns="0" bIns="0" anchor="t">
+            <a:normAutofit/>
           </a:bodyPr>
           <a:lstStyle/>
           <a:p>
@@ -5447,8 +5459,8 @@
         </p:nvSpPr>
         <p:spPr>
           <a:xfrm>
-            <a:off x="1016000" y="5346700"/>
-            <a:ext cx="1333500" cy="266700"/>
+            <a:off x="1460500" y="5334000"/>
+            <a:ext cx="9271000" cy="393700"/>
           </a:xfrm>
           <a:prstGeom prst="rect">
             <a:avLst/>
@@ -5456,12 +5468,12 @@
           <a:noFill/>
         </p:spPr>
         <p:txBody>
-          <a:bodyPr wrap="square" lIns="0" rIns="0" tIns="0" bIns="0" anchor="t">
-            <a:spAutoFit/>
+          <a:bodyPr wrap="none" lIns="0" rIns="0" tIns="0" bIns="0" anchor="t">
+            <a:normAutofit/>
           </a:bodyPr>
           <a:lstStyle/>
           <a:p>
-            <a:pPr algn="l">
+            <a:pPr algn="ctr">
               <a:spcBef>
                 <a:spcPts val="0"/>
               </a:spcBef>
@@ -5470,62 +5482,20 @@
               </a:spcAft>
             </a:pPr>
             <a:r>
-              <a:rPr sz="2000" b="1">
-                <a:solidFill>
-                  <a:srgbClr val="F1B44C"/>
-                </a:solidFill>
-                <a:latin typeface="NanumSquare"/>
-              </a:rPr>
-              <a:t>다음 검증</a:t>
-            </a:r>
-          </a:p>
-        </p:txBody>
-      </p:sp>
-      <p:sp>
-        <p:nvSpPr>
-          <p:cNvPr id="21" name="TextBox 20"/>
-          <p:cNvSpPr txBox="1"/>
-          <p:nvPr/>
-        </p:nvSpPr>
-        <p:spPr>
-          <a:xfrm>
-            <a:off x="2286000" y="5270500"/>
-            <a:ext cx="8255000" cy="393700"/>
-          </a:xfrm>
-          <a:prstGeom prst="rect">
-            <a:avLst/>
-          </a:prstGeom>
-          <a:noFill/>
-        </p:spPr>
-        <p:txBody>
-          <a:bodyPr wrap="square" lIns="0" rIns="0" tIns="0" bIns="0" anchor="t">
-            <a:spAutoFit/>
-          </a:bodyPr>
-          <a:lstStyle/>
-          <a:p>
-            <a:pPr algn="ctr">
-              <a:spcBef>
-                <a:spcPts val="0"/>
-              </a:spcBef>
-              <a:spcAft>
-                <a:spcPts val="0"/>
-              </a:spcAft>
-            </a:pPr>
-            <a:r>
-              <a:rPr sz="2600" b="1">
+              <a:rPr sz="2400" b="1">
                 <a:solidFill>
                   <a:srgbClr val="F4F7FB"/>
                 </a:solidFill>
                 <a:latin typeface="NanumSquare"/>
               </a:rPr>
-              <a:t>DDR 응답  →  Link 수신  →  Weight FIFO  →  MatVec 폐루프</a:t>
-            </a:r>
-          </a:p>
-        </p:txBody>
-      </p:sp>
-      <p:sp>
-        <p:nvSpPr>
-          <p:cNvPr id="22" name="TextBox 21"/>
+              <a:t>다음 검증 | DDR 응답 → Link 수신 → Weight FIFO → MatVec</a:t>
+            </a:r>
+          </a:p>
+        </p:txBody>
+      </p:sp>
+      <p:sp>
+        <p:nvSpPr>
+          <p:cNvPr id="21" name="TextBox 20"/>
           <p:cNvSpPr txBox="1"/>
           <p:nvPr/>
         </p:nvSpPr>
@@ -5540,8 +5510,8 @@
           <a:noFill/>
         </p:spPr>
         <p:txBody>
-          <a:bodyPr wrap="square" lIns="0" rIns="0" tIns="0" bIns="0" anchor="t">
-            <a:spAutoFit/>
+          <a:bodyPr wrap="none" lIns="0" rIns="0" tIns="0" bIns="0" anchor="t">
+            <a:normAutofit/>
           </a:bodyPr>
           <a:lstStyle/>
           <a:p>
@@ -5651,8 +5621,8 @@
           <a:noFill/>
         </p:spPr>
         <p:txBody>
-          <a:bodyPr wrap="square" lIns="0" rIns="0" tIns="0" bIns="0" anchor="t">
-            <a:spAutoFit/>
+          <a:bodyPr wrap="none" lIns="0" rIns="0" tIns="0" bIns="0" anchor="t">
+            <a:normAutofit/>
           </a:bodyPr>
           <a:lstStyle/>
           <a:p>
@@ -5671,7 +5641,7 @@
                 </a:solidFill>
                 <a:latin typeface="NanumSquare"/>
               </a:rPr>
-              <a:t>왜 정적 큐가 Tail을 만드는가</a:t>
+              <a:t>연구 질문: 지역성과 부하 균형을 함께 얻을 수 있는가</a:t>
             </a:r>
           </a:p>
         </p:txBody>
@@ -5693,8 +5663,8 @@
           <a:noFill/>
         </p:spPr>
         <p:txBody>
-          <a:bodyPr wrap="square" lIns="0" rIns="0" tIns="0" bIns="0" anchor="t">
-            <a:spAutoFit/>
+          <a:bodyPr wrap="none" lIns="0" rIns="0" tIns="0" bIns="0" anchor="t">
+            <a:normAutofit/>
           </a:bodyPr>
           <a:lstStyle/>
           <a:p>
@@ -5713,7 +5683,7 @@
                 </a:solidFill>
                 <a:latin typeface="NanumSquare"/>
               </a:rPr>
-              <a:t>지역성은 유지되지만 작업이 치우치면 일부 클러스터가 놀고 p95가 길어진다.</a:t>
+              <a:t>정적 소유권의 locality 이점과 queue skew의 Tail 비용을 함께 측정해야 한다.</a:t>
             </a:r>
           </a:p>
         </p:txBody>
@@ -5727,7 +5697,7 @@
         <p:spPr>
           <a:xfrm>
             <a:off x="685800" y="1638300"/>
-            <a:ext cx="4000500" cy="285750"/>
+            <a:ext cx="4000500" cy="327152"/>
           </a:xfrm>
           <a:prstGeom prst="rect">
             <a:avLst/>
@@ -5735,8 +5705,8 @@
           <a:noFill/>
         </p:spPr>
         <p:txBody>
-          <a:bodyPr wrap="square" lIns="0" rIns="0" tIns="0" bIns="0" anchor="t">
-            <a:spAutoFit/>
+          <a:bodyPr wrap="none" lIns="0" rIns="0" tIns="0" bIns="0" anchor="t">
+            <a:normAutofit/>
           </a:bodyPr>
           <a:lstStyle/>
           <a:p>
@@ -5769,7 +5739,7 @@
         <p:spPr>
           <a:xfrm>
             <a:off x="635000" y="2235200"/>
-            <a:ext cx="1079500" cy="304800"/>
+            <a:ext cx="1301750" cy="304800"/>
           </a:xfrm>
           <a:prstGeom prst="rect">
             <a:avLst/>
@@ -5777,8 +5747,8 @@
           <a:noFill/>
         </p:spPr>
         <p:txBody>
-          <a:bodyPr wrap="square" lIns="0" rIns="0" tIns="0" bIns="0" anchor="t">
-            <a:spAutoFit/>
+          <a:bodyPr wrap="none" lIns="0" rIns="0" tIns="0" bIns="0" anchor="t">
+            <a:normAutofit/>
           </a:bodyPr>
           <a:lstStyle/>
           <a:p>
@@ -5791,7 +5761,7 @@
               </a:spcAft>
             </a:pPr>
             <a:r>
-              <a:rPr sz="1800" b="1">
+              <a:rPr sz="1900" b="1">
                 <a:solidFill>
                   <a:srgbClr val="F4F7FB"/>
                 </a:solidFill>
@@ -5810,8 +5780,8 @@
         </p:nvCxnSpPr>
         <p:spPr>
           <a:xfrm>
-            <a:off x="1778000" y="2400300"/>
-            <a:ext cx="3238500" cy="0"/>
+            <a:off x="2000250" y="2400300"/>
+            <a:ext cx="3016250" cy="0"/>
           </a:xfrm>
           <a:prstGeom prst="line">
             <a:avLst/>
@@ -5845,7 +5815,7 @@
         </p:nvSpPr>
         <p:spPr>
           <a:xfrm>
-            <a:off x="1854200" y="2266950"/>
+            <a:off x="2076450" y="2266950"/>
             <a:ext cx="254000" cy="266700"/>
           </a:xfrm>
           <a:prstGeom prst="roundRect">
@@ -5888,7 +5858,7 @@
         </p:nvSpPr>
         <p:spPr>
           <a:xfrm>
-            <a:off x="2171700" y="2266950"/>
+            <a:off x="2393950" y="2266950"/>
             <a:ext cx="254000" cy="266700"/>
           </a:xfrm>
           <a:prstGeom prst="roundRect">
@@ -5931,7 +5901,7 @@
         </p:nvSpPr>
         <p:spPr>
           <a:xfrm>
-            <a:off x="2489200" y="2266950"/>
+            <a:off x="2711450" y="2266950"/>
             <a:ext cx="254000" cy="266700"/>
           </a:xfrm>
           <a:prstGeom prst="roundRect">
@@ -5974,7 +5944,7 @@
         </p:nvSpPr>
         <p:spPr>
           <a:xfrm>
-            <a:off x="2806700" y="2266950"/>
+            <a:off x="3028950" y="2266950"/>
             <a:ext cx="254000" cy="266700"/>
           </a:xfrm>
           <a:prstGeom prst="roundRect">
@@ -6017,7 +5987,7 @@
         </p:nvSpPr>
         <p:spPr>
           <a:xfrm>
-            <a:off x="3124200" y="2266950"/>
+            <a:off x="3346450" y="2266950"/>
             <a:ext cx="254000" cy="266700"/>
           </a:xfrm>
           <a:prstGeom prst="roundRect">
@@ -6060,7 +6030,7 @@
         </p:nvSpPr>
         <p:spPr>
           <a:xfrm>
-            <a:off x="3441700" y="2266950"/>
+            <a:off x="3663950" y="2266950"/>
             <a:ext cx="254000" cy="266700"/>
           </a:xfrm>
           <a:prstGeom prst="roundRect">
@@ -6103,7 +6073,7 @@
         </p:nvSpPr>
         <p:spPr>
           <a:xfrm>
-            <a:off x="3759199" y="2266950"/>
+            <a:off x="3981450" y="2266950"/>
             <a:ext cx="254000" cy="266700"/>
           </a:xfrm>
           <a:prstGeom prst="roundRect">
@@ -6146,7 +6116,7 @@
         </p:nvSpPr>
         <p:spPr>
           <a:xfrm>
-            <a:off x="4076699" y="2266950"/>
+            <a:off x="4298950" y="2266950"/>
             <a:ext cx="254000" cy="266700"/>
           </a:xfrm>
           <a:prstGeom prst="roundRect">
@@ -6189,7 +6159,7 @@
         </p:nvSpPr>
         <p:spPr>
           <a:xfrm>
-            <a:off x="4394200" y="2266950"/>
+            <a:off x="4616450" y="2266950"/>
             <a:ext cx="254000" cy="266700"/>
           </a:xfrm>
           <a:prstGeom prst="roundRect">
@@ -6233,7 +6203,7 @@
         <p:spPr>
           <a:xfrm>
             <a:off x="635000" y="2933700"/>
-            <a:ext cx="1079500" cy="304800"/>
+            <a:ext cx="1301750" cy="304800"/>
           </a:xfrm>
           <a:prstGeom prst="rect">
             <a:avLst/>
@@ -6241,8 +6211,8 @@
           <a:noFill/>
         </p:spPr>
         <p:txBody>
-          <a:bodyPr wrap="square" lIns="0" rIns="0" tIns="0" bIns="0" anchor="t">
-            <a:spAutoFit/>
+          <a:bodyPr wrap="none" lIns="0" rIns="0" tIns="0" bIns="0" anchor="t">
+            <a:normAutofit/>
           </a:bodyPr>
           <a:lstStyle/>
           <a:p>
@@ -6255,7 +6225,7 @@
               </a:spcAft>
             </a:pPr>
             <a:r>
-              <a:rPr sz="1800" b="1">
+              <a:rPr sz="1900" b="1">
                 <a:solidFill>
                   <a:srgbClr val="F4F7FB"/>
                 </a:solidFill>
@@ -6274,8 +6244,8 @@
         </p:nvCxnSpPr>
         <p:spPr>
           <a:xfrm>
-            <a:off x="1778000" y="3098800"/>
-            <a:ext cx="3238500" cy="0"/>
+            <a:off x="2000250" y="3098800"/>
+            <a:ext cx="3016250" cy="0"/>
           </a:xfrm>
           <a:prstGeom prst="line">
             <a:avLst/>
@@ -6309,7 +6279,7 @@
         </p:nvSpPr>
         <p:spPr>
           <a:xfrm>
-            <a:off x="1854200" y="2965450"/>
+            <a:off x="2076450" y="2965450"/>
             <a:ext cx="254000" cy="266700"/>
           </a:xfrm>
           <a:prstGeom prst="roundRect">
@@ -6352,7 +6322,7 @@
         </p:nvSpPr>
         <p:spPr>
           <a:xfrm>
-            <a:off x="2171700" y="2965450"/>
+            <a:off x="2393950" y="2965450"/>
             <a:ext cx="254000" cy="266700"/>
           </a:xfrm>
           <a:prstGeom prst="roundRect">
@@ -6396,7 +6366,7 @@
         <p:spPr>
           <a:xfrm>
             <a:off x="4127500" y="2959100"/>
-            <a:ext cx="762000" cy="254000"/>
+            <a:ext cx="762000" cy="258572"/>
           </a:xfrm>
           <a:prstGeom prst="rect">
             <a:avLst/>
@@ -6404,8 +6374,8 @@
           <a:noFill/>
         </p:spPr>
         <p:txBody>
-          <a:bodyPr wrap="square" lIns="0" rIns="0" tIns="0" bIns="0" anchor="t">
-            <a:spAutoFit/>
+          <a:bodyPr wrap="none" lIns="0" rIns="0" tIns="0" bIns="0" anchor="t">
+            <a:normAutofit/>
           </a:bodyPr>
           <a:lstStyle/>
           <a:p>
@@ -6438,7 +6408,7 @@
         <p:spPr>
           <a:xfrm>
             <a:off x="635000" y="3632200"/>
-            <a:ext cx="1079500" cy="304800"/>
+            <a:ext cx="1301750" cy="304800"/>
           </a:xfrm>
           <a:prstGeom prst="rect">
             <a:avLst/>
@@ -6446,8 +6416,8 @@
           <a:noFill/>
         </p:spPr>
         <p:txBody>
-          <a:bodyPr wrap="square" lIns="0" rIns="0" tIns="0" bIns="0" anchor="t">
-            <a:spAutoFit/>
+          <a:bodyPr wrap="none" lIns="0" rIns="0" tIns="0" bIns="0" anchor="t">
+            <a:normAutofit/>
           </a:bodyPr>
           <a:lstStyle/>
           <a:p>
@@ -6460,7 +6430,7 @@
               </a:spcAft>
             </a:pPr>
             <a:r>
-              <a:rPr sz="1800" b="1">
+              <a:rPr sz="1900" b="1">
                 <a:solidFill>
                   <a:srgbClr val="F4F7FB"/>
                 </a:solidFill>
@@ -6479,8 +6449,8 @@
         </p:nvCxnSpPr>
         <p:spPr>
           <a:xfrm>
-            <a:off x="1778000" y="3797300"/>
-            <a:ext cx="3238500" cy="0"/>
+            <a:off x="2000250" y="3797300"/>
+            <a:ext cx="3016250" cy="0"/>
           </a:xfrm>
           <a:prstGeom prst="line">
             <a:avLst/>
@@ -6514,7 +6484,7 @@
         </p:nvSpPr>
         <p:spPr>
           <a:xfrm>
-            <a:off x="1854200" y="3663950"/>
+            <a:off x="2076450" y="3663950"/>
             <a:ext cx="254000" cy="266700"/>
           </a:xfrm>
           <a:prstGeom prst="roundRect">
@@ -6558,7 +6528,7 @@
         <p:spPr>
           <a:xfrm>
             <a:off x="4127500" y="3657600"/>
-            <a:ext cx="762000" cy="254000"/>
+            <a:ext cx="762000" cy="258572"/>
           </a:xfrm>
           <a:prstGeom prst="rect">
             <a:avLst/>
@@ -6566,8 +6536,8 @@
           <a:noFill/>
         </p:spPr>
         <p:txBody>
-          <a:bodyPr wrap="square" lIns="0" rIns="0" tIns="0" bIns="0" anchor="t">
-            <a:spAutoFit/>
+          <a:bodyPr wrap="none" lIns="0" rIns="0" tIns="0" bIns="0" anchor="t">
+            <a:normAutofit/>
           </a:bodyPr>
           <a:lstStyle/>
           <a:p>
@@ -6600,7 +6570,7 @@
         <p:spPr>
           <a:xfrm>
             <a:off x="635000" y="4330700"/>
-            <a:ext cx="1079500" cy="304800"/>
+            <a:ext cx="1301750" cy="304800"/>
           </a:xfrm>
           <a:prstGeom prst="rect">
             <a:avLst/>
@@ -6608,8 +6578,8 @@
           <a:noFill/>
         </p:spPr>
         <p:txBody>
-          <a:bodyPr wrap="square" lIns="0" rIns="0" tIns="0" bIns="0" anchor="t">
-            <a:spAutoFit/>
+          <a:bodyPr wrap="none" lIns="0" rIns="0" tIns="0" bIns="0" anchor="t">
+            <a:normAutofit/>
           </a:bodyPr>
           <a:lstStyle/>
           <a:p>
@@ -6622,7 +6592,7 @@
               </a:spcAft>
             </a:pPr>
             <a:r>
-              <a:rPr sz="1800" b="1">
+              <a:rPr sz="1900" b="1">
                 <a:solidFill>
                   <a:srgbClr val="F4F7FB"/>
                 </a:solidFill>
@@ -6641,8 +6611,8 @@
         </p:nvCxnSpPr>
         <p:spPr>
           <a:xfrm>
-            <a:off x="1778000" y="4495800"/>
-            <a:ext cx="3238500" cy="0"/>
+            <a:off x="2000250" y="4495800"/>
+            <a:ext cx="3016250" cy="0"/>
           </a:xfrm>
           <a:prstGeom prst="line">
             <a:avLst/>
@@ -6676,7 +6646,7 @@
         </p:nvSpPr>
         <p:spPr>
           <a:xfrm>
-            <a:off x="1854200" y="4362450"/>
+            <a:off x="2076450" y="4362450"/>
             <a:ext cx="254000" cy="266700"/>
           </a:xfrm>
           <a:prstGeom prst="roundRect">
@@ -6720,7 +6690,7 @@
         <p:spPr>
           <a:xfrm>
             <a:off x="4127500" y="4356100"/>
-            <a:ext cx="762000" cy="254000"/>
+            <a:ext cx="762000" cy="258572"/>
           </a:xfrm>
           <a:prstGeom prst="rect">
             <a:avLst/>
@@ -6728,8 +6698,8 @@
           <a:noFill/>
         </p:spPr>
         <p:txBody>
-          <a:bodyPr wrap="square" lIns="0" rIns="0" tIns="0" bIns="0" anchor="t">
-            <a:spAutoFit/>
+          <a:bodyPr wrap="none" lIns="0" rIns="0" tIns="0" bIns="0" anchor="t">
+            <a:normAutofit/>
           </a:bodyPr>
           <a:lstStyle/>
           <a:p>
@@ -6805,7 +6775,7 @@
         <p:spPr>
           <a:xfrm>
             <a:off x="5168900" y="2667000"/>
-            <a:ext cx="1117600" cy="254000"/>
+            <a:ext cx="1117600" cy="519176"/>
           </a:xfrm>
           <a:prstGeom prst="rect">
             <a:avLst/>
@@ -6813,8 +6783,8 @@
           <a:noFill/>
         </p:spPr>
         <p:txBody>
-          <a:bodyPr wrap="square" lIns="0" rIns="0" tIns="0" bIns="0" anchor="t">
-            <a:spAutoFit/>
+          <a:bodyPr wrap="none" lIns="0" rIns="0" tIns="0" bIns="0" anchor="t">
+            <a:normAutofit/>
           </a:bodyPr>
           <a:lstStyle/>
           <a:p>
@@ -6833,7 +6803,8 @@
                 </a:solidFill>
                 <a:latin typeface="NanumSquare"/>
               </a:rPr>
-              <a:t>지역성 유지</a:t>
+              <a:t>지역성
+유지</a:t>
             </a:r>
           </a:p>
         </p:txBody>
@@ -6847,7 +6818,7 @@
         <p:spPr>
           <a:xfrm>
             <a:off x="5099050" y="3746500"/>
-            <a:ext cx="1257300" cy="254000"/>
+            <a:ext cx="1257300" cy="519176"/>
           </a:xfrm>
           <a:prstGeom prst="rect">
             <a:avLst/>
@@ -6855,8 +6826,8 @@
           <a:noFill/>
         </p:spPr>
         <p:txBody>
-          <a:bodyPr wrap="square" lIns="0" rIns="0" tIns="0" bIns="0" anchor="t">
-            <a:spAutoFit/>
+          <a:bodyPr wrap="none" lIns="0" rIns="0" tIns="0" bIns="0" anchor="t">
+            <a:normAutofit/>
           </a:bodyPr>
           <a:lstStyle/>
           <a:p>
@@ -6875,7 +6846,8 @@
                 </a:solidFill>
                 <a:latin typeface="NanumSquare"/>
               </a:rPr>
-              <a:t>부하 균형 실패</a:t>
+              <a:t>부하 균형
+실패</a:t>
             </a:r>
           </a:p>
         </p:txBody>
@@ -6889,7 +6861,7 @@
         <p:spPr>
           <a:xfrm>
             <a:off x="6921500" y="1765300"/>
-            <a:ext cx="4064000" cy="330200"/>
+            <a:ext cx="4064000" cy="368300"/>
           </a:xfrm>
           <a:prstGeom prst="rect">
             <a:avLst/>
@@ -6897,8 +6869,8 @@
           <a:noFill/>
         </p:spPr>
         <p:txBody>
-          <a:bodyPr wrap="square" lIns="0" rIns="0" tIns="0" bIns="0" anchor="t">
-            <a:spAutoFit/>
+          <a:bodyPr wrap="none" lIns="0" rIns="0" tIns="0" bIns="0" anchor="t">
+            <a:normAutofit/>
           </a:bodyPr>
           <a:lstStyle/>
           <a:p>
@@ -7211,7 +7183,7 @@
         <p:spPr>
           <a:xfrm>
             <a:off x="9677400" y="4667250"/>
-            <a:ext cx="838200" cy="292100"/>
+            <a:ext cx="838200" cy="327152"/>
           </a:xfrm>
           <a:prstGeom prst="rect">
             <a:avLst/>
@@ -7219,8 +7191,8 @@
           <a:noFill/>
         </p:spPr>
         <p:txBody>
-          <a:bodyPr wrap="square" lIns="0" rIns="0" tIns="0" bIns="0" anchor="t">
-            <a:spAutoFit/>
+          <a:bodyPr wrap="none" lIns="0" rIns="0" tIns="0" bIns="0" anchor="t">
+            <a:normAutofit/>
           </a:bodyPr>
           <a:lstStyle/>
           <a:p>
@@ -7252,8 +7224,8 @@
         </p:nvSpPr>
         <p:spPr>
           <a:xfrm>
-            <a:off x="6731000" y="5334000"/>
-            <a:ext cx="4254500" cy="419100"/>
+            <a:off x="6350000" y="5283200"/>
+            <a:ext cx="5207000" cy="628904"/>
           </a:xfrm>
           <a:prstGeom prst="rect">
             <a:avLst/>
@@ -7261,8 +7233,8 @@
           <a:noFill/>
         </p:spPr>
         <p:txBody>
-          <a:bodyPr wrap="square" lIns="0" rIns="0" tIns="0" bIns="0" anchor="t">
-            <a:spAutoFit/>
+          <a:bodyPr wrap="none" lIns="0" rIns="0" tIns="0" bIns="0" anchor="t">
+            <a:normAutofit/>
           </a:bodyPr>
           <a:lstStyle/>
           <a:p>
@@ -7275,13 +7247,14 @@
               </a:spcAft>
             </a:pPr>
             <a:r>
-              <a:rPr sz="3000" b="1">
+              <a:rPr sz="2200" b="1">
                 <a:solidFill>
                   <a:srgbClr val="F1B44C"/>
                 </a:solidFill>
                 <a:latin typeface="NanumSquare"/>
               </a:rPr>
-              <a:t>지역성 유지 ≠ 부하 균형</a:t>
+              <a:t>연구 공백 | 실제 LLM graph · p95/p99
+· 원격 byte를 한 조건에서 연결</a:t>
             </a:r>
           </a:p>
         </p:txBody>
@@ -7372,8 +7345,8 @@
           <a:noFill/>
         </p:spPr>
         <p:txBody>
-          <a:bodyPr wrap="square" lIns="0" rIns="0" tIns="0" bIns="0" anchor="t">
-            <a:spAutoFit/>
+          <a:bodyPr wrap="none" lIns="0" rIns="0" tIns="0" bIns="0" anchor="t">
+            <a:normAutofit/>
           </a:bodyPr>
           <a:lstStyle/>
           <a:p>
@@ -7392,7 +7365,7 @@
                 </a:solidFill>
                 <a:latin typeface="NanumSquare"/>
               </a:rPr>
-              <a:t>K26 Compute × Memory FPGA</a:t>
+              <a:t>연구 대상 구조와 구현 경계</a:t>
             </a:r>
           </a:p>
         </p:txBody>
@@ -7414,8 +7387,8 @@
           <a:noFill/>
         </p:spPr>
         <p:txBody>
-          <a:bodyPr wrap="square" lIns="0" rIns="0" tIns="0" bIns="0" anchor="t">
-            <a:spAutoFit/>
+          <a:bodyPr wrap="none" lIns="0" rIns="0" tIns="0" bIns="0" anchor="t">
+            <a:normAutofit/>
           </a:bodyPr>
           <a:lstStyle/>
           <a:p>
@@ -7434,7 +7407,7 @@
                 </a:solidFill>
                 <a:latin typeface="NanumSquare"/>
               </a:rPr>
-              <a:t>계산 소유권과 메모리 채널 친화도를 TileJob 단위로 분리한다.</a:t>
+              <a:t>K26의 계산 소유권과 Memory FPGA의 데이터 친화도를 TileJob에서 분리한다.</a:t>
             </a:r>
           </a:p>
         </p:txBody>
@@ -7448,7 +7421,7 @@
         <p:spPr>
           <a:xfrm>
             <a:off x="698500" y="1651000"/>
-            <a:ext cx="3873499" cy="304800"/>
+            <a:ext cx="3873499" cy="354584"/>
           </a:xfrm>
           <a:prstGeom prst="rect">
             <a:avLst/>
@@ -7456,8 +7429,8 @@
           <a:noFill/>
         </p:spPr>
         <p:txBody>
-          <a:bodyPr wrap="square" lIns="0" rIns="0" tIns="0" bIns="0" anchor="t">
-            <a:spAutoFit/>
+          <a:bodyPr wrap="none" lIns="0" rIns="0" tIns="0" bIns="0" anchor="t">
+            <a:normAutofit/>
           </a:bodyPr>
           <a:lstStyle/>
           <a:p>
@@ -7580,7 +7553,7 @@
         <p:spPr>
           <a:xfrm>
             <a:off x="920750" y="2667000"/>
-            <a:ext cx="889000" cy="381000"/>
+            <a:ext cx="889000" cy="436880"/>
           </a:xfrm>
           <a:prstGeom prst="rect">
             <a:avLst/>
@@ -7588,8 +7561,8 @@
           <a:noFill/>
         </p:spPr>
         <p:txBody>
-          <a:bodyPr wrap="square" lIns="0" rIns="0" tIns="0" bIns="0" anchor="ctr">
-            <a:spAutoFit/>
+          <a:bodyPr wrap="none" lIns="0" rIns="0" tIns="0" bIns="0" anchor="ctr">
+            <a:normAutofit/>
           </a:bodyPr>
           <a:lstStyle/>
           <a:p>
@@ -7668,7 +7641,7 @@
         <p:spPr>
           <a:xfrm>
             <a:off x="2197100" y="2571750"/>
-            <a:ext cx="2146300" cy="266700"/>
+            <a:ext cx="2146300" cy="299720"/>
           </a:xfrm>
           <a:prstGeom prst="rect">
             <a:avLst/>
@@ -7676,8 +7649,8 @@
           <a:noFill/>
         </p:spPr>
         <p:txBody>
-          <a:bodyPr wrap="square" lIns="0" rIns="0" tIns="0" bIns="0" anchor="t">
-            <a:spAutoFit/>
+          <a:bodyPr wrap="none" lIns="0" rIns="0" tIns="0" bIns="0" anchor="t">
+            <a:normAutofit/>
           </a:bodyPr>
           <a:lstStyle/>
           <a:p>
@@ -7755,7 +7728,7 @@
         <p:spPr>
           <a:xfrm>
             <a:off x="901700" y="3644900"/>
-            <a:ext cx="1657350" cy="355600"/>
+            <a:ext cx="1657350" cy="436880"/>
           </a:xfrm>
           <a:prstGeom prst="rect">
             <a:avLst/>
@@ -7763,8 +7736,8 @@
           <a:noFill/>
         </p:spPr>
         <p:txBody>
-          <a:bodyPr wrap="square" lIns="0" rIns="0" tIns="0" bIns="0" anchor="ctr">
-            <a:spAutoFit/>
+          <a:bodyPr wrap="none" lIns="0" rIns="0" tIns="0" bIns="0" anchor="ctr">
+            <a:normAutofit/>
           </a:bodyPr>
           <a:lstStyle/>
           <a:p>
@@ -7843,7 +7816,7 @@
         <p:spPr>
           <a:xfrm>
             <a:off x="2965450" y="3644900"/>
-            <a:ext cx="1657350" cy="355600"/>
+            <a:ext cx="1657350" cy="436880"/>
           </a:xfrm>
           <a:prstGeom prst="rect">
             <a:avLst/>
@@ -7851,8 +7824,8 @@
           <a:noFill/>
         </p:spPr>
         <p:txBody>
-          <a:bodyPr wrap="square" lIns="0" rIns="0" tIns="0" bIns="0" anchor="ctr">
-            <a:spAutoFit/>
+          <a:bodyPr wrap="none" lIns="0" rIns="0" tIns="0" bIns="0" anchor="ctr">
+            <a:normAutofit/>
           </a:bodyPr>
           <a:lstStyle/>
           <a:p>
@@ -7931,7 +7904,7 @@
         <p:spPr>
           <a:xfrm>
             <a:off x="901700" y="4406900"/>
-            <a:ext cx="1657350" cy="355600"/>
+            <a:ext cx="1657350" cy="436880"/>
           </a:xfrm>
           <a:prstGeom prst="rect">
             <a:avLst/>
@@ -7939,8 +7912,8 @@
           <a:noFill/>
         </p:spPr>
         <p:txBody>
-          <a:bodyPr wrap="square" lIns="0" rIns="0" tIns="0" bIns="0" anchor="ctr">
-            <a:spAutoFit/>
+          <a:bodyPr wrap="none" lIns="0" rIns="0" tIns="0" bIns="0" anchor="ctr">
+            <a:normAutofit/>
           </a:bodyPr>
           <a:lstStyle/>
           <a:p>
@@ -8019,7 +7992,7 @@
         <p:spPr>
           <a:xfrm>
             <a:off x="2965450" y="4406900"/>
-            <a:ext cx="1657350" cy="355600"/>
+            <a:ext cx="1657350" cy="436880"/>
           </a:xfrm>
           <a:prstGeom prst="rect">
             <a:avLst/>
@@ -8027,8 +8000,8 @@
           <a:noFill/>
         </p:spPr>
         <p:txBody>
-          <a:bodyPr wrap="square" lIns="0" rIns="0" tIns="0" bIns="0" anchor="ctr">
-            <a:spAutoFit/>
+          <a:bodyPr wrap="none" lIns="0" rIns="0" tIns="0" bIns="0" anchor="ctr">
+            <a:normAutofit/>
           </a:bodyPr>
           <a:lstStyle/>
           <a:p>
@@ -8061,8 +8034,8 @@
         </p:nvSpPr>
         <p:spPr>
           <a:xfrm>
-            <a:off x="5048250" y="2825750"/>
-            <a:ext cx="1397000" cy="292100"/>
+            <a:off x="4953000" y="2825750"/>
+            <a:ext cx="1587500" cy="292100"/>
           </a:xfrm>
           <a:prstGeom prst="rect">
             <a:avLst/>
@@ -8070,8 +8043,8 @@
           <a:noFill/>
         </p:spPr>
         <p:txBody>
-          <a:bodyPr wrap="square" lIns="0" rIns="0" tIns="0" bIns="0" anchor="t">
-            <a:spAutoFit/>
+          <a:bodyPr wrap="none" lIns="0" rIns="0" tIns="0" bIns="0" anchor="t">
+            <a:normAutofit/>
           </a:bodyPr>
           <a:lstStyle/>
           <a:p>
@@ -8090,7 +8063,7 @@
                 </a:solidFill>
                 <a:latin typeface="NanumSquare"/>
               </a:rPr>
-              <a:t>요청·제어  →</a:t>
+              <a:t>요청·제어 →</a:t>
             </a:r>
           </a:p>
         </p:txBody>
@@ -8103,8 +8076,8 @@
         </p:nvSpPr>
         <p:spPr>
           <a:xfrm>
-            <a:off x="5048250" y="3397250"/>
-            <a:ext cx="1397000" cy="292100"/>
+            <a:off x="4953000" y="3397250"/>
+            <a:ext cx="1587500" cy="292100"/>
           </a:xfrm>
           <a:prstGeom prst="rect">
             <a:avLst/>
@@ -8112,8 +8085,8 @@
           <a:noFill/>
         </p:spPr>
         <p:txBody>
-          <a:bodyPr wrap="square" lIns="0" rIns="0" tIns="0" bIns="0" anchor="t">
-            <a:spAutoFit/>
+          <a:bodyPr wrap="none" lIns="0" rIns="0" tIns="0" bIns="0" anchor="t">
+            <a:normAutofit/>
           </a:bodyPr>
           <a:lstStyle/>
           <a:p>
@@ -8132,7 +8105,7 @@
                 </a:solidFill>
                 <a:latin typeface="NanumSquare"/>
               </a:rPr>
-              <a:t>←  가중치 응답</a:t>
+              <a:t>← 가중치 응답</a:t>
             </a:r>
           </a:p>
         </p:txBody>
@@ -8145,8 +8118,8 @@
         </p:nvSpPr>
         <p:spPr>
           <a:xfrm>
-            <a:off x="5048250" y="3905249"/>
-            <a:ext cx="1397000" cy="254000"/>
+            <a:off x="4953000" y="3905249"/>
+            <a:ext cx="1587500" cy="254000"/>
           </a:xfrm>
           <a:prstGeom prst="rect">
             <a:avLst/>
@@ -8154,8 +8127,8 @@
           <a:noFill/>
         </p:spPr>
         <p:txBody>
-          <a:bodyPr wrap="square" lIns="0" rIns="0" tIns="0" bIns="0" anchor="t">
-            <a:spAutoFit/>
+          <a:bodyPr wrap="none" lIns="0" rIns="0" tIns="0" bIns="0" anchor="t">
+            <a:normAutofit/>
           </a:bodyPr>
           <a:lstStyle/>
           <a:p>
@@ -8187,8 +8160,8 @@
         </p:nvSpPr>
         <p:spPr>
           <a:xfrm>
-            <a:off x="5048250" y="4286250"/>
-            <a:ext cx="1397000" cy="228600"/>
+            <a:off x="4953000" y="4286250"/>
+            <a:ext cx="1587500" cy="228600"/>
           </a:xfrm>
           <a:prstGeom prst="rect">
             <a:avLst/>
@@ -8196,8 +8169,8 @@
           <a:noFill/>
         </p:spPr>
         <p:txBody>
-          <a:bodyPr wrap="square" lIns="0" rIns="0" tIns="0" bIns="0" anchor="t">
-            <a:spAutoFit/>
+          <a:bodyPr wrap="none" lIns="0" rIns="0" tIns="0" bIns="0" anchor="t">
+            <a:normAutofit/>
           </a:bodyPr>
           <a:lstStyle/>
           <a:p>
@@ -8230,7 +8203,7 @@
         <p:spPr>
           <a:xfrm>
             <a:off x="6794500" y="1651000"/>
-            <a:ext cx="4127500" cy="304800"/>
+            <a:ext cx="4127500" cy="354584"/>
           </a:xfrm>
           <a:prstGeom prst="rect">
             <a:avLst/>
@@ -8238,8 +8211,8 @@
           <a:noFill/>
         </p:spPr>
         <p:txBody>
-          <a:bodyPr wrap="square" lIns="0" rIns="0" tIns="0" bIns="0" anchor="t">
-            <a:spAutoFit/>
+          <a:bodyPr wrap="none" lIns="0" rIns="0" tIns="0" bIns="0" anchor="t">
+            <a:normAutofit/>
           </a:bodyPr>
           <a:lstStyle/>
           <a:p>
@@ -8362,7 +8335,7 @@
         <p:spPr>
           <a:xfrm>
             <a:off x="7112000" y="2552700"/>
-            <a:ext cx="3937000" cy="279400"/>
+            <a:ext cx="3937000" cy="299720"/>
           </a:xfrm>
           <a:prstGeom prst="rect">
             <a:avLst/>
@@ -8370,8 +8343,8 @@
           <a:noFill/>
         </p:spPr>
         <p:txBody>
-          <a:bodyPr wrap="square" lIns="0" rIns="0" tIns="0" bIns="0" anchor="t">
-            <a:spAutoFit/>
+          <a:bodyPr wrap="none" lIns="0" rIns="0" tIns="0" bIns="0" anchor="t">
+            <a:normAutofit/>
           </a:bodyPr>
           <a:lstStyle/>
           <a:p>
@@ -8449,7 +8422,7 @@
         <p:spPr>
           <a:xfrm>
             <a:off x="7099300" y="3797300"/>
-            <a:ext cx="736600" cy="482600"/>
+            <a:ext cx="736600" cy="491744"/>
           </a:xfrm>
           <a:prstGeom prst="rect">
             <a:avLst/>
@@ -8457,8 +8430,8 @@
           <a:noFill/>
         </p:spPr>
         <p:txBody>
-          <a:bodyPr wrap="square" lIns="0" rIns="0" tIns="0" bIns="0" anchor="ctr">
-            <a:spAutoFit/>
+          <a:bodyPr wrap="none" lIns="0" rIns="0" tIns="0" bIns="0" anchor="ctr">
+            <a:normAutofit/>
           </a:bodyPr>
           <a:lstStyle/>
           <a:p>
@@ -8471,7 +8444,7 @@
               </a:spcAft>
             </a:pPr>
             <a:r>
-              <a:rPr sz="1900" b="1">
+              <a:rPr sz="1700" b="1">
                 <a:solidFill>
                   <a:srgbClr val="F4F7FB"/>
                 </a:solidFill>
@@ -8537,7 +8510,7 @@
         <p:spPr>
           <a:xfrm>
             <a:off x="8115300" y="3797300"/>
-            <a:ext cx="736600" cy="482600"/>
+            <a:ext cx="736600" cy="491744"/>
           </a:xfrm>
           <a:prstGeom prst="rect">
             <a:avLst/>
@@ -8545,8 +8518,8 @@
           <a:noFill/>
         </p:spPr>
         <p:txBody>
-          <a:bodyPr wrap="square" lIns="0" rIns="0" tIns="0" bIns="0" anchor="ctr">
-            <a:spAutoFit/>
+          <a:bodyPr wrap="none" lIns="0" rIns="0" tIns="0" bIns="0" anchor="ctr">
+            <a:normAutofit/>
           </a:bodyPr>
           <a:lstStyle/>
           <a:p>
@@ -8559,7 +8532,7 @@
               </a:spcAft>
             </a:pPr>
             <a:r>
-              <a:rPr sz="1900" b="1">
+              <a:rPr sz="1700" b="1">
                 <a:solidFill>
                   <a:srgbClr val="F4F7FB"/>
                 </a:solidFill>
@@ -8625,7 +8598,7 @@
         <p:spPr>
           <a:xfrm>
             <a:off x="9131300" y="3797300"/>
-            <a:ext cx="736600" cy="482600"/>
+            <a:ext cx="736600" cy="491744"/>
           </a:xfrm>
           <a:prstGeom prst="rect">
             <a:avLst/>
@@ -8633,8 +8606,8 @@
           <a:noFill/>
         </p:spPr>
         <p:txBody>
-          <a:bodyPr wrap="square" lIns="0" rIns="0" tIns="0" bIns="0" anchor="ctr">
-            <a:spAutoFit/>
+          <a:bodyPr wrap="none" lIns="0" rIns="0" tIns="0" bIns="0" anchor="ctr">
+            <a:normAutofit/>
           </a:bodyPr>
           <a:lstStyle/>
           <a:p>
@@ -8647,7 +8620,7 @@
               </a:spcAft>
             </a:pPr>
             <a:r>
-              <a:rPr sz="1900" b="1">
+              <a:rPr sz="1700" b="1">
                 <a:solidFill>
                   <a:srgbClr val="F4F7FB"/>
                 </a:solidFill>
@@ -8713,7 +8686,7 @@
         <p:spPr>
           <a:xfrm>
             <a:off x="10147300" y="3797300"/>
-            <a:ext cx="736600" cy="482600"/>
+            <a:ext cx="736600" cy="491744"/>
           </a:xfrm>
           <a:prstGeom prst="rect">
             <a:avLst/>
@@ -8721,8 +8694,8 @@
           <a:noFill/>
         </p:spPr>
         <p:txBody>
-          <a:bodyPr wrap="square" lIns="0" rIns="0" tIns="0" bIns="0" anchor="ctr">
-            <a:spAutoFit/>
+          <a:bodyPr wrap="none" lIns="0" rIns="0" tIns="0" bIns="0" anchor="ctr">
+            <a:normAutofit/>
           </a:bodyPr>
           <a:lstStyle/>
           <a:p>
@@ -8735,7 +8708,7 @@
               </a:spcAft>
             </a:pPr>
             <a:r>
-              <a:rPr sz="1900" b="1">
+              <a:rPr sz="1700" b="1">
                 <a:solidFill>
                   <a:srgbClr val="F4F7FB"/>
                 </a:solidFill>
@@ -8764,8 +8737,8 @@
           <a:noFill/>
         </p:spPr>
         <p:txBody>
-          <a:bodyPr wrap="square" lIns="0" rIns="0" tIns="0" bIns="0" anchor="t">
-            <a:spAutoFit/>
+          <a:bodyPr wrap="none" lIns="0" rIns="0" tIns="0" bIns="0" anchor="t">
+            <a:normAutofit/>
           </a:bodyPr>
           <a:lstStyle/>
           <a:p>
@@ -8875,8 +8848,8 @@
           <a:noFill/>
         </p:spPr>
         <p:txBody>
-          <a:bodyPr wrap="square" lIns="0" rIns="0" tIns="0" bIns="0" anchor="t">
-            <a:spAutoFit/>
+          <a:bodyPr wrap="none" lIns="0" rIns="0" tIns="0" bIns="0" anchor="t">
+            <a:normAutofit/>
           </a:bodyPr>
           <a:lstStyle/>
           <a:p>
@@ -8895,7 +8868,7 @@
                 </a:solidFill>
                 <a:latin typeface="NanumSquare"/>
               </a:rPr>
-              <a:t>유휴 클러스터가 일을 훔치는 5단계</a:t>
+              <a:t>지역성 비용을 반영한 Work Stealing</a:t>
             </a:r>
           </a:p>
         </p:txBody>
@@ -8917,8 +8890,8 @@
           <a:noFill/>
         </p:spPr>
         <p:txBody>
-          <a:bodyPr wrap="square" lIns="0" rIns="0" tIns="0" bIns="0" anchor="t">
-            <a:spAutoFit/>
+          <a:bodyPr wrap="none" lIns="0" rIns="0" tIns="0" bIns="0" anchor="t">
+            <a:normAutofit/>
           </a:bodyPr>
           <a:lstStyle/>
           <a:p>
@@ -8937,21 +8910,80 @@
                 </a:solidFill>
                 <a:latin typeface="NanumSquare"/>
               </a:rPr>
-              <a:t>S3는 오래된 작업 중 이동 비용을 감수할 가치가 있는 타일만 선택한다.</a:t>
-            </a:r>
-          </a:p>
-        </p:txBody>
-      </p:sp>
-      <p:sp>
-        <p:nvSpPr>
-          <p:cNvPr id="5" name="TextBox 4"/>
+              <a:t>S3는 job age에서 원격 이동 비용을 뺀 점수가 양수인 작업만 훔친다.</a:t>
+            </a:r>
+          </a:p>
+        </p:txBody>
+      </p:sp>
+      <p:pic>
+        <p:nvPicPr>
+          <p:cNvPr id="5" name="Picture 4" descr="003_work_stealing_sequence_frame_1680x660.png"/>
+          <p:cNvPicPr>
+            <a:picLocks noChangeAspect="1"/>
+          </p:cNvPicPr>
+          <p:nvPr/>
+        </p:nvPicPr>
+        <p:blipFill>
+          <a:blip r:embed="rId2"/>
+          <a:stretch>
+            <a:fillRect/>
+          </a:stretch>
+        </p:blipFill>
+        <p:spPr>
+          <a:xfrm>
+            <a:off x="762000" y="1492250"/>
+            <a:ext cx="10668000" cy="4190999"/>
+          </a:xfrm>
+          <a:prstGeom prst="rect">
+            <a:avLst/>
+          </a:prstGeom>
+        </p:spPr>
+      </p:pic>
+      <p:cxnSp>
+        <p:nvCxnSpPr>
+          <p:cNvPr id="6" name="Connector 5"/>
+          <p:cNvCxnSpPr/>
+          <p:nvPr/>
+        </p:nvCxnSpPr>
+        <p:spPr>
+          <a:xfrm>
+            <a:off x="1651000" y="5956300"/>
+            <a:ext cx="8890000" cy="0"/>
+          </a:xfrm>
+          <a:prstGeom prst="line">
+            <a:avLst/>
+          </a:prstGeom>
+          <a:ln w="25400">
+            <a:solidFill>
+              <a:srgbClr val="20364D"/>
+            </a:solidFill>
+          </a:ln>
+        </p:spPr>
+        <p:style>
+          <a:lnRef idx="2">
+            <a:schemeClr val="accent1"/>
+          </a:lnRef>
+          <a:fillRef idx="0">
+            <a:schemeClr val="accent1"/>
+          </a:fillRef>
+          <a:effectRef idx="1">
+            <a:schemeClr val="accent1"/>
+          </a:effectRef>
+          <a:fontRef idx="minor">
+            <a:schemeClr val="tx1"/>
+          </a:fontRef>
+        </p:style>
+      </p:cxnSp>
+      <p:sp>
+        <p:nvSpPr>
+          <p:cNvPr id="7" name="TextBox 6"/>
           <p:cNvSpPr txBox="1"/>
           <p:nvPr/>
         </p:nvSpPr>
         <p:spPr>
           <a:xfrm>
-            <a:off x="762000" y="1587500"/>
-            <a:ext cx="4699000" cy="292100"/>
+            <a:off x="1143000" y="6096000"/>
+            <a:ext cx="9906000" cy="304800"/>
           </a:xfrm>
           <a:prstGeom prst="rect">
             <a:avLst/>
@@ -8959,12 +8991,12 @@
           <a:noFill/>
         </p:spPr>
         <p:txBody>
-          <a:bodyPr wrap="square" lIns="0" rIns="0" tIns="0" bIns="0" anchor="t">
-            <a:spAutoFit/>
+          <a:bodyPr wrap="none" lIns="0" rIns="0" tIns="0" bIns="0" anchor="t">
+            <a:normAutofit/>
           </a:bodyPr>
           <a:lstStyle/>
           <a:p>
-            <a:pPr algn="l">
+            <a:pPr algn="ctr">
               <a:spcBef>
                 <a:spcPts val="0"/>
               </a:spcBef>
@@ -8973,1300 +9005,13 @@
               </a:spcAft>
             </a:pPr>
             <a:r>
-              <a:rPr sz="2300" b="1">
+              <a:rPr sz="2000" b="1">
                 <a:solidFill>
                   <a:srgbClr val="36D7E7"/>
                 </a:solidFill>
                 <a:latin typeface="NanumSquare"/>
               </a:rPr>
-              <a:t>S3 지역성 인식 Work Stealing</a:t>
-            </a:r>
-          </a:p>
-        </p:txBody>
-      </p:sp>
-      <p:sp>
-        <p:nvSpPr>
-          <p:cNvPr id="6" name="Oval 5"/>
-          <p:cNvSpPr/>
-          <p:nvPr/>
-        </p:nvSpPr>
-        <p:spPr>
-          <a:xfrm>
-            <a:off x="857250" y="3048000"/>
-            <a:ext cx="711200" cy="711200"/>
-          </a:xfrm>
-          <a:prstGeom prst="ellipse">
-            <a:avLst/>
-          </a:prstGeom>
-          <a:solidFill>
-            <a:srgbClr val="102238"/>
-          </a:solidFill>
-          <a:ln w="38100">
-            <a:solidFill>
-              <a:srgbClr val="4C8DFF"/>
-            </a:solidFill>
-          </a:ln>
-        </p:spPr>
-        <p:style>
-          <a:lnRef idx="1">
-            <a:schemeClr val="accent1"/>
-          </a:lnRef>
-          <a:fillRef idx="3">
-            <a:schemeClr val="accent1"/>
-          </a:fillRef>
-          <a:effectRef idx="2">
-            <a:schemeClr val="accent1"/>
-          </a:effectRef>
-          <a:fontRef idx="minor">
-            <a:schemeClr val="lt1"/>
-          </a:fontRef>
-        </p:style>
-        <p:txBody>
-          <a:bodyPr rtlCol="0" anchor="ctr"/>
-          <a:lstStyle/>
-          <a:p>
-            <a:pPr algn="ctr"/>
-          </a:p>
-        </p:txBody>
-      </p:sp>
-      <p:sp>
-        <p:nvSpPr>
-          <p:cNvPr id="7" name="TextBox 6"/>
-          <p:cNvSpPr txBox="1"/>
-          <p:nvPr/>
-        </p:nvSpPr>
-        <p:spPr>
-          <a:xfrm>
-            <a:off x="857250" y="3162300"/>
-            <a:ext cx="711200" cy="444500"/>
-          </a:xfrm>
-          <a:prstGeom prst="rect">
-            <a:avLst/>
-          </a:prstGeom>
-          <a:noFill/>
-        </p:spPr>
-        <p:txBody>
-          <a:bodyPr wrap="square" lIns="0" rIns="0" tIns="0" bIns="0" anchor="ctr">
-            <a:spAutoFit/>
-          </a:bodyPr>
-          <a:lstStyle/>
-          <a:p>
-            <a:pPr algn="ctr">
-              <a:spcBef>
-                <a:spcPts val="0"/>
-              </a:spcBef>
-              <a:spcAft>
-                <a:spcPts val="0"/>
-              </a:spcAft>
-            </a:pPr>
-            <a:r>
-              <a:rPr sz="3200" b="1">
-                <a:solidFill>
-                  <a:srgbClr val="4C8DFF"/>
-                </a:solidFill>
-                <a:latin typeface="NanumSquare"/>
-              </a:rPr>
-              <a:t>1</a:t>
-            </a:r>
-          </a:p>
-        </p:txBody>
-      </p:sp>
-      <p:sp>
-        <p:nvSpPr>
-          <p:cNvPr id="8" name="TextBox 7"/>
-          <p:cNvSpPr txBox="1"/>
-          <p:nvPr/>
-        </p:nvSpPr>
-        <p:spPr>
-          <a:xfrm>
-            <a:off x="412750" y="3968750"/>
-            <a:ext cx="1600200" cy="279400"/>
-          </a:xfrm>
-          <a:prstGeom prst="rect">
-            <a:avLst/>
-          </a:prstGeom>
-          <a:noFill/>
-        </p:spPr>
-        <p:txBody>
-          <a:bodyPr wrap="square" lIns="0" rIns="0" tIns="0" bIns="0" anchor="t">
-            <a:spAutoFit/>
-          </a:bodyPr>
-          <a:lstStyle/>
-          <a:p>
-            <a:pPr algn="ctr">
-              <a:spcBef>
-                <a:spcPts val="0"/>
-              </a:spcBef>
-              <a:spcAft>
-                <a:spcPts val="0"/>
-              </a:spcAft>
-            </a:pPr>
-            <a:r>
-              <a:rPr sz="2100" b="1">
-                <a:solidFill>
-                  <a:srgbClr val="F4F7FB"/>
-                </a:solidFill>
-                <a:latin typeface="NanumSquare"/>
-              </a:rPr>
-              <a:t>큐 불균형</a:t>
-            </a:r>
-          </a:p>
-        </p:txBody>
-      </p:sp>
-      <p:sp>
-        <p:nvSpPr>
-          <p:cNvPr id="9" name="TextBox 8"/>
-          <p:cNvSpPr txBox="1"/>
-          <p:nvPr/>
-        </p:nvSpPr>
-        <p:spPr>
-          <a:xfrm>
-            <a:off x="285750" y="4286250"/>
-            <a:ext cx="1854200" cy="431800"/>
-          </a:xfrm>
-          <a:prstGeom prst="rect">
-            <a:avLst/>
-          </a:prstGeom>
-          <a:noFill/>
-        </p:spPr>
-        <p:txBody>
-          <a:bodyPr wrap="square" lIns="0" rIns="0" tIns="0" bIns="0" anchor="t">
-            <a:spAutoFit/>
-          </a:bodyPr>
-          <a:lstStyle/>
-          <a:p>
-            <a:pPr algn="ctr">
-              <a:spcBef>
-                <a:spcPts val="0"/>
-              </a:spcBef>
-              <a:spcAft>
-                <a:spcPts val="0"/>
-              </a:spcAft>
-            </a:pPr>
-            <a:r>
-              <a:rPr sz="1600" b="0">
-                <a:solidFill>
-                  <a:srgbClr val="91A5BA"/>
-                </a:solidFill>
-                <a:latin typeface="NanumSquare"/>
-              </a:rPr>
-              <a:t>한쪽 큐만 증가</a:t>
-            </a:r>
-          </a:p>
-        </p:txBody>
-      </p:sp>
-      <p:sp>
-        <p:nvSpPr>
-          <p:cNvPr id="10" name="Chevron 9"/>
-          <p:cNvSpPr/>
-          <p:nvPr/>
-        </p:nvSpPr>
-        <p:spPr>
-          <a:xfrm>
-            <a:off x="1809750" y="3270250"/>
-            <a:ext cx="793750" cy="292100"/>
-          </a:xfrm>
-          <a:prstGeom prst="chevron">
-            <a:avLst/>
-          </a:prstGeom>
-          <a:solidFill>
-            <a:srgbClr val="4C8DFF"/>
-          </a:solidFill>
-          <a:ln>
-            <a:noFill/>
-          </a:ln>
-        </p:spPr>
-        <p:style>
-          <a:lnRef idx="1">
-            <a:schemeClr val="accent1"/>
-          </a:lnRef>
-          <a:fillRef idx="3">
-            <a:schemeClr val="accent1"/>
-          </a:fillRef>
-          <a:effectRef idx="2">
-            <a:schemeClr val="accent1"/>
-          </a:effectRef>
-          <a:fontRef idx="minor">
-            <a:schemeClr val="lt1"/>
-          </a:fontRef>
-        </p:style>
-        <p:txBody>
-          <a:bodyPr rtlCol="0" anchor="ctr"/>
-          <a:lstStyle/>
-          <a:p>
-            <a:pPr algn="ctr"/>
-          </a:p>
-        </p:txBody>
-      </p:sp>
-      <p:sp>
-        <p:nvSpPr>
-          <p:cNvPr id="11" name="Oval 10"/>
-          <p:cNvSpPr/>
-          <p:nvPr/>
-        </p:nvSpPr>
-        <p:spPr>
-          <a:xfrm>
-            <a:off x="3079750" y="3048000"/>
-            <a:ext cx="711200" cy="711200"/>
-          </a:xfrm>
-          <a:prstGeom prst="ellipse">
-            <a:avLst/>
-          </a:prstGeom>
-          <a:solidFill>
-            <a:srgbClr val="102238"/>
-          </a:solidFill>
-          <a:ln w="38100">
-            <a:solidFill>
-              <a:srgbClr val="4C8DFF"/>
-            </a:solidFill>
-          </a:ln>
-        </p:spPr>
-        <p:style>
-          <a:lnRef idx="1">
-            <a:schemeClr val="accent1"/>
-          </a:lnRef>
-          <a:fillRef idx="3">
-            <a:schemeClr val="accent1"/>
-          </a:fillRef>
-          <a:effectRef idx="2">
-            <a:schemeClr val="accent1"/>
-          </a:effectRef>
-          <a:fontRef idx="minor">
-            <a:schemeClr val="lt1"/>
-          </a:fontRef>
-        </p:style>
-        <p:txBody>
-          <a:bodyPr rtlCol="0" anchor="ctr"/>
-          <a:lstStyle/>
-          <a:p>
-            <a:pPr algn="ctr"/>
-          </a:p>
-        </p:txBody>
-      </p:sp>
-      <p:sp>
-        <p:nvSpPr>
-          <p:cNvPr id="12" name="TextBox 11"/>
-          <p:cNvSpPr txBox="1"/>
-          <p:nvPr/>
-        </p:nvSpPr>
-        <p:spPr>
-          <a:xfrm>
-            <a:off x="3079750" y="3162300"/>
-            <a:ext cx="711200" cy="444500"/>
-          </a:xfrm>
-          <a:prstGeom prst="rect">
-            <a:avLst/>
-          </a:prstGeom>
-          <a:noFill/>
-        </p:spPr>
-        <p:txBody>
-          <a:bodyPr wrap="square" lIns="0" rIns="0" tIns="0" bIns="0" anchor="ctr">
-            <a:spAutoFit/>
-          </a:bodyPr>
-          <a:lstStyle/>
-          <a:p>
-            <a:pPr algn="ctr">
-              <a:spcBef>
-                <a:spcPts val="0"/>
-              </a:spcBef>
-              <a:spcAft>
-                <a:spcPts val="0"/>
-              </a:spcAft>
-            </a:pPr>
-            <a:r>
-              <a:rPr sz="3200" b="1">
-                <a:solidFill>
-                  <a:srgbClr val="4C8DFF"/>
-                </a:solidFill>
-                <a:latin typeface="NanumSquare"/>
-              </a:rPr>
-              <a:t>2</a:t>
-            </a:r>
-          </a:p>
-        </p:txBody>
-      </p:sp>
-      <p:sp>
-        <p:nvSpPr>
-          <p:cNvPr id="13" name="TextBox 12"/>
-          <p:cNvSpPr txBox="1"/>
-          <p:nvPr/>
-        </p:nvSpPr>
-        <p:spPr>
-          <a:xfrm>
-            <a:off x="2635250" y="3968750"/>
-            <a:ext cx="1600200" cy="279400"/>
-          </a:xfrm>
-          <a:prstGeom prst="rect">
-            <a:avLst/>
-          </a:prstGeom>
-          <a:noFill/>
-        </p:spPr>
-        <p:txBody>
-          <a:bodyPr wrap="square" lIns="0" rIns="0" tIns="0" bIns="0" anchor="t">
-            <a:spAutoFit/>
-          </a:bodyPr>
-          <a:lstStyle/>
-          <a:p>
-            <a:pPr algn="ctr">
-              <a:spcBef>
-                <a:spcPts val="0"/>
-              </a:spcBef>
-              <a:spcAft>
-                <a:spcPts val="0"/>
-              </a:spcAft>
-            </a:pPr>
-            <a:r>
-              <a:rPr sz="2100" b="1">
-                <a:solidFill>
-                  <a:srgbClr val="F4F7FB"/>
-                </a:solidFill>
-                <a:latin typeface="NanumSquare"/>
-              </a:rPr>
-              <a:t>피해 큐 탐색</a:t>
-            </a:r>
-          </a:p>
-        </p:txBody>
-      </p:sp>
-      <p:sp>
-        <p:nvSpPr>
-          <p:cNvPr id="14" name="TextBox 13"/>
-          <p:cNvSpPr txBox="1"/>
-          <p:nvPr/>
-        </p:nvSpPr>
-        <p:spPr>
-          <a:xfrm>
-            <a:off x="2508250" y="4286250"/>
-            <a:ext cx="1854200" cy="431800"/>
-          </a:xfrm>
-          <a:prstGeom prst="rect">
-            <a:avLst/>
-          </a:prstGeom>
-          <a:noFill/>
-        </p:spPr>
-        <p:txBody>
-          <a:bodyPr wrap="square" lIns="0" rIns="0" tIns="0" bIns="0" anchor="t">
-            <a:spAutoFit/>
-          </a:bodyPr>
-          <a:lstStyle/>
-          <a:p>
-            <a:pPr algn="ctr">
-              <a:spcBef>
-                <a:spcPts val="0"/>
-              </a:spcBef>
-              <a:spcAft>
-                <a:spcPts val="0"/>
-              </a:spcAft>
-            </a:pPr>
-            <a:r>
-              <a:rPr sz="1600" b="0">
-                <a:solidFill>
-                  <a:srgbClr val="91A5BA"/>
-                </a:solidFill>
-                <a:latin typeface="NanumSquare"/>
-              </a:rPr>
-              <a:t>실행 가능한 작업 검색</a:t>
-            </a:r>
-          </a:p>
-        </p:txBody>
-      </p:sp>
-      <p:sp>
-        <p:nvSpPr>
-          <p:cNvPr id="15" name="Chevron 14"/>
-          <p:cNvSpPr/>
-          <p:nvPr/>
-        </p:nvSpPr>
-        <p:spPr>
-          <a:xfrm>
-            <a:off x="4032250" y="3270250"/>
-            <a:ext cx="793750" cy="292100"/>
-          </a:xfrm>
-          <a:prstGeom prst="chevron">
-            <a:avLst/>
-          </a:prstGeom>
-          <a:solidFill>
-            <a:srgbClr val="28B6A6"/>
-          </a:solidFill>
-          <a:ln>
-            <a:noFill/>
-          </a:ln>
-        </p:spPr>
-        <p:style>
-          <a:lnRef idx="1">
-            <a:schemeClr val="accent1"/>
-          </a:lnRef>
-          <a:fillRef idx="3">
-            <a:schemeClr val="accent1"/>
-          </a:fillRef>
-          <a:effectRef idx="2">
-            <a:schemeClr val="accent1"/>
-          </a:effectRef>
-          <a:fontRef idx="minor">
-            <a:schemeClr val="lt1"/>
-          </a:fontRef>
-        </p:style>
-        <p:txBody>
-          <a:bodyPr rtlCol="0" anchor="ctr"/>
-          <a:lstStyle/>
-          <a:p>
-            <a:pPr algn="ctr"/>
-          </a:p>
-        </p:txBody>
-      </p:sp>
-      <p:sp>
-        <p:nvSpPr>
-          <p:cNvPr id="16" name="Oval 15"/>
-          <p:cNvSpPr/>
-          <p:nvPr/>
-        </p:nvSpPr>
-        <p:spPr>
-          <a:xfrm>
-            <a:off x="5302250" y="3048000"/>
-            <a:ext cx="711200" cy="711200"/>
-          </a:xfrm>
-          <a:prstGeom prst="ellipse">
-            <a:avLst/>
-          </a:prstGeom>
-          <a:solidFill>
-            <a:srgbClr val="102238"/>
-          </a:solidFill>
-          <a:ln w="38100">
-            <a:solidFill>
-              <a:srgbClr val="36D7E7"/>
-            </a:solidFill>
-          </a:ln>
-        </p:spPr>
-        <p:style>
-          <a:lnRef idx="1">
-            <a:schemeClr val="accent1"/>
-          </a:lnRef>
-          <a:fillRef idx="3">
-            <a:schemeClr val="accent1"/>
-          </a:fillRef>
-          <a:effectRef idx="2">
-            <a:schemeClr val="accent1"/>
-          </a:effectRef>
-          <a:fontRef idx="minor">
-            <a:schemeClr val="lt1"/>
-          </a:fontRef>
-        </p:style>
-        <p:txBody>
-          <a:bodyPr rtlCol="0" anchor="ctr"/>
-          <a:lstStyle/>
-          <a:p>
-            <a:pPr algn="ctr"/>
-          </a:p>
-        </p:txBody>
-      </p:sp>
-      <p:sp>
-        <p:nvSpPr>
-          <p:cNvPr id="17" name="TextBox 16"/>
-          <p:cNvSpPr txBox="1"/>
-          <p:nvPr/>
-        </p:nvSpPr>
-        <p:spPr>
-          <a:xfrm>
-            <a:off x="5302250" y="3162300"/>
-            <a:ext cx="711200" cy="444500"/>
-          </a:xfrm>
-          <a:prstGeom prst="rect">
-            <a:avLst/>
-          </a:prstGeom>
-          <a:noFill/>
-        </p:spPr>
-        <p:txBody>
-          <a:bodyPr wrap="square" lIns="0" rIns="0" tIns="0" bIns="0" anchor="ctr">
-            <a:spAutoFit/>
-          </a:bodyPr>
-          <a:lstStyle/>
-          <a:p>
-            <a:pPr algn="ctr">
-              <a:spcBef>
-                <a:spcPts val="0"/>
-              </a:spcBef>
-              <a:spcAft>
-                <a:spcPts val="0"/>
-              </a:spcAft>
-            </a:pPr>
-            <a:r>
-              <a:rPr sz="3200" b="1">
-                <a:solidFill>
-                  <a:srgbClr val="36D7E7"/>
-                </a:solidFill>
-                <a:latin typeface="NanumSquare"/>
-              </a:rPr>
-              <a:t>3</a:t>
-            </a:r>
-          </a:p>
-        </p:txBody>
-      </p:sp>
-      <p:sp>
-        <p:nvSpPr>
-          <p:cNvPr id="18" name="TextBox 17"/>
-          <p:cNvSpPr txBox="1"/>
-          <p:nvPr/>
-        </p:nvSpPr>
-        <p:spPr>
-          <a:xfrm>
-            <a:off x="4857750" y="3968750"/>
-            <a:ext cx="1600200" cy="279400"/>
-          </a:xfrm>
-          <a:prstGeom prst="rect">
-            <a:avLst/>
-          </a:prstGeom>
-          <a:noFill/>
-        </p:spPr>
-        <p:txBody>
-          <a:bodyPr wrap="square" lIns="0" rIns="0" tIns="0" bIns="0" anchor="t">
-            <a:spAutoFit/>
-          </a:bodyPr>
-          <a:lstStyle/>
-          <a:p>
-            <a:pPr algn="ctr">
-              <a:spcBef>
-                <a:spcPts val="0"/>
-              </a:spcBef>
-              <a:spcAft>
-                <a:spcPts val="0"/>
-              </a:spcAft>
-            </a:pPr>
-            <a:r>
-              <a:rPr sz="2100" b="1">
-                <a:solidFill>
-                  <a:srgbClr val="F4F7FB"/>
-                </a:solidFill>
-                <a:latin typeface="NanumSquare"/>
-              </a:rPr>
-              <a:t>지역성 점수</a:t>
-            </a:r>
-          </a:p>
-        </p:txBody>
-      </p:sp>
-      <p:sp>
-        <p:nvSpPr>
-          <p:cNvPr id="19" name="TextBox 18"/>
-          <p:cNvSpPr txBox="1"/>
-          <p:nvPr/>
-        </p:nvSpPr>
-        <p:spPr>
-          <a:xfrm>
-            <a:off x="4730750" y="4286250"/>
-            <a:ext cx="1854200" cy="431800"/>
-          </a:xfrm>
-          <a:prstGeom prst="rect">
-            <a:avLst/>
-          </a:prstGeom>
-          <a:noFill/>
-        </p:spPr>
-        <p:txBody>
-          <a:bodyPr wrap="square" lIns="0" rIns="0" tIns="0" bIns="0" anchor="t">
-            <a:spAutoFit/>
-          </a:bodyPr>
-          <a:lstStyle/>
-          <a:p>
-            <a:pPr algn="ctr">
-              <a:spcBef>
-                <a:spcPts val="0"/>
-              </a:spcBef>
-              <a:spcAft>
-                <a:spcPts val="0"/>
-              </a:spcAft>
-            </a:pPr>
-            <a:r>
-              <a:rPr sz="1600" b="0">
-                <a:solidFill>
-                  <a:srgbClr val="91A5BA"/>
-                </a:solidFill>
-                <a:latin typeface="NanumSquare"/>
-              </a:rPr>
-              <a:t>대기 시간 - 이동 비용</a:t>
-            </a:r>
-          </a:p>
-        </p:txBody>
-      </p:sp>
-      <p:sp>
-        <p:nvSpPr>
-          <p:cNvPr id="20" name="Chevron 19"/>
-          <p:cNvSpPr/>
-          <p:nvPr/>
-        </p:nvSpPr>
-        <p:spPr>
-          <a:xfrm>
-            <a:off x="6254750" y="3270250"/>
-            <a:ext cx="793750" cy="292100"/>
-          </a:xfrm>
-          <a:prstGeom prst="chevron">
-            <a:avLst/>
-          </a:prstGeom>
-          <a:solidFill>
-            <a:srgbClr val="28B6A6"/>
-          </a:solidFill>
-          <a:ln>
-            <a:noFill/>
-          </a:ln>
-        </p:spPr>
-        <p:style>
-          <a:lnRef idx="1">
-            <a:schemeClr val="accent1"/>
-          </a:lnRef>
-          <a:fillRef idx="3">
-            <a:schemeClr val="accent1"/>
-          </a:fillRef>
-          <a:effectRef idx="2">
-            <a:schemeClr val="accent1"/>
-          </a:effectRef>
-          <a:fontRef idx="minor">
-            <a:schemeClr val="lt1"/>
-          </a:fontRef>
-        </p:style>
-        <p:txBody>
-          <a:bodyPr rtlCol="0" anchor="ctr"/>
-          <a:lstStyle/>
-          <a:p>
-            <a:pPr algn="ctr"/>
-          </a:p>
-        </p:txBody>
-      </p:sp>
-      <p:sp>
-        <p:nvSpPr>
-          <p:cNvPr id="21" name="Oval 20"/>
-          <p:cNvSpPr/>
-          <p:nvPr/>
-        </p:nvSpPr>
-        <p:spPr>
-          <a:xfrm>
-            <a:off x="7524749" y="3048000"/>
-            <a:ext cx="711200" cy="711200"/>
-          </a:xfrm>
-          <a:prstGeom prst="ellipse">
-            <a:avLst/>
-          </a:prstGeom>
-          <a:solidFill>
-            <a:srgbClr val="102238"/>
-          </a:solidFill>
-          <a:ln w="38100">
-            <a:solidFill>
-              <a:srgbClr val="36D7E7"/>
-            </a:solidFill>
-          </a:ln>
-        </p:spPr>
-        <p:style>
-          <a:lnRef idx="1">
-            <a:schemeClr val="accent1"/>
-          </a:lnRef>
-          <a:fillRef idx="3">
-            <a:schemeClr val="accent1"/>
-          </a:fillRef>
-          <a:effectRef idx="2">
-            <a:schemeClr val="accent1"/>
-          </a:effectRef>
-          <a:fontRef idx="minor">
-            <a:schemeClr val="lt1"/>
-          </a:fontRef>
-        </p:style>
-        <p:txBody>
-          <a:bodyPr rtlCol="0" anchor="ctr"/>
-          <a:lstStyle/>
-          <a:p>
-            <a:pPr algn="ctr"/>
-          </a:p>
-        </p:txBody>
-      </p:sp>
-      <p:sp>
-        <p:nvSpPr>
-          <p:cNvPr id="22" name="TextBox 21"/>
-          <p:cNvSpPr txBox="1"/>
-          <p:nvPr/>
-        </p:nvSpPr>
-        <p:spPr>
-          <a:xfrm>
-            <a:off x="7524749" y="3162300"/>
-            <a:ext cx="711200" cy="444500"/>
-          </a:xfrm>
-          <a:prstGeom prst="rect">
-            <a:avLst/>
-          </a:prstGeom>
-          <a:noFill/>
-        </p:spPr>
-        <p:txBody>
-          <a:bodyPr wrap="square" lIns="0" rIns="0" tIns="0" bIns="0" anchor="ctr">
-            <a:spAutoFit/>
-          </a:bodyPr>
-          <a:lstStyle/>
-          <a:p>
-            <a:pPr algn="ctr">
-              <a:spcBef>
-                <a:spcPts val="0"/>
-              </a:spcBef>
-              <a:spcAft>
-                <a:spcPts val="0"/>
-              </a:spcAft>
-            </a:pPr>
-            <a:r>
-              <a:rPr sz="3200" b="1">
-                <a:solidFill>
-                  <a:srgbClr val="36D7E7"/>
-                </a:solidFill>
-                <a:latin typeface="NanumSquare"/>
-              </a:rPr>
-              <a:t>4</a:t>
-            </a:r>
-          </a:p>
-        </p:txBody>
-      </p:sp>
-      <p:sp>
-        <p:nvSpPr>
-          <p:cNvPr id="23" name="TextBox 22"/>
-          <p:cNvSpPr txBox="1"/>
-          <p:nvPr/>
-        </p:nvSpPr>
-        <p:spPr>
-          <a:xfrm>
-            <a:off x="7080250" y="3968750"/>
-            <a:ext cx="1600200" cy="279400"/>
-          </a:xfrm>
-          <a:prstGeom prst="rect">
-            <a:avLst/>
-          </a:prstGeom>
-          <a:noFill/>
-        </p:spPr>
-        <p:txBody>
-          <a:bodyPr wrap="square" lIns="0" rIns="0" tIns="0" bIns="0" anchor="t">
-            <a:spAutoFit/>
-          </a:bodyPr>
-          <a:lstStyle/>
-          <a:p>
-            <a:pPr algn="ctr">
-              <a:spcBef>
-                <a:spcPts val="0"/>
-              </a:spcBef>
-              <a:spcAft>
-                <a:spcPts val="0"/>
-              </a:spcAft>
-            </a:pPr>
-            <a:r>
-              <a:rPr sz="2100" b="1">
-                <a:solidFill>
-                  <a:srgbClr val="F4F7FB"/>
-                </a:solidFill>
-                <a:latin typeface="NanumSquare"/>
-              </a:rPr>
-              <a:t>타일 이동</a:t>
-            </a:r>
-          </a:p>
-        </p:txBody>
-      </p:sp>
-      <p:sp>
-        <p:nvSpPr>
-          <p:cNvPr id="24" name="TextBox 23"/>
-          <p:cNvSpPr txBox="1"/>
-          <p:nvPr/>
-        </p:nvSpPr>
-        <p:spPr>
-          <a:xfrm>
-            <a:off x="6953250" y="4286250"/>
-            <a:ext cx="1854200" cy="431800"/>
-          </a:xfrm>
-          <a:prstGeom prst="rect">
-            <a:avLst/>
-          </a:prstGeom>
-          <a:noFill/>
-        </p:spPr>
-        <p:txBody>
-          <a:bodyPr wrap="square" lIns="0" rIns="0" tIns="0" bIns="0" anchor="t">
-            <a:spAutoFit/>
-          </a:bodyPr>
-          <a:lstStyle/>
-          <a:p>
-            <a:pPr algn="ctr">
-              <a:spcBef>
-                <a:spcPts val="0"/>
-              </a:spcBef>
-              <a:spcAft>
-                <a:spcPts val="0"/>
-              </a:spcAft>
-            </a:pPr>
-            <a:r>
-              <a:rPr sz="1600" b="0">
-                <a:solidFill>
-                  <a:srgbClr val="91A5BA"/>
-                </a:solidFill>
-                <a:latin typeface="NanumSquare"/>
-              </a:rPr>
-              <a:t>유휴 클러스터에 재배치</a:t>
-            </a:r>
-          </a:p>
-        </p:txBody>
-      </p:sp>
-      <p:sp>
-        <p:nvSpPr>
-          <p:cNvPr id="25" name="Chevron 24"/>
-          <p:cNvSpPr/>
-          <p:nvPr/>
-        </p:nvSpPr>
-        <p:spPr>
-          <a:xfrm>
-            <a:off x="8477250" y="3270250"/>
-            <a:ext cx="793750" cy="292100"/>
-          </a:xfrm>
-          <a:prstGeom prst="chevron">
-            <a:avLst/>
-          </a:prstGeom>
-          <a:solidFill>
-            <a:srgbClr val="28B6A6"/>
-          </a:solidFill>
-          <a:ln>
-            <a:noFill/>
-          </a:ln>
-        </p:spPr>
-        <p:style>
-          <a:lnRef idx="1">
-            <a:schemeClr val="accent1"/>
-          </a:lnRef>
-          <a:fillRef idx="3">
-            <a:schemeClr val="accent1"/>
-          </a:fillRef>
-          <a:effectRef idx="2">
-            <a:schemeClr val="accent1"/>
-          </a:effectRef>
-          <a:fontRef idx="minor">
-            <a:schemeClr val="lt1"/>
-          </a:fontRef>
-        </p:style>
-        <p:txBody>
-          <a:bodyPr rtlCol="0" anchor="ctr"/>
-          <a:lstStyle/>
-          <a:p>
-            <a:pPr algn="ctr"/>
-          </a:p>
-        </p:txBody>
-      </p:sp>
-      <p:sp>
-        <p:nvSpPr>
-          <p:cNvPr id="26" name="Oval 25"/>
-          <p:cNvSpPr/>
-          <p:nvPr/>
-        </p:nvSpPr>
-        <p:spPr>
-          <a:xfrm>
-            <a:off x="9747250" y="3048000"/>
-            <a:ext cx="711200" cy="711200"/>
-          </a:xfrm>
-          <a:prstGeom prst="ellipse">
-            <a:avLst/>
-          </a:prstGeom>
-          <a:solidFill>
-            <a:srgbClr val="102238"/>
-          </a:solidFill>
-          <a:ln w="38100">
-            <a:solidFill>
-              <a:srgbClr val="4C8DFF"/>
-            </a:solidFill>
-          </a:ln>
-        </p:spPr>
-        <p:style>
-          <a:lnRef idx="1">
-            <a:schemeClr val="accent1"/>
-          </a:lnRef>
-          <a:fillRef idx="3">
-            <a:schemeClr val="accent1"/>
-          </a:fillRef>
-          <a:effectRef idx="2">
-            <a:schemeClr val="accent1"/>
-          </a:effectRef>
-          <a:fontRef idx="minor">
-            <a:schemeClr val="lt1"/>
-          </a:fontRef>
-        </p:style>
-        <p:txBody>
-          <a:bodyPr rtlCol="0" anchor="ctr"/>
-          <a:lstStyle/>
-          <a:p>
-            <a:pPr algn="ctr"/>
-          </a:p>
-        </p:txBody>
-      </p:sp>
-      <p:sp>
-        <p:nvSpPr>
-          <p:cNvPr id="27" name="TextBox 26"/>
-          <p:cNvSpPr txBox="1"/>
-          <p:nvPr/>
-        </p:nvSpPr>
-        <p:spPr>
-          <a:xfrm>
-            <a:off x="9747250" y="3162300"/>
-            <a:ext cx="711200" cy="444500"/>
-          </a:xfrm>
-          <a:prstGeom prst="rect">
-            <a:avLst/>
-          </a:prstGeom>
-          <a:noFill/>
-        </p:spPr>
-        <p:txBody>
-          <a:bodyPr wrap="square" lIns="0" rIns="0" tIns="0" bIns="0" anchor="ctr">
-            <a:spAutoFit/>
-          </a:bodyPr>
-          <a:lstStyle/>
-          <a:p>
-            <a:pPr algn="ctr">
-              <a:spcBef>
-                <a:spcPts val="0"/>
-              </a:spcBef>
-              <a:spcAft>
-                <a:spcPts val="0"/>
-              </a:spcAft>
-            </a:pPr>
-            <a:r>
-              <a:rPr sz="3200" b="1">
-                <a:solidFill>
-                  <a:srgbClr val="4C8DFF"/>
-                </a:solidFill>
-                <a:latin typeface="NanumSquare"/>
-              </a:rPr>
-              <a:t>5</a:t>
-            </a:r>
-          </a:p>
-        </p:txBody>
-      </p:sp>
-      <p:sp>
-        <p:nvSpPr>
-          <p:cNvPr id="28" name="TextBox 27"/>
-          <p:cNvSpPr txBox="1"/>
-          <p:nvPr/>
-        </p:nvSpPr>
-        <p:spPr>
-          <a:xfrm>
-            <a:off x="9302750" y="3968750"/>
-            <a:ext cx="1600200" cy="279400"/>
-          </a:xfrm>
-          <a:prstGeom prst="rect">
-            <a:avLst/>
-          </a:prstGeom>
-          <a:noFill/>
-        </p:spPr>
-        <p:txBody>
-          <a:bodyPr wrap="square" lIns="0" rIns="0" tIns="0" bIns="0" anchor="t">
-            <a:spAutoFit/>
-          </a:bodyPr>
-          <a:lstStyle/>
-          <a:p>
-            <a:pPr algn="ctr">
-              <a:spcBef>
-                <a:spcPts val="0"/>
-              </a:spcBef>
-              <a:spcAft>
-                <a:spcPts val="0"/>
-              </a:spcAft>
-            </a:pPr>
-            <a:r>
-              <a:rPr sz="2100" b="1">
-                <a:solidFill>
-                  <a:srgbClr val="F4F7FB"/>
-                </a:solidFill>
-                <a:latin typeface="NanumSquare"/>
-              </a:rPr>
-              <a:t>완료 확인</a:t>
-            </a:r>
-          </a:p>
-        </p:txBody>
-      </p:sp>
-      <p:sp>
-        <p:nvSpPr>
-          <p:cNvPr id="29" name="TextBox 28"/>
-          <p:cNvSpPr txBox="1"/>
-          <p:nvPr/>
-        </p:nvSpPr>
-        <p:spPr>
-          <a:xfrm>
-            <a:off x="9175750" y="4286250"/>
-            <a:ext cx="1854200" cy="431800"/>
-          </a:xfrm>
-          <a:prstGeom prst="rect">
-            <a:avLst/>
-          </a:prstGeom>
-          <a:noFill/>
-        </p:spPr>
-        <p:txBody>
-          <a:bodyPr wrap="square" lIns="0" rIns="0" tIns="0" bIns="0" anchor="t">
-            <a:spAutoFit/>
-          </a:bodyPr>
-          <a:lstStyle/>
-          <a:p>
-            <a:pPr algn="ctr">
-              <a:spcBef>
-                <a:spcPts val="0"/>
-              </a:spcBef>
-              <a:spcAft>
-                <a:spcPts val="0"/>
-              </a:spcAft>
-            </a:pPr>
-            <a:r>
-              <a:rPr sz="1600" b="0">
-                <a:solidFill>
-                  <a:srgbClr val="91A5BA"/>
-                </a:solidFill>
-                <a:latin typeface="NanumSquare"/>
-              </a:rPr>
-              <a:t>정확히 한 번 완료</a:t>
-            </a:r>
-          </a:p>
-        </p:txBody>
-      </p:sp>
-      <p:sp>
-        <p:nvSpPr>
-          <p:cNvPr id="30" name="Rounded Rectangle 29"/>
-          <p:cNvSpPr/>
-          <p:nvPr/>
-        </p:nvSpPr>
-        <p:spPr>
-          <a:xfrm>
-            <a:off x="825500" y="5207000"/>
-            <a:ext cx="2540000" cy="444500"/>
-          </a:xfrm>
-          <a:prstGeom prst="roundRect">
-            <a:avLst/>
-          </a:prstGeom>
-          <a:solidFill>
-            <a:srgbClr val="0B1627"/>
-          </a:solidFill>
-          <a:ln w="25400">
-            <a:solidFill>
-              <a:srgbClr val="4C8DFF"/>
-            </a:solidFill>
-          </a:ln>
-        </p:spPr>
-        <p:style>
-          <a:lnRef idx="1">
-            <a:schemeClr val="accent1"/>
-          </a:lnRef>
-          <a:fillRef idx="3">
-            <a:schemeClr val="accent1"/>
-          </a:fillRef>
-          <a:effectRef idx="2">
-            <a:schemeClr val="accent1"/>
-          </a:effectRef>
-          <a:fontRef idx="minor">
-            <a:schemeClr val="lt1"/>
-          </a:fontRef>
-        </p:style>
-        <p:txBody>
-          <a:bodyPr rtlCol="0" anchor="ctr"/>
-          <a:lstStyle/>
-          <a:p>
-            <a:pPr algn="ctr"/>
-          </a:p>
-        </p:txBody>
-      </p:sp>
-      <p:sp>
-        <p:nvSpPr>
-          <p:cNvPr id="31" name="TextBox 30"/>
-          <p:cNvSpPr txBox="1"/>
-          <p:nvPr/>
-        </p:nvSpPr>
-        <p:spPr>
-          <a:xfrm>
-            <a:off x="952500" y="5314950"/>
-            <a:ext cx="2286000" cy="241300"/>
-          </a:xfrm>
-          <a:prstGeom prst="rect">
-            <a:avLst/>
-          </a:prstGeom>
-          <a:noFill/>
-        </p:spPr>
-        <p:txBody>
-          <a:bodyPr wrap="square" lIns="0" rIns="0" tIns="0" bIns="0" anchor="t">
-            <a:spAutoFit/>
-          </a:bodyPr>
-          <a:lstStyle/>
-          <a:p>
-            <a:pPr algn="ctr">
-              <a:spcBef>
-                <a:spcPts val="0"/>
-              </a:spcBef>
-              <a:spcAft>
-                <a:spcPts val="0"/>
-              </a:spcAft>
-            </a:pPr>
-            <a:r>
-              <a:rPr sz="1500" b="1">
-                <a:solidFill>
-                  <a:srgbClr val="4C8DFF"/>
-                </a:solidFill>
-                <a:latin typeface="NanumSquare"/>
-              </a:rPr>
-              <a:t>과부하 큐 · J0  J1  J2  J3</a:t>
-            </a:r>
-          </a:p>
-        </p:txBody>
-      </p:sp>
-      <p:sp>
-        <p:nvSpPr>
-          <p:cNvPr id="32" name="Chevron 31"/>
-          <p:cNvSpPr/>
-          <p:nvPr/>
-        </p:nvSpPr>
-        <p:spPr>
-          <a:xfrm>
-            <a:off x="3683000" y="5257800"/>
-            <a:ext cx="1397000" cy="342900"/>
-          </a:xfrm>
-          <a:prstGeom prst="chevron">
-            <a:avLst/>
-          </a:prstGeom>
-          <a:solidFill>
-            <a:srgbClr val="36D7E7"/>
-          </a:solidFill>
-          <a:ln>
-            <a:noFill/>
-          </a:ln>
-        </p:spPr>
-        <p:style>
-          <a:lnRef idx="1">
-            <a:schemeClr val="accent1"/>
-          </a:lnRef>
-          <a:fillRef idx="3">
-            <a:schemeClr val="accent1"/>
-          </a:fillRef>
-          <a:effectRef idx="2">
-            <a:schemeClr val="accent1"/>
-          </a:effectRef>
-          <a:fontRef idx="minor">
-            <a:schemeClr val="lt1"/>
-          </a:fontRef>
-        </p:style>
-        <p:txBody>
-          <a:bodyPr rtlCol="0" anchor="ctr"/>
-          <a:lstStyle/>
-          <a:p>
-            <a:pPr algn="ctr"/>
-          </a:p>
-        </p:txBody>
-      </p:sp>
-      <p:sp>
-        <p:nvSpPr>
-          <p:cNvPr id="33" name="Rounded Rectangle 32"/>
-          <p:cNvSpPr/>
-          <p:nvPr/>
-        </p:nvSpPr>
-        <p:spPr>
-          <a:xfrm>
-            <a:off x="5397500" y="5207000"/>
-            <a:ext cx="2349500" cy="444500"/>
-          </a:xfrm>
-          <a:prstGeom prst="roundRect">
-            <a:avLst/>
-          </a:prstGeom>
-          <a:solidFill>
-            <a:srgbClr val="0B1627"/>
-          </a:solidFill>
-          <a:ln w="25400">
-            <a:solidFill>
-              <a:srgbClr val="28B6A6"/>
-            </a:solidFill>
-          </a:ln>
-        </p:spPr>
-        <p:style>
-          <a:lnRef idx="1">
-            <a:schemeClr val="accent1"/>
-          </a:lnRef>
-          <a:fillRef idx="3">
-            <a:schemeClr val="accent1"/>
-          </a:fillRef>
-          <a:effectRef idx="2">
-            <a:schemeClr val="accent1"/>
-          </a:effectRef>
-          <a:fontRef idx="minor">
-            <a:schemeClr val="lt1"/>
-          </a:fontRef>
-        </p:style>
-        <p:txBody>
-          <a:bodyPr rtlCol="0" anchor="ctr"/>
-          <a:lstStyle/>
-          <a:p>
-            <a:pPr algn="ctr"/>
-          </a:p>
-        </p:txBody>
-      </p:sp>
-      <p:sp>
-        <p:nvSpPr>
-          <p:cNvPr id="34" name="TextBox 33"/>
-          <p:cNvSpPr txBox="1"/>
-          <p:nvPr/>
-        </p:nvSpPr>
-        <p:spPr>
-          <a:xfrm>
-            <a:off x="5524500" y="5314950"/>
-            <a:ext cx="2095499" cy="241300"/>
-          </a:xfrm>
-          <a:prstGeom prst="rect">
-            <a:avLst/>
-          </a:prstGeom>
-          <a:noFill/>
-        </p:spPr>
-        <p:txBody>
-          <a:bodyPr wrap="square" lIns="0" rIns="0" tIns="0" bIns="0" anchor="t">
-            <a:spAutoFit/>
-          </a:bodyPr>
-          <a:lstStyle/>
-          <a:p>
-            <a:pPr algn="ctr">
-              <a:spcBef>
-                <a:spcPts val="0"/>
-              </a:spcBef>
-              <a:spcAft>
-                <a:spcPts val="0"/>
-              </a:spcAft>
-            </a:pPr>
-            <a:r>
-              <a:rPr sz="1700" b="1">
-                <a:solidFill>
-                  <a:srgbClr val="28B6A6"/>
-                </a:solidFill>
-                <a:latin typeface="NanumSquare"/>
-              </a:rPr>
-              <a:t>유휴 클러스터 ← J2</a:t>
-            </a:r>
-          </a:p>
-        </p:txBody>
-      </p:sp>
-      <p:sp>
-        <p:nvSpPr>
-          <p:cNvPr id="35" name="TextBox 34"/>
-          <p:cNvSpPr txBox="1"/>
-          <p:nvPr/>
-        </p:nvSpPr>
-        <p:spPr>
-          <a:xfrm>
-            <a:off x="8128000" y="5181600"/>
-            <a:ext cx="3238500" cy="495299"/>
-          </a:xfrm>
-          <a:prstGeom prst="rect">
-            <a:avLst/>
-          </a:prstGeom>
-          <a:noFill/>
-        </p:spPr>
-        <p:txBody>
-          <a:bodyPr wrap="square" lIns="0" rIns="0" tIns="0" bIns="0" anchor="ctr">
-            <a:spAutoFit/>
-          </a:bodyPr>
-          <a:lstStyle/>
-          <a:p>
-            <a:pPr algn="ctr">
-              <a:spcBef>
-                <a:spcPts val="0"/>
-              </a:spcBef>
-              <a:spcAft>
-                <a:spcPts val="0"/>
-              </a:spcAft>
-            </a:pPr>
-            <a:r>
-              <a:rPr sz="1600" b="0">
-                <a:solidFill>
-                  <a:srgbClr val="91A5BA"/>
-                </a:solidFill>
-                <a:latin typeface="NanumSquare"/>
-              </a:rPr>
-              <a:t>S2: 가장 오래된 작업
-S3: 이동 비용까지 고려</a:t>
+              <a:t>score = job age - remote weight - activation/reduction - bundle mismatch</a:t>
             </a:r>
           </a:p>
         </p:txBody>
@@ -10357,8 +9102,8 @@
           <a:noFill/>
         </p:spPr>
         <p:txBody>
-          <a:bodyPr wrap="square" lIns="0" rIns="0" tIns="0" bIns="0" anchor="t">
-            <a:spAutoFit/>
+          <a:bodyPr wrap="none" lIns="0" rIns="0" tIns="0" bIns="0" anchor="t">
+            <a:normAutofit/>
           </a:bodyPr>
           <a:lstStyle/>
           <a:p>
@@ -10377,7 +9122,7 @@
                 </a:solidFill>
                 <a:latin typeface="NanumSquare"/>
               </a:rPr>
-              <a:t>실제 Gemma 작업을 TileJob으로 바꾼다</a:t>
+              <a:t>실제 Gemma graph에서 평가 작업을 만든다</a:t>
             </a:r>
           </a:p>
         </p:txBody>
@@ -10399,8 +9144,8 @@
           <a:noFill/>
         </p:spPr>
         <p:txBody>
-          <a:bodyPr wrap="square" lIns="0" rIns="0" tIns="0" bIns="0" anchor="t">
-            <a:spAutoFit/>
+          <a:bodyPr wrap="none" lIns="0" rIns="0" tIns="0" bIns="0" anchor="t">
+            <a:normAutofit/>
           </a:bodyPr>
           <a:lstStyle/>
           <a:p>
@@ -10419,7 +9164,7 @@
                 </a:solidFill>
                 <a:latin typeface="NanumSquare"/>
               </a:rPr>
-              <a:t>실제 graph에서 5,856개 작업을 만들고, 조건 분석용 스트레스 작업과 분리한다.</a:t>
+              <a:t>실제 projection 순서를 보존한 5,856개 TileJob과 조건 탐색용 stress를 분리한다.</a:t>
             </a:r>
           </a:p>
         </p:txBody>
@@ -10478,7 +9223,7 @@
         <p:spPr>
           <a:xfrm>
             <a:off x="1555750" y="2781300"/>
-            <a:ext cx="1460500" cy="508000"/>
+            <a:ext cx="1460500" cy="574040"/>
           </a:xfrm>
           <a:prstGeom prst="rect">
             <a:avLst/>
@@ -10486,8 +9231,8 @@
           <a:noFill/>
         </p:spPr>
         <p:txBody>
-          <a:bodyPr wrap="square" lIns="0" rIns="0" tIns="0" bIns="0" anchor="t">
-            <a:spAutoFit/>
+          <a:bodyPr wrap="none" lIns="0" rIns="0" tIns="0" bIns="0" anchor="t">
+            <a:normAutofit/>
           </a:bodyPr>
           <a:lstStyle/>
           <a:p>
@@ -10500,7 +9245,7 @@
               </a:spcAft>
             </a:pPr>
             <a:r>
-              <a:rPr sz="4400" b="1">
+              <a:rPr sz="4000" b="1">
                 <a:solidFill>
                   <a:srgbClr val="4C8DFF"/>
                 </a:solidFill>
@@ -10520,7 +9265,7 @@
         <p:spPr>
           <a:xfrm>
             <a:off x="1206500" y="4159249"/>
-            <a:ext cx="2159000" cy="349250"/>
+            <a:ext cx="2159000" cy="601472"/>
           </a:xfrm>
           <a:prstGeom prst="rect">
             <a:avLst/>
@@ -10528,8 +9273,8 @@
           <a:noFill/>
         </p:spPr>
         <p:txBody>
-          <a:bodyPr wrap="square" lIns="0" rIns="0" tIns="0" bIns="0" anchor="t">
-            <a:spAutoFit/>
+          <a:bodyPr wrap="none" lIns="0" rIns="0" tIns="0" bIns="0" anchor="t">
+            <a:normAutofit/>
           </a:bodyPr>
           <a:lstStyle/>
           <a:p>
@@ -10548,7 +9293,8 @@
                 </a:solidFill>
                 <a:latin typeface="NanumSquare"/>
               </a:rPr>
-              <a:t>ONNX 그래프 노드</a:t>
+              <a:t>ONNX 그래프
+노드</a:t>
             </a:r>
           </a:p>
         </p:txBody>
@@ -10650,7 +9396,7 @@
         <p:spPr>
           <a:xfrm>
             <a:off x="5175250" y="2781300"/>
-            <a:ext cx="1460500" cy="508000"/>
+            <a:ext cx="1460500" cy="574040"/>
           </a:xfrm>
           <a:prstGeom prst="rect">
             <a:avLst/>
@@ -10658,8 +9404,8 @@
           <a:noFill/>
         </p:spPr>
         <p:txBody>
-          <a:bodyPr wrap="square" lIns="0" rIns="0" tIns="0" bIns="0" anchor="t">
-            <a:spAutoFit/>
+          <a:bodyPr wrap="none" lIns="0" rIns="0" tIns="0" bIns="0" anchor="t">
+            <a:normAutofit/>
           </a:bodyPr>
           <a:lstStyle/>
           <a:p>
@@ -10672,7 +9418,7 @@
               </a:spcAft>
             </a:pPr>
             <a:r>
-              <a:rPr sz="4400" b="1">
+              <a:rPr sz="4000" b="1">
                 <a:solidFill>
                   <a:srgbClr val="28B6A6"/>
                 </a:solidFill>
@@ -10700,8 +9446,8 @@
           <a:noFill/>
         </p:spPr>
         <p:txBody>
-          <a:bodyPr wrap="square" lIns="0" rIns="0" tIns="0" bIns="0" anchor="t">
-            <a:spAutoFit/>
+          <a:bodyPr wrap="none" lIns="0" rIns="0" tIns="0" bIns="0" anchor="t">
+            <a:normAutofit/>
           </a:bodyPr>
           <a:lstStyle/>
           <a:p>
@@ -10822,7 +9568,7 @@
         <p:spPr>
           <a:xfrm>
             <a:off x="8794750" y="2781300"/>
-            <a:ext cx="1460500" cy="508000"/>
+            <a:ext cx="1460500" cy="574040"/>
           </a:xfrm>
           <a:prstGeom prst="rect">
             <a:avLst/>
@@ -10830,8 +9576,8 @@
           <a:noFill/>
         </p:spPr>
         <p:txBody>
-          <a:bodyPr wrap="square" lIns="0" rIns="0" tIns="0" bIns="0" anchor="t">
-            <a:spAutoFit/>
+          <a:bodyPr wrap="none" lIns="0" rIns="0" tIns="0" bIns="0" anchor="t">
+            <a:normAutofit/>
           </a:bodyPr>
           <a:lstStyle/>
           <a:p>
@@ -10844,7 +9590,7 @@
               </a:spcAft>
             </a:pPr>
             <a:r>
-              <a:rPr sz="4400" b="1">
+              <a:rPr sz="4000" b="1">
                 <a:solidFill>
                   <a:srgbClr val="36D7E7"/>
                 </a:solidFill>
@@ -10864,7 +9610,7 @@
         <p:spPr>
           <a:xfrm>
             <a:off x="8445500" y="4159249"/>
-            <a:ext cx="2159000" cy="349250"/>
+            <a:ext cx="2159000" cy="601472"/>
           </a:xfrm>
           <a:prstGeom prst="rect">
             <a:avLst/>
@@ -10872,8 +9618,8 @@
           <a:noFill/>
         </p:spPr>
         <p:txBody>
-          <a:bodyPr wrap="square" lIns="0" rIns="0" tIns="0" bIns="0" anchor="t">
-            <a:spAutoFit/>
+          <a:bodyPr wrap="none" lIns="0" rIns="0" tIns="0" bIns="0" anchor="t">
+            <a:normAutofit/>
           </a:bodyPr>
           <a:lstStyle/>
           <a:p>
@@ -10892,7 +9638,8 @@
                 </a:solidFill>
                 <a:latin typeface="NanumSquare"/>
               </a:rPr>
-              <a:t>TileJob · 디코드 32</a:t>
+              <a:t>TileJob · 디코드
+32</a:t>
             </a:r>
           </a:p>
         </p:txBody>
@@ -10914,8 +9661,8 @@
           <a:noFill/>
         </p:spPr>
         <p:txBody>
-          <a:bodyPr wrap="square" lIns="0" rIns="0" tIns="0" bIns="0" anchor="t">
-            <a:spAutoFit/>
+          <a:bodyPr wrap="none" lIns="0" rIns="0" tIns="0" bIns="0" anchor="t">
+            <a:normAutofit/>
           </a:bodyPr>
           <a:lstStyle/>
           <a:p>
@@ -10956,8 +9703,8 @@
           <a:noFill/>
         </p:spPr>
         <p:txBody>
-          <a:bodyPr wrap="square" lIns="0" rIns="0" tIns="0" bIns="0" anchor="t">
-            <a:spAutoFit/>
+          <a:bodyPr wrap="none" lIns="0" rIns="0" tIns="0" bIns="0" anchor="t">
+            <a:normAutofit/>
           </a:bodyPr>
           <a:lstStyle/>
           <a:p>
@@ -10990,7 +9737,7 @@
         <p:spPr>
           <a:xfrm>
             <a:off x="8540750" y="4813300"/>
-            <a:ext cx="2286000" cy="431800"/>
+            <a:ext cx="2286000" cy="464312"/>
           </a:xfrm>
           <a:prstGeom prst="rect">
             <a:avLst/>
@@ -10998,8 +9745,8 @@
           <a:noFill/>
         </p:spPr>
         <p:txBody>
-          <a:bodyPr wrap="square" lIns="0" rIns="0" tIns="0" bIns="0" anchor="t">
-            <a:spAutoFit/>
+          <a:bodyPr wrap="none" lIns="0" rIns="0" tIns="0" bIns="0" anchor="t">
+            <a:normAutofit/>
           </a:bodyPr>
           <a:lstStyle/>
           <a:p>
@@ -11076,8 +9823,8 @@
           <a:noFill/>
         </p:spPr>
         <p:txBody>
-          <a:bodyPr wrap="square" lIns="0" rIns="0" tIns="0" bIns="0" anchor="t">
-            <a:spAutoFit/>
+          <a:bodyPr wrap="none" lIns="0" rIns="0" tIns="0" bIns="0" anchor="t">
+            <a:normAutofit/>
           </a:bodyPr>
           <a:lstStyle/>
           <a:p>
@@ -11096,7 +9843,7 @@
                 </a:solidFill>
                 <a:latin typeface="NanumSquare"/>
               </a:rPr>
-              <a:t>Gemma replay  ≠  조건 분석용 합성 스트레스  ·  다음 결과는 별도 작업 집합</a:t>
+              <a:t>Gemma replay ≠ 조건 분석용 합성 스트레스 · 다음 결과는 별도 작업 집합</a:t>
             </a:r>
           </a:p>
         </p:txBody>
@@ -11187,8 +9934,8 @@
           <a:noFill/>
         </p:spPr>
         <p:txBody>
-          <a:bodyPr wrap="square" lIns="0" rIns="0" tIns="0" bIns="0" anchor="t">
-            <a:spAutoFit/>
+          <a:bodyPr wrap="none" lIns="0" rIns="0" tIns="0" bIns="0" anchor="t">
+            <a:normAutofit/>
           </a:bodyPr>
           <a:lstStyle/>
           <a:p>
@@ -11207,7 +9954,7 @@
                 </a:solidFill>
                 <a:latin typeface="NanumSquare"/>
               </a:rPr>
-              <a:t>놀고 있던 연산 클러스터가 Tail을 줄인다</a:t>
+              <a:t>동일 조건에서 S1과 S3의 실행을 비교한다</a:t>
             </a:r>
           </a:p>
         </p:txBody>
@@ -11229,8 +9976,8 @@
           <a:noFill/>
         </p:spPr>
         <p:txBody>
-          <a:bodyPr wrap="square" lIns="0" rIns="0" tIns="0" bIns="0" anchor="t">
-            <a:spAutoFit/>
+          <a:bodyPr wrap="none" lIns="0" rIns="0" tIns="0" bIns="0" anchor="t">
+            <a:normAutofit/>
           </a:bodyPr>
           <a:lstStyle/>
           <a:p>
@@ -11249,7 +9996,7 @@
                 </a:solidFill>
                 <a:latin typeface="NanumSquare"/>
               </a:rPr>
-              <a:t>정적 할당에서는 작업이 Cluster 0에 몰리지만, Work Stealing은 유휴 클러스터에 타일을 재배치한다.</a:t>
+              <a:t>같은 job stream에서 정책만 바꾸면 유휴 구간이 steal 실행으로 전환된다.</a:t>
             </a:r>
           </a:p>
         </p:txBody>
@@ -11262,8 +10009,8 @@
         </p:nvSpPr>
         <p:spPr>
           <a:xfrm>
-            <a:off x="2984500" y="1511300"/>
-            <a:ext cx="6223000" cy="203200"/>
+            <a:off x="2667000" y="1460500"/>
+            <a:ext cx="6858000" cy="286004"/>
           </a:xfrm>
           <a:prstGeom prst="rect">
             <a:avLst/>
@@ -11271,8 +10018,8 @@
           <a:noFill/>
         </p:spPr>
         <p:txBody>
-          <a:bodyPr wrap="square" lIns="0" rIns="0" tIns="0" bIns="0" anchor="t">
-            <a:spAutoFit/>
+          <a:bodyPr wrap="none" lIns="0" rIns="0" tIns="0" bIns="0" anchor="t">
+            <a:normAutofit/>
           </a:bodyPr>
           <a:lstStyle/>
           <a:p>
@@ -11285,13 +10032,13 @@
               </a:spcAft>
             </a:pPr>
             <a:r>
-              <a:rPr sz="1500" b="1">
+              <a:rPr sz="1900" b="1">
                 <a:solidFill>
                   <a:srgbClr val="F1B44C"/>
                 </a:solidFill>
                 <a:latin typeface="NanumSquare"/>
               </a:rPr>
-              <a:t>실험 B · 제어된 치우침 스트레스 · 1,000개 작업 · 분석 모델</a:t>
+              <a:t>동일 1,000-job stream · 동일 자원 · 정책만 변경</a:t>
             </a:r>
           </a:p>
         </p:txBody>
@@ -11304,8 +10051,8 @@
         </p:nvSpPr>
         <p:spPr>
           <a:xfrm>
-            <a:off x="2984500" y="1689100"/>
-            <a:ext cx="6223000" cy="203200"/>
+            <a:off x="2603500" y="1746250"/>
+            <a:ext cx="6985000" cy="217424"/>
           </a:xfrm>
           <a:prstGeom prst="rect">
             <a:avLst/>
@@ -11313,8 +10060,8 @@
           <a:noFill/>
         </p:spPr>
         <p:txBody>
-          <a:bodyPr wrap="square" lIns="0" rIns="0" tIns="0" bIns="0" anchor="t">
-            <a:spAutoFit/>
+          <a:bodyPr wrap="none" lIns="0" rIns="0" tIns="0" bIns="0" anchor="t">
+            <a:normAutofit/>
           </a:bodyPr>
           <a:lstStyle/>
           <a:p>
@@ -11333,7 +10080,7 @@
                 </a:solidFill>
                 <a:latin typeface="NanumSquare"/>
               </a:rPr>
-              <a:t>회색선 큐 대기  ·  어두운 색 데이터 준비  ·  밝은 끝 연산  ·  청록 훔친 작업</a:t>
+              <a:t>회색 큐 대기 · 어두운 데이터 준비 · 밝은 연산 · 청록 훔친 작업</a:t>
             </a:r>
           </a:p>
         </p:txBody>
@@ -11346,8 +10093,8 @@
         </p:nvSpPr>
         <p:spPr>
           <a:xfrm>
-            <a:off x="571500" y="1905000"/>
-            <a:ext cx="5207000" cy="279400"/>
+            <a:off x="571500" y="2000250"/>
+            <a:ext cx="5207000" cy="327152"/>
           </a:xfrm>
           <a:prstGeom prst="rect">
             <a:avLst/>
@@ -11355,8 +10102,8 @@
           <a:noFill/>
         </p:spPr>
         <p:txBody>
-          <a:bodyPr wrap="square" lIns="0" rIns="0" tIns="0" bIns="0" anchor="t">
-            <a:spAutoFit/>
+          <a:bodyPr wrap="none" lIns="0" rIns="0" tIns="0" bIns="0" anchor="t">
+            <a:normAutofit/>
           </a:bodyPr>
           <a:lstStyle/>
           <a:p>
@@ -11388,8 +10135,8 @@
         </p:nvSpPr>
         <p:spPr>
           <a:xfrm>
-            <a:off x="571500" y="2159000"/>
-            <a:ext cx="5207000" cy="203200"/>
+            <a:off x="571500" y="2368550"/>
+            <a:ext cx="5207000" cy="231140"/>
           </a:xfrm>
           <a:prstGeom prst="rect">
             <a:avLst/>
@@ -11397,8 +10144,8 @@
           <a:noFill/>
         </p:spPr>
         <p:txBody>
-          <a:bodyPr wrap="square" lIns="0" rIns="0" tIns="0" bIns="0" anchor="t">
-            <a:spAutoFit/>
+          <a:bodyPr wrap="none" lIns="0" rIns="0" tIns="0" bIns="0" anchor="t">
+            <a:normAutofit/>
           </a:bodyPr>
           <a:lstStyle/>
           <a:p>
@@ -11430,8 +10177,8 @@
         </p:nvSpPr>
         <p:spPr>
           <a:xfrm>
-            <a:off x="571500" y="2584450"/>
-            <a:ext cx="342900" cy="215900"/>
+            <a:off x="571500" y="2743200"/>
+            <a:ext cx="342900" cy="258572"/>
           </a:xfrm>
           <a:prstGeom prst="rect">
             <a:avLst/>
@@ -11439,8 +10186,8 @@
           <a:noFill/>
         </p:spPr>
         <p:txBody>
-          <a:bodyPr wrap="square" lIns="0" rIns="0" tIns="0" bIns="0" anchor="t">
-            <a:spAutoFit/>
+          <a:bodyPr wrap="none" lIns="0" rIns="0" tIns="0" bIns="0" anchor="t">
+            <a:normAutofit/>
           </a:bodyPr>
           <a:lstStyle/>
           <a:p>
@@ -11472,7 +10219,7 @@
         </p:nvSpPr>
         <p:spPr>
           <a:xfrm>
-            <a:off x="965200" y="2508250"/>
+            <a:off x="965200" y="2667000"/>
             <a:ext cx="4813300" cy="368300"/>
           </a:xfrm>
           <a:prstGeom prst="roundRect">
@@ -11515,7 +10262,7 @@
         </p:nvCxnSpPr>
         <p:spPr>
           <a:xfrm>
-            <a:off x="965200" y="2832100"/>
+            <a:off x="965200" y="2990850"/>
             <a:ext cx="666642" cy="0"/>
           </a:xfrm>
           <a:prstGeom prst="line">
@@ -11550,7 +10297,7 @@
         </p:nvSpPr>
         <p:spPr>
           <a:xfrm>
-            <a:off x="1631842" y="2559050"/>
+            <a:off x="1631842" y="2717800"/>
             <a:ext cx="356184" cy="266700"/>
           </a:xfrm>
           <a:prstGeom prst="roundRect">
@@ -11595,7 +10342,7 @@
         </p:nvSpPr>
         <p:spPr>
           <a:xfrm>
-            <a:off x="1988026" y="2559050"/>
+            <a:off x="1988026" y="2717800"/>
             <a:ext cx="77012" cy="266700"/>
           </a:xfrm>
           <a:prstGeom prst="roundRect">
@@ -11638,7 +10385,7 @@
         </p:nvCxnSpPr>
         <p:spPr>
           <a:xfrm>
-            <a:off x="965200" y="2832100"/>
+            <a:off x="965200" y="2990850"/>
             <a:ext cx="1099839" cy="0"/>
           </a:xfrm>
           <a:prstGeom prst="line">
@@ -11673,7 +10420,7 @@
         </p:nvSpPr>
         <p:spPr>
           <a:xfrm>
-            <a:off x="2065039" y="2559050"/>
+            <a:off x="2065039" y="2717800"/>
             <a:ext cx="341744" cy="266700"/>
           </a:xfrm>
           <a:prstGeom prst="roundRect">
@@ -11718,7 +10465,7 @@
         </p:nvSpPr>
         <p:spPr>
           <a:xfrm>
-            <a:off x="2406783" y="2559050"/>
+            <a:off x="2406783" y="2717800"/>
             <a:ext cx="77012" cy="266700"/>
           </a:xfrm>
           <a:prstGeom prst="roundRect">
@@ -11761,7 +10508,7 @@
         </p:nvCxnSpPr>
         <p:spPr>
           <a:xfrm>
-            <a:off x="965200" y="2832100"/>
+            <a:off x="965200" y="2990850"/>
             <a:ext cx="1518596" cy="0"/>
           </a:xfrm>
           <a:prstGeom prst="line">
@@ -11796,7 +10543,7 @@
         </p:nvSpPr>
         <p:spPr>
           <a:xfrm>
-            <a:off x="2483796" y="2559050"/>
+            <a:off x="2483796" y="2717800"/>
             <a:ext cx="182905" cy="266700"/>
           </a:xfrm>
           <a:prstGeom prst="roundRect">
@@ -11841,7 +10588,7 @@
         </p:nvSpPr>
         <p:spPr>
           <a:xfrm>
-            <a:off x="2666701" y="2559050"/>
+            <a:off x="2666701" y="2717800"/>
             <a:ext cx="63500" cy="266700"/>
           </a:xfrm>
           <a:prstGeom prst="roundRect">
@@ -11884,7 +10631,7 @@
         </p:nvCxnSpPr>
         <p:spPr>
           <a:xfrm>
-            <a:off x="965200" y="2832100"/>
+            <a:off x="965200" y="2990850"/>
             <a:ext cx="1740007" cy="0"/>
           </a:xfrm>
           <a:prstGeom prst="line">
@@ -11919,7 +10666,7 @@
         </p:nvSpPr>
         <p:spPr>
           <a:xfrm>
-            <a:off x="2705207" y="2559050"/>
+            <a:off x="2705207" y="2717800"/>
             <a:ext cx="341744" cy="266700"/>
           </a:xfrm>
           <a:prstGeom prst="roundRect">
@@ -11964,7 +10711,7 @@
         </p:nvSpPr>
         <p:spPr>
           <a:xfrm>
-            <a:off x="3046952" y="2559050"/>
+            <a:off x="3046952" y="2717800"/>
             <a:ext cx="77012" cy="266700"/>
           </a:xfrm>
           <a:prstGeom prst="roundRect">
@@ -12007,7 +10754,7 @@
         </p:nvCxnSpPr>
         <p:spPr>
           <a:xfrm>
-            <a:off x="965200" y="2832100"/>
+            <a:off x="965200" y="2990850"/>
             <a:ext cx="2158765" cy="0"/>
           </a:xfrm>
           <a:prstGeom prst="line">
@@ -12042,7 +10789,7 @@
         </p:nvSpPr>
         <p:spPr>
           <a:xfrm>
-            <a:off x="3123965" y="2559050"/>
+            <a:off x="3123965" y="2717800"/>
             <a:ext cx="96265" cy="266700"/>
           </a:xfrm>
           <a:prstGeom prst="roundRect">
@@ -12087,7 +10834,7 @@
         </p:nvSpPr>
         <p:spPr>
           <a:xfrm>
-            <a:off x="3220231" y="2559050"/>
+            <a:off x="3220231" y="2717800"/>
             <a:ext cx="63500" cy="266700"/>
           </a:xfrm>
           <a:prstGeom prst="roundRect">
@@ -12130,8 +10877,8 @@
         </p:nvSpPr>
         <p:spPr>
           <a:xfrm>
-            <a:off x="571500" y="3136900"/>
-            <a:ext cx="342900" cy="215900"/>
+            <a:off x="571500" y="3295650"/>
+            <a:ext cx="342900" cy="258572"/>
           </a:xfrm>
           <a:prstGeom prst="rect">
             <a:avLst/>
@@ -12139,8 +10886,8 @@
           <a:noFill/>
         </p:spPr>
         <p:txBody>
-          <a:bodyPr wrap="square" lIns="0" rIns="0" tIns="0" bIns="0" anchor="t">
-            <a:spAutoFit/>
+          <a:bodyPr wrap="none" lIns="0" rIns="0" tIns="0" bIns="0" anchor="t">
+            <a:normAutofit/>
           </a:bodyPr>
           <a:lstStyle/>
           <a:p>
@@ -12172,7 +10919,7 @@
         </p:nvSpPr>
         <p:spPr>
           <a:xfrm>
-            <a:off x="965200" y="3060700"/>
+            <a:off x="965200" y="3219450"/>
             <a:ext cx="4813300" cy="368300"/>
           </a:xfrm>
           <a:prstGeom prst="roundRect">
@@ -12215,7 +10962,7 @@
         </p:nvSpPr>
         <p:spPr>
           <a:xfrm>
-            <a:off x="965200" y="3060700"/>
+            <a:off x="965200" y="3219450"/>
             <a:ext cx="4813300" cy="368300"/>
           </a:xfrm>
           <a:prstGeom prst="roundRect">
@@ -12258,8 +11005,8 @@
         </p:nvSpPr>
         <p:spPr>
           <a:xfrm>
-            <a:off x="5111750" y="3136900"/>
-            <a:ext cx="533400" cy="215900"/>
+            <a:off x="5111750" y="3295650"/>
+            <a:ext cx="533400" cy="244856"/>
           </a:xfrm>
           <a:prstGeom prst="rect">
             <a:avLst/>
@@ -12267,8 +11014,8 @@
           <a:noFill/>
         </p:spPr>
         <p:txBody>
-          <a:bodyPr wrap="square" lIns="0" rIns="0" tIns="0" bIns="0" anchor="t">
-            <a:spAutoFit/>
+          <a:bodyPr wrap="none" lIns="0" rIns="0" tIns="0" bIns="0" anchor="t">
+            <a:normAutofit/>
           </a:bodyPr>
           <a:lstStyle/>
           <a:p>
@@ -12300,8 +11047,8 @@
         </p:nvSpPr>
         <p:spPr>
           <a:xfrm>
-            <a:off x="571500" y="3689350"/>
-            <a:ext cx="342900" cy="215900"/>
+            <a:off x="571500" y="3848099"/>
+            <a:ext cx="342900" cy="258572"/>
           </a:xfrm>
           <a:prstGeom prst="rect">
             <a:avLst/>
@@ -12309,8 +11056,8 @@
           <a:noFill/>
         </p:spPr>
         <p:txBody>
-          <a:bodyPr wrap="square" lIns="0" rIns="0" tIns="0" bIns="0" anchor="t">
-            <a:spAutoFit/>
+          <a:bodyPr wrap="none" lIns="0" rIns="0" tIns="0" bIns="0" anchor="t">
+            <a:normAutofit/>
           </a:bodyPr>
           <a:lstStyle/>
           <a:p>
@@ -12342,7 +11089,7 @@
         </p:nvSpPr>
         <p:spPr>
           <a:xfrm>
-            <a:off x="965200" y="3613150"/>
+            <a:off x="965200" y="3771900"/>
             <a:ext cx="4813300" cy="368300"/>
           </a:xfrm>
           <a:prstGeom prst="roundRect">
@@ -12385,7 +11132,7 @@
         </p:nvSpPr>
         <p:spPr>
           <a:xfrm>
-            <a:off x="965200" y="3613150"/>
+            <a:off x="965200" y="3771900"/>
             <a:ext cx="4813300" cy="368300"/>
           </a:xfrm>
           <a:prstGeom prst="roundRect">
@@ -12428,8 +11175,8 @@
         </p:nvSpPr>
         <p:spPr>
           <a:xfrm>
-            <a:off x="5111750" y="3689350"/>
-            <a:ext cx="533400" cy="215900"/>
+            <a:off x="5111750" y="3848099"/>
+            <a:ext cx="533400" cy="244856"/>
           </a:xfrm>
           <a:prstGeom prst="rect">
             <a:avLst/>
@@ -12437,8 +11184,8 @@
           <a:noFill/>
         </p:spPr>
         <p:txBody>
-          <a:bodyPr wrap="square" lIns="0" rIns="0" tIns="0" bIns="0" anchor="t">
-            <a:spAutoFit/>
+          <a:bodyPr wrap="none" lIns="0" rIns="0" tIns="0" bIns="0" anchor="t">
+            <a:normAutofit/>
           </a:bodyPr>
           <a:lstStyle/>
           <a:p>
@@ -12470,8 +11217,8 @@
         </p:nvSpPr>
         <p:spPr>
           <a:xfrm>
-            <a:off x="571500" y="4241800"/>
-            <a:ext cx="342900" cy="215900"/>
+            <a:off x="571500" y="4400550"/>
+            <a:ext cx="342900" cy="258572"/>
           </a:xfrm>
           <a:prstGeom prst="rect">
             <a:avLst/>
@@ -12479,8 +11226,8 @@
           <a:noFill/>
         </p:spPr>
         <p:txBody>
-          <a:bodyPr wrap="square" lIns="0" rIns="0" tIns="0" bIns="0" anchor="t">
-            <a:spAutoFit/>
+          <a:bodyPr wrap="none" lIns="0" rIns="0" tIns="0" bIns="0" anchor="t">
+            <a:normAutofit/>
           </a:bodyPr>
           <a:lstStyle/>
           <a:p>
@@ -12512,7 +11259,7 @@
         </p:nvSpPr>
         <p:spPr>
           <a:xfrm>
-            <a:off x="965200" y="4165600"/>
+            <a:off x="965200" y="4324350"/>
             <a:ext cx="4813300" cy="368300"/>
           </a:xfrm>
           <a:prstGeom prst="roundRect">
@@ -12555,7 +11302,7 @@
         </p:nvSpPr>
         <p:spPr>
           <a:xfrm>
-            <a:off x="965200" y="4165600"/>
+            <a:off x="965200" y="4324350"/>
             <a:ext cx="4813300" cy="368300"/>
           </a:xfrm>
           <a:prstGeom prst="roundRect">
@@ -12598,8 +11345,8 @@
         </p:nvSpPr>
         <p:spPr>
           <a:xfrm>
-            <a:off x="5111750" y="4241800"/>
-            <a:ext cx="533400" cy="215900"/>
+            <a:off x="5111750" y="4400550"/>
+            <a:ext cx="533400" cy="244856"/>
           </a:xfrm>
           <a:prstGeom prst="rect">
             <a:avLst/>
@@ -12607,8 +11354,8 @@
           <a:noFill/>
         </p:spPr>
         <p:txBody>
-          <a:bodyPr wrap="square" lIns="0" rIns="0" tIns="0" bIns="0" anchor="t">
-            <a:spAutoFit/>
+          <a:bodyPr wrap="none" lIns="0" rIns="0" tIns="0" bIns="0" anchor="t">
+            <a:normAutofit/>
           </a:bodyPr>
           <a:lstStyle/>
           <a:p>
@@ -12640,8 +11387,8 @@
         </p:nvSpPr>
         <p:spPr>
           <a:xfrm>
-            <a:off x="6413500" y="1905000"/>
-            <a:ext cx="5207000" cy="279400"/>
+            <a:off x="6413500" y="2000250"/>
+            <a:ext cx="5207000" cy="327152"/>
           </a:xfrm>
           <a:prstGeom prst="rect">
             <a:avLst/>
@@ -12649,8 +11396,8 @@
           <a:noFill/>
         </p:spPr>
         <p:txBody>
-          <a:bodyPr wrap="square" lIns="0" rIns="0" tIns="0" bIns="0" anchor="t">
-            <a:spAutoFit/>
+          <a:bodyPr wrap="none" lIns="0" rIns="0" tIns="0" bIns="0" anchor="t">
+            <a:normAutofit/>
           </a:bodyPr>
           <a:lstStyle/>
           <a:p>
@@ -12682,8 +11429,8 @@
         </p:nvSpPr>
         <p:spPr>
           <a:xfrm>
-            <a:off x="6413500" y="2159000"/>
-            <a:ext cx="5207000" cy="203200"/>
+            <a:off x="6413500" y="2368550"/>
+            <a:ext cx="5207000" cy="231140"/>
           </a:xfrm>
           <a:prstGeom prst="rect">
             <a:avLst/>
@@ -12691,8 +11438,8 @@
           <a:noFill/>
         </p:spPr>
         <p:txBody>
-          <a:bodyPr wrap="square" lIns="0" rIns="0" tIns="0" bIns="0" anchor="t">
-            <a:spAutoFit/>
+          <a:bodyPr wrap="none" lIns="0" rIns="0" tIns="0" bIns="0" anchor="t">
+            <a:normAutofit/>
           </a:bodyPr>
           <a:lstStyle/>
           <a:p>
@@ -12724,8 +11471,8 @@
         </p:nvSpPr>
         <p:spPr>
           <a:xfrm>
-            <a:off x="6413500" y="2584450"/>
-            <a:ext cx="342900" cy="215900"/>
+            <a:off x="6413500" y="2743200"/>
+            <a:ext cx="342900" cy="258572"/>
           </a:xfrm>
           <a:prstGeom prst="rect">
             <a:avLst/>
@@ -12733,8 +11480,8 @@
           <a:noFill/>
         </p:spPr>
         <p:txBody>
-          <a:bodyPr wrap="square" lIns="0" rIns="0" tIns="0" bIns="0" anchor="t">
-            <a:spAutoFit/>
+          <a:bodyPr wrap="none" lIns="0" rIns="0" tIns="0" bIns="0" anchor="t">
+            <a:normAutofit/>
           </a:bodyPr>
           <a:lstStyle/>
           <a:p>
@@ -12766,7 +11513,7 @@
         </p:nvSpPr>
         <p:spPr>
           <a:xfrm>
-            <a:off x="6807200" y="2508250"/>
+            <a:off x="6807200" y="2667000"/>
             <a:ext cx="4813300" cy="368300"/>
           </a:xfrm>
           <a:prstGeom prst="roundRect">
@@ -12809,7 +11556,7 @@
         </p:nvCxnSpPr>
         <p:spPr>
           <a:xfrm>
-            <a:off x="6807200" y="2832100"/>
+            <a:off x="6807200" y="2990850"/>
             <a:ext cx="339337" cy="0"/>
           </a:xfrm>
           <a:prstGeom prst="line">
@@ -12844,7 +11591,7 @@
         </p:nvSpPr>
         <p:spPr>
           <a:xfrm>
-            <a:off x="7146537" y="2559050"/>
+            <a:off x="7146537" y="2717800"/>
             <a:ext cx="2844660" cy="266700"/>
           </a:xfrm>
           <a:prstGeom prst="roundRect">
@@ -12889,7 +11636,7 @@
         </p:nvSpPr>
         <p:spPr>
           <a:xfrm>
-            <a:off x="9991197" y="2559050"/>
+            <a:off x="9991197" y="2717800"/>
             <a:ext cx="616102" cy="266700"/>
           </a:xfrm>
           <a:prstGeom prst="roundRect">
@@ -12932,7 +11679,7 @@
         </p:nvSpPr>
         <p:spPr>
           <a:xfrm>
-            <a:off x="7197337" y="2590800"/>
+            <a:off x="7197337" y="2749550"/>
             <a:ext cx="2743060" cy="190500"/>
           </a:xfrm>
           <a:prstGeom prst="rect">
@@ -12941,8 +11688,8 @@
           <a:noFill/>
         </p:spPr>
         <p:txBody>
-          <a:bodyPr wrap="square" lIns="0" rIns="0" tIns="0" bIns="0" anchor="t">
-            <a:spAutoFit/>
+          <a:bodyPr wrap="none" lIns="0" rIns="0" tIns="0" bIns="0" anchor="t">
+            <a:normAutofit/>
           </a:bodyPr>
           <a:lstStyle/>
           <a:p>
@@ -12974,8 +11721,8 @@
         </p:nvSpPr>
         <p:spPr>
           <a:xfrm>
-            <a:off x="6413500" y="3136900"/>
-            <a:ext cx="342900" cy="215900"/>
+            <a:off x="6413500" y="3295650"/>
+            <a:ext cx="342900" cy="258572"/>
           </a:xfrm>
           <a:prstGeom prst="rect">
             <a:avLst/>
@@ -12983,8 +11730,8 @@
           <a:noFill/>
         </p:spPr>
         <p:txBody>
-          <a:bodyPr wrap="square" lIns="0" rIns="0" tIns="0" bIns="0" anchor="t">
-            <a:spAutoFit/>
+          <a:bodyPr wrap="none" lIns="0" rIns="0" tIns="0" bIns="0" anchor="t">
+            <a:normAutofit/>
           </a:bodyPr>
           <a:lstStyle/>
           <a:p>
@@ -13016,7 +11763,7 @@
         </p:nvSpPr>
         <p:spPr>
           <a:xfrm>
-            <a:off x="6807200" y="3060700"/>
+            <a:off x="6807200" y="3219450"/>
             <a:ext cx="4813300" cy="368300"/>
           </a:xfrm>
           <a:prstGeom prst="roundRect">
@@ -13059,7 +11806,7 @@
         </p:nvCxnSpPr>
         <p:spPr>
           <a:xfrm>
-            <a:off x="6807200" y="3384550"/>
+            <a:off x="6807200" y="3543300"/>
             <a:ext cx="580002" cy="0"/>
           </a:xfrm>
           <a:prstGeom prst="line">
@@ -13094,7 +11841,7 @@
         </p:nvSpPr>
         <p:spPr>
           <a:xfrm>
-            <a:off x="7387202" y="3111500"/>
+            <a:off x="7387202" y="3270250"/>
             <a:ext cx="3128645" cy="266700"/>
           </a:xfrm>
           <a:prstGeom prst="roundRect">
@@ -13139,7 +11886,7 @@
         </p:nvSpPr>
         <p:spPr>
           <a:xfrm>
-            <a:off x="10515847" y="3111500"/>
+            <a:off x="10515847" y="3270250"/>
             <a:ext cx="63500" cy="266700"/>
           </a:xfrm>
           <a:prstGeom prst="roundRect">
@@ -13182,7 +11929,7 @@
         </p:nvSpPr>
         <p:spPr>
           <a:xfrm>
-            <a:off x="7438002" y="3143250"/>
+            <a:off x="7438002" y="3302000"/>
             <a:ext cx="3027045" cy="190500"/>
           </a:xfrm>
           <a:prstGeom prst="rect">
@@ -13191,8 +11938,8 @@
           <a:noFill/>
         </p:spPr>
         <p:txBody>
-          <a:bodyPr wrap="square" lIns="0" rIns="0" tIns="0" bIns="0" anchor="t">
-            <a:spAutoFit/>
+          <a:bodyPr wrap="none" lIns="0" rIns="0" tIns="0" bIns="0" anchor="t">
+            <a:normAutofit/>
           </a:bodyPr>
           <a:lstStyle/>
           <a:p>
@@ -13224,8 +11971,8 @@
         </p:nvSpPr>
         <p:spPr>
           <a:xfrm>
-            <a:off x="6413500" y="3689350"/>
-            <a:ext cx="342900" cy="215900"/>
+            <a:off x="6413500" y="3848099"/>
+            <a:ext cx="342900" cy="258572"/>
           </a:xfrm>
           <a:prstGeom prst="rect">
             <a:avLst/>
@@ -13233,8 +11980,8 @@
           <a:noFill/>
         </p:spPr>
         <p:txBody>
-          <a:bodyPr wrap="square" lIns="0" rIns="0" tIns="0" bIns="0" anchor="t">
-            <a:spAutoFit/>
+          <a:bodyPr wrap="none" lIns="0" rIns="0" tIns="0" bIns="0" anchor="t">
+            <a:normAutofit/>
           </a:bodyPr>
           <a:lstStyle/>
           <a:p>
@@ -13266,7 +12013,7 @@
         </p:nvSpPr>
         <p:spPr>
           <a:xfrm>
-            <a:off x="6807200" y="3613150"/>
+            <a:off x="6807200" y="3771900"/>
             <a:ext cx="4813300" cy="368300"/>
           </a:xfrm>
           <a:prstGeom prst="roundRect">
@@ -13309,7 +12056,7 @@
         </p:nvCxnSpPr>
         <p:spPr>
           <a:xfrm>
-            <a:off x="6807200" y="3937000"/>
+            <a:off x="6807200" y="4095750"/>
             <a:ext cx="541496" cy="0"/>
           </a:xfrm>
           <a:prstGeom prst="line">
@@ -13344,7 +12091,7 @@
         </p:nvSpPr>
         <p:spPr>
           <a:xfrm>
-            <a:off x="7348696" y="3663950"/>
+            <a:off x="7348696" y="3822700"/>
             <a:ext cx="2984246" cy="266700"/>
           </a:xfrm>
           <a:prstGeom prst="roundRect">
@@ -13389,7 +12136,7 @@
         </p:nvSpPr>
         <p:spPr>
           <a:xfrm>
-            <a:off x="10332942" y="3663950"/>
+            <a:off x="10332942" y="3822700"/>
             <a:ext cx="77012" cy="266700"/>
           </a:xfrm>
           <a:prstGeom prst="roundRect">
@@ -13432,7 +12179,7 @@
         </p:nvSpPr>
         <p:spPr>
           <a:xfrm>
-            <a:off x="7399496" y="3695700"/>
+            <a:off x="7399496" y="3854450"/>
             <a:ext cx="2882646" cy="190500"/>
           </a:xfrm>
           <a:prstGeom prst="rect">
@@ -13441,8 +12188,8 @@
           <a:noFill/>
         </p:spPr>
         <p:txBody>
-          <a:bodyPr wrap="square" lIns="0" rIns="0" tIns="0" bIns="0" anchor="t">
-            <a:spAutoFit/>
+          <a:bodyPr wrap="none" lIns="0" rIns="0" tIns="0" bIns="0" anchor="t">
+            <a:normAutofit/>
           </a:bodyPr>
           <a:lstStyle/>
           <a:p>
@@ -13474,8 +12221,8 @@
         </p:nvSpPr>
         <p:spPr>
           <a:xfrm>
-            <a:off x="6413500" y="4241800"/>
-            <a:ext cx="342900" cy="215900"/>
+            <a:off x="6413500" y="4400550"/>
+            <a:ext cx="342900" cy="258572"/>
           </a:xfrm>
           <a:prstGeom prst="rect">
             <a:avLst/>
@@ -13483,8 +12230,8 @@
           <a:noFill/>
         </p:spPr>
         <p:txBody>
-          <a:bodyPr wrap="square" lIns="0" rIns="0" tIns="0" bIns="0" anchor="t">
-            <a:spAutoFit/>
+          <a:bodyPr wrap="none" lIns="0" rIns="0" tIns="0" bIns="0" anchor="t">
+            <a:normAutofit/>
           </a:bodyPr>
           <a:lstStyle/>
           <a:p>
@@ -13516,7 +12263,7 @@
         </p:nvSpPr>
         <p:spPr>
           <a:xfrm>
-            <a:off x="6807200" y="4165600"/>
+            <a:off x="6807200" y="4324350"/>
             <a:ext cx="4813300" cy="368300"/>
           </a:xfrm>
           <a:prstGeom prst="roundRect">
@@ -13559,7 +12306,7 @@
         </p:nvCxnSpPr>
         <p:spPr>
           <a:xfrm>
-            <a:off x="6807200" y="4489450"/>
+            <a:off x="6807200" y="4648200"/>
             <a:ext cx="637762" cy="0"/>
           </a:xfrm>
           <a:prstGeom prst="line">
@@ -13594,7 +12341,7 @@
         </p:nvSpPr>
         <p:spPr>
           <a:xfrm>
-            <a:off x="7444962" y="4216400"/>
+            <a:off x="7444962" y="4375150"/>
             <a:ext cx="3773627" cy="266700"/>
           </a:xfrm>
           <a:prstGeom prst="roundRect">
@@ -13639,7 +12386,7 @@
         </p:nvSpPr>
         <p:spPr>
           <a:xfrm>
-            <a:off x="11218589" y="4216400"/>
+            <a:off x="11218589" y="4375150"/>
             <a:ext cx="154025" cy="266700"/>
           </a:xfrm>
           <a:prstGeom prst="roundRect">
@@ -13682,7 +12429,7 @@
         </p:nvSpPr>
         <p:spPr>
           <a:xfrm>
-            <a:off x="7495762" y="4248150"/>
+            <a:off x="7495762" y="4406900"/>
             <a:ext cx="3672027" cy="190500"/>
           </a:xfrm>
           <a:prstGeom prst="rect">
@@ -13691,8 +12438,8 @@
           <a:noFill/>
         </p:spPr>
         <p:txBody>
-          <a:bodyPr wrap="square" lIns="0" rIns="0" tIns="0" bIns="0" anchor="t">
-            <a:spAutoFit/>
+          <a:bodyPr wrap="none" lIns="0" rIns="0" tIns="0" bIns="0" anchor="t">
+            <a:normAutofit/>
           </a:bodyPr>
           <a:lstStyle/>
           <a:p>
@@ -13768,7 +12515,7 @@
         <p:spPr>
           <a:xfrm>
             <a:off x="5664200" y="3206750"/>
-            <a:ext cx="736600" cy="241300"/>
+            <a:ext cx="736600" cy="244856"/>
           </a:xfrm>
           <a:prstGeom prst="rect">
             <a:avLst/>
@@ -13776,8 +12523,8 @@
           <a:noFill/>
         </p:spPr>
         <p:txBody>
-          <a:bodyPr wrap="square" lIns="0" rIns="0" tIns="0" bIns="0" anchor="t">
-            <a:spAutoFit/>
+          <a:bodyPr wrap="none" lIns="0" rIns="0" tIns="0" bIns="0" anchor="t">
+            <a:normAutofit/>
           </a:bodyPr>
           <a:lstStyle/>
           <a:p>
@@ -13809,7 +12556,7 @@
         </p:nvSpPr>
         <p:spPr>
           <a:xfrm>
-            <a:off x="8837225" y="2787650"/>
+            <a:off x="8837225" y="2946400"/>
             <a:ext cx="228600" cy="228600"/>
           </a:xfrm>
           <a:prstGeom prst="ellipse">
@@ -13852,8 +12599,8 @@
         </p:nvSpPr>
         <p:spPr>
           <a:xfrm>
-            <a:off x="8837225" y="2800350"/>
-            <a:ext cx="228600" cy="203200"/>
+            <a:off x="8837225" y="2959100"/>
+            <a:ext cx="228600" cy="244856"/>
           </a:xfrm>
           <a:prstGeom prst="rect">
             <a:avLst/>
@@ -13861,8 +12608,8 @@
           <a:noFill/>
         </p:spPr>
         <p:txBody>
-          <a:bodyPr wrap="square" lIns="0" rIns="0" tIns="0" bIns="0" anchor="ctr">
-            <a:spAutoFit/>
+          <a:bodyPr wrap="none" lIns="0" rIns="0" tIns="0" bIns="0" anchor="ctr">
+            <a:normAutofit/>
           </a:bodyPr>
           <a:lstStyle/>
           <a:p>
@@ -13894,7 +12641,7 @@
         </p:nvCxnSpPr>
         <p:spPr>
           <a:xfrm>
-            <a:off x="8951525" y="3028950"/>
+            <a:off x="8951525" y="3187700"/>
             <a:ext cx="0" cy="184150"/>
           </a:xfrm>
           <a:prstGeom prst="line">
@@ -13929,7 +12676,7 @@
         </p:nvSpPr>
         <p:spPr>
           <a:xfrm>
-            <a:off x="8726519" y="3340100"/>
+            <a:off x="8726519" y="3498850"/>
             <a:ext cx="228600" cy="228600"/>
           </a:xfrm>
           <a:prstGeom prst="ellipse">
@@ -13972,8 +12719,8 @@
         </p:nvSpPr>
         <p:spPr>
           <a:xfrm>
-            <a:off x="8726519" y="3352800"/>
-            <a:ext cx="228600" cy="203200"/>
+            <a:off x="8726519" y="3511550"/>
+            <a:ext cx="228600" cy="244856"/>
           </a:xfrm>
           <a:prstGeom prst="rect">
             <a:avLst/>
@@ -13981,8 +12728,8 @@
           <a:noFill/>
         </p:spPr>
         <p:txBody>
-          <a:bodyPr wrap="square" lIns="0" rIns="0" tIns="0" bIns="0" anchor="ctr">
-            <a:spAutoFit/>
+          <a:bodyPr wrap="none" lIns="0" rIns="0" tIns="0" bIns="0" anchor="ctr">
+            <a:normAutofit/>
           </a:bodyPr>
           <a:lstStyle/>
           <a:p>
@@ -14014,7 +12761,7 @@
         </p:nvCxnSpPr>
         <p:spPr>
           <a:xfrm>
-            <a:off x="8840819" y="3581400"/>
+            <a:off x="8840819" y="3740150"/>
             <a:ext cx="0" cy="184150"/>
           </a:xfrm>
           <a:prstGeom prst="line">
@@ -14049,7 +12796,7 @@
         </p:nvSpPr>
         <p:spPr>
           <a:xfrm>
-            <a:off x="9217475" y="3892550"/>
+            <a:off x="9217475" y="4051300"/>
             <a:ext cx="228600" cy="228600"/>
           </a:xfrm>
           <a:prstGeom prst="ellipse">
@@ -14092,8 +12839,8 @@
         </p:nvSpPr>
         <p:spPr>
           <a:xfrm>
-            <a:off x="9217475" y="3905249"/>
-            <a:ext cx="228600" cy="203200"/>
+            <a:off x="9217475" y="4064000"/>
+            <a:ext cx="228600" cy="244856"/>
           </a:xfrm>
           <a:prstGeom prst="rect">
             <a:avLst/>
@@ -14101,8 +12848,8 @@
           <a:noFill/>
         </p:spPr>
         <p:txBody>
-          <a:bodyPr wrap="square" lIns="0" rIns="0" tIns="0" bIns="0" anchor="ctr">
-            <a:spAutoFit/>
+          <a:bodyPr wrap="none" lIns="0" rIns="0" tIns="0" bIns="0" anchor="ctr">
+            <a:normAutofit/>
           </a:bodyPr>
           <a:lstStyle/>
           <a:p>
@@ -14134,8 +12881,8 @@
         </p:nvCxnSpPr>
         <p:spPr>
           <a:xfrm>
-            <a:off x="9331775" y="4133849"/>
-            <a:ext cx="0" cy="184151"/>
+            <a:off x="9331775" y="4292600"/>
+            <a:ext cx="0" cy="184150"/>
           </a:xfrm>
           <a:prstGeom prst="line">
             <a:avLst/>
@@ -14205,7 +12952,7 @@
         <p:spPr>
           <a:xfrm>
             <a:off x="920750" y="5080000"/>
-            <a:ext cx="2730500" cy="444500"/>
+            <a:ext cx="2730500" cy="520700"/>
           </a:xfrm>
           <a:prstGeom prst="rect">
             <a:avLst/>
@@ -14213,8 +12960,8 @@
           <a:noFill/>
         </p:spPr>
         <p:txBody>
-          <a:bodyPr wrap="square" lIns="0" rIns="0" tIns="0" bIns="0" anchor="t">
-            <a:spAutoFit/>
+          <a:bodyPr wrap="none" lIns="0" rIns="0" tIns="0" bIns="0" anchor="t">
+            <a:normAutofit/>
           </a:bodyPr>
           <a:lstStyle/>
           <a:p>
@@ -14246,8 +12993,8 @@
         </p:nvSpPr>
         <p:spPr>
           <a:xfrm>
-            <a:off x="920750" y="5499100"/>
-            <a:ext cx="2730500" cy="254000"/>
+            <a:off x="920750" y="5626100"/>
+            <a:ext cx="2730500" cy="272288"/>
           </a:xfrm>
           <a:prstGeom prst="rect">
             <a:avLst/>
@@ -14255,8 +13002,8 @@
           <a:noFill/>
         </p:spPr>
         <p:txBody>
-          <a:bodyPr wrap="square" lIns="0" rIns="0" tIns="0" bIns="0" anchor="t">
-            <a:spAutoFit/>
+          <a:bodyPr wrap="none" lIns="0" rIns="0" tIns="0" bIns="0" anchor="t">
+            <a:normAutofit/>
           </a:bodyPr>
           <a:lstStyle/>
           <a:p>
@@ -14289,7 +13036,7 @@
         <p:spPr>
           <a:xfrm>
             <a:off x="4730750" y="5080000"/>
-            <a:ext cx="2730500" cy="444500"/>
+            <a:ext cx="2730500" cy="520700"/>
           </a:xfrm>
           <a:prstGeom prst="rect">
             <a:avLst/>
@@ -14297,8 +13044,8 @@
           <a:noFill/>
         </p:spPr>
         <p:txBody>
-          <a:bodyPr wrap="square" lIns="0" rIns="0" tIns="0" bIns="0" anchor="t">
-            <a:spAutoFit/>
+          <a:bodyPr wrap="none" lIns="0" rIns="0" tIns="0" bIns="0" anchor="t">
+            <a:normAutofit/>
           </a:bodyPr>
           <a:lstStyle/>
           <a:p>
@@ -14330,8 +13077,8 @@
         </p:nvSpPr>
         <p:spPr>
           <a:xfrm>
-            <a:off x="4730750" y="5499100"/>
-            <a:ext cx="2730500" cy="254000"/>
+            <a:off x="4730750" y="5626100"/>
+            <a:ext cx="2730500" cy="272288"/>
           </a:xfrm>
           <a:prstGeom prst="rect">
             <a:avLst/>
@@ -14339,8 +13086,8 @@
           <a:noFill/>
         </p:spPr>
         <p:txBody>
-          <a:bodyPr wrap="square" lIns="0" rIns="0" tIns="0" bIns="0" anchor="t">
-            <a:spAutoFit/>
+          <a:bodyPr wrap="none" lIns="0" rIns="0" tIns="0" bIns="0" anchor="t">
+            <a:normAutofit/>
           </a:bodyPr>
           <a:lstStyle/>
           <a:p>
@@ -14373,7 +13120,7 @@
         <p:spPr>
           <a:xfrm>
             <a:off x="8540750" y="5080000"/>
-            <a:ext cx="2730500" cy="444500"/>
+            <a:ext cx="2730500" cy="520700"/>
           </a:xfrm>
           <a:prstGeom prst="rect">
             <a:avLst/>
@@ -14381,8 +13128,8 @@
           <a:noFill/>
         </p:spPr>
         <p:txBody>
-          <a:bodyPr wrap="square" lIns="0" rIns="0" tIns="0" bIns="0" anchor="t">
-            <a:spAutoFit/>
+          <a:bodyPr wrap="none" lIns="0" rIns="0" tIns="0" bIns="0" anchor="t">
+            <a:normAutofit/>
           </a:bodyPr>
           <a:lstStyle/>
           <a:p>
@@ -14414,8 +13161,8 @@
         </p:nvSpPr>
         <p:spPr>
           <a:xfrm>
-            <a:off x="8540750" y="5499100"/>
-            <a:ext cx="2730500" cy="254000"/>
+            <a:off x="8540750" y="5626100"/>
+            <a:ext cx="2730500" cy="272288"/>
           </a:xfrm>
           <a:prstGeom prst="rect">
             <a:avLst/>
@@ -14423,8 +13170,8 @@
           <a:noFill/>
         </p:spPr>
         <p:txBody>
-          <a:bodyPr wrap="square" lIns="0" rIns="0" tIns="0" bIns="0" anchor="t">
-            <a:spAutoFit/>
+          <a:bodyPr wrap="none" lIns="0" rIns="0" tIns="0" bIns="0" anchor="t">
+            <a:normAutofit/>
           </a:bodyPr>
           <a:lstStyle/>
           <a:p>
@@ -14534,8 +13281,8 @@
           <a:noFill/>
         </p:spPr>
         <p:txBody>
-          <a:bodyPr wrap="square" lIns="0" rIns="0" tIns="0" bIns="0" anchor="t">
-            <a:spAutoFit/>
+          <a:bodyPr wrap="none" lIns="0" rIns="0" tIns="0" bIns="0" anchor="t">
+            <a:normAutofit/>
           </a:bodyPr>
           <a:lstStyle/>
           <a:p>
@@ -14554,7 +13301,7 @@
                 </a:solidFill>
                 <a:latin typeface="NanumSquare"/>
               </a:rPr>
-              <a:t>Tail은 얼마나 줄었나</a:t>
+              <a:t>실제 Gemma replay에서도 Tail이 감소했다</a:t>
             </a:r>
           </a:p>
         </p:txBody>
@@ -14576,8 +13323,8 @@
           <a:noFill/>
         </p:spPr>
         <p:txBody>
-          <a:bodyPr wrap="square" lIns="0" rIns="0" tIns="0" bIns="0" anchor="t">
-            <a:spAutoFit/>
+          <a:bodyPr wrap="none" lIns="0" rIns="0" tIns="0" bIns="0" anchor="t">
+            <a:normAutofit/>
           </a:bodyPr>
           <a:lstStyle/>
           <a:p>
@@ -14596,7 +13343,7 @@
                 </a:solidFill>
                 <a:latin typeface="NanumSquare"/>
               </a:rPr>
-              <a:t>작업 치우침 조건에서 p95와 p99가 모두 약 18% 감소했다.</a:t>
+              <a:t>실제 replay의 p95·p99 감소를 확인하고 별도 stress로 효과 조건을 분리했다.</a:t>
             </a:r>
           </a:p>
         </p:txBody>
@@ -14609,8 +13356,8 @@
         </p:nvSpPr>
         <p:spPr>
           <a:xfrm>
-            <a:off x="1397000" y="1778000"/>
-            <a:ext cx="2794000" cy="292100"/>
+            <a:off x="1397000" y="1905000"/>
+            <a:ext cx="2794000" cy="354584"/>
           </a:xfrm>
           <a:prstGeom prst="rect">
             <a:avLst/>
@@ -14618,8 +13365,8 @@
           <a:noFill/>
         </p:spPr>
         <p:txBody>
-          <a:bodyPr wrap="square" lIns="0" rIns="0" tIns="0" bIns="0" anchor="t">
-            <a:spAutoFit/>
+          <a:bodyPr wrap="none" lIns="0" rIns="0" tIns="0" bIns="0" anchor="t">
+            <a:normAutofit/>
           </a:bodyPr>
           <a:lstStyle/>
           <a:p>
@@ -14651,8 +13398,8 @@
         </p:nvSpPr>
         <p:spPr>
           <a:xfrm>
-            <a:off x="1873250" y="2562965"/>
-            <a:ext cx="762000" cy="2580534"/>
+            <a:off x="1873250" y="2709620"/>
+            <a:ext cx="762000" cy="2433879"/>
           </a:xfrm>
           <a:prstGeom prst="roundRect">
             <a:avLst/>
@@ -14694,8 +13441,8 @@
         </p:nvSpPr>
         <p:spPr>
           <a:xfrm>
-            <a:off x="1873250" y="5270500"/>
-            <a:ext cx="762000" cy="254000"/>
+            <a:off x="1873250" y="5175250"/>
+            <a:ext cx="762000" cy="299720"/>
           </a:xfrm>
           <a:prstGeom prst="rect">
             <a:avLst/>
@@ -14703,8 +13450,8 @@
           <a:noFill/>
         </p:spPr>
         <p:txBody>
-          <a:bodyPr wrap="square" lIns="0" rIns="0" tIns="0" bIns="0" anchor="t">
-            <a:spAutoFit/>
+          <a:bodyPr wrap="none" lIns="0" rIns="0" tIns="0" bIns="0" anchor="t">
+            <a:normAutofit/>
           </a:bodyPr>
           <a:lstStyle/>
           <a:p>
@@ -14730,56 +13477,14 @@
       </p:sp>
       <p:sp>
         <p:nvSpPr>
-          <p:cNvPr id="8" name="TextBox 7"/>
-          <p:cNvSpPr txBox="1"/>
-          <p:nvPr/>
-        </p:nvSpPr>
-        <p:spPr>
-          <a:xfrm>
-            <a:off x="1682750" y="2207365"/>
-            <a:ext cx="1143000" cy="279400"/>
-          </a:xfrm>
-          <a:prstGeom prst="rect">
-            <a:avLst/>
-          </a:prstGeom>
-          <a:noFill/>
-        </p:spPr>
-        <p:txBody>
-          <a:bodyPr wrap="square" lIns="0" rIns="0" tIns="0" bIns="0" anchor="t">
-            <a:spAutoFit/>
-          </a:bodyPr>
-          <a:lstStyle/>
-          <a:p>
-            <a:pPr algn="ctr">
-              <a:spcBef>
-                <a:spcPts val="0"/>
-              </a:spcBef>
-              <a:spcAft>
-                <a:spcPts val="0"/>
-              </a:spcAft>
-            </a:pPr>
-            <a:r>
-              <a:rPr sz="2100" b="1">
-                <a:solidFill>
-                  <a:srgbClr val="F4F7FB"/>
-                </a:solidFill>
-                <a:latin typeface="NanumSquare"/>
-              </a:rPr>
-              <a:t>285.3k</a:t>
-            </a:r>
-          </a:p>
-        </p:txBody>
-      </p:sp>
-      <p:sp>
-        <p:nvSpPr>
-          <p:cNvPr id="9" name="Rounded Rectangle 8"/>
+          <p:cNvPr id="8" name="Rounded Rectangle 7"/>
           <p:cNvSpPr/>
           <p:nvPr/>
         </p:nvSpPr>
         <p:spPr>
           <a:xfrm>
-            <a:off x="3016250" y="3030608"/>
-            <a:ext cx="762000" cy="2112891"/>
+            <a:off x="3016250" y="3076483"/>
+            <a:ext cx="762000" cy="2067016"/>
           </a:xfrm>
           <a:prstGeom prst="roundRect">
             <a:avLst/>
@@ -14815,14 +13520,14 @@
       </p:sp>
       <p:sp>
         <p:nvSpPr>
-          <p:cNvPr id="10" name="TextBox 9"/>
+          <p:cNvPr id="9" name="TextBox 8"/>
           <p:cNvSpPr txBox="1"/>
           <p:nvPr/>
         </p:nvSpPr>
         <p:spPr>
           <a:xfrm>
-            <a:off x="3016250" y="5270500"/>
-            <a:ext cx="762000" cy="254000"/>
+            <a:off x="3016250" y="5175250"/>
+            <a:ext cx="762000" cy="299720"/>
           </a:xfrm>
           <a:prstGeom prst="rect">
             <a:avLst/>
@@ -14830,8 +13535,8 @@
           <a:noFill/>
         </p:spPr>
         <p:txBody>
-          <a:bodyPr wrap="square" lIns="0" rIns="0" tIns="0" bIns="0" anchor="t">
-            <a:spAutoFit/>
+          <a:bodyPr wrap="none" lIns="0" rIns="0" tIns="0" bIns="0" anchor="t">
+            <a:normAutofit/>
           </a:bodyPr>
           <a:lstStyle/>
           <a:p>
@@ -14857,14 +13562,14 @@
       </p:sp>
       <p:sp>
         <p:nvSpPr>
-          <p:cNvPr id="11" name="TextBox 10"/>
+          <p:cNvPr id="10" name="TextBox 9"/>
           <p:cNvSpPr txBox="1"/>
           <p:nvPr/>
         </p:nvSpPr>
         <p:spPr>
           <a:xfrm>
-            <a:off x="2825750" y="2675008"/>
-            <a:ext cx="1143000" cy="279400"/>
+            <a:off x="1428750" y="5524500"/>
+            <a:ext cx="2730500" cy="519176"/>
           </a:xfrm>
           <a:prstGeom prst="rect">
             <a:avLst/>
@@ -14872,50 +13577,8 @@
           <a:noFill/>
         </p:spPr>
         <p:txBody>
-          <a:bodyPr wrap="square" lIns="0" rIns="0" tIns="0" bIns="0" anchor="t">
-            <a:spAutoFit/>
-          </a:bodyPr>
-          <a:lstStyle/>
-          <a:p>
-            <a:pPr algn="ctr">
-              <a:spcBef>
-                <a:spcPts val="0"/>
-              </a:spcBef>
-              <a:spcAft>
-                <a:spcPts val="0"/>
-              </a:spcAft>
-            </a:pPr>
-            <a:r>
-              <a:rPr sz="2100" b="1">
-                <a:solidFill>
-                  <a:srgbClr val="F4F7FB"/>
-                </a:solidFill>
-                <a:latin typeface="NanumSquare"/>
-              </a:rPr>
-              <a:t>233.6k</a:t>
-            </a:r>
-          </a:p>
-        </p:txBody>
-      </p:sp>
-      <p:sp>
-        <p:nvSpPr>
-          <p:cNvPr id="12" name="TextBox 11"/>
-          <p:cNvSpPr txBox="1"/>
-          <p:nvPr/>
-        </p:nvSpPr>
-        <p:spPr>
-          <a:xfrm>
-            <a:off x="1428750" y="5683250"/>
-            <a:ext cx="2730500" cy="444500"/>
-          </a:xfrm>
-          <a:prstGeom prst="rect">
-            <a:avLst/>
-          </a:prstGeom>
-          <a:noFill/>
-        </p:spPr>
-        <p:txBody>
-          <a:bodyPr wrap="square" lIns="0" rIns="0" tIns="0" bIns="0" anchor="t">
-            <a:spAutoFit/>
+          <a:bodyPr wrap="none" lIns="0" rIns="0" tIns="0" bIns="0" anchor="t">
+            <a:normAutofit/>
           </a:bodyPr>
           <a:lstStyle/>
           <a:p>
@@ -14934,21 +13597,21 @@
                 </a:solidFill>
                 <a:latin typeface="NanumSquare"/>
               </a:rPr>
-              <a:t>-18.12%</a:t>
-            </a:r>
-          </a:p>
-        </p:txBody>
-      </p:sp>
-      <p:sp>
-        <p:nvSpPr>
-          <p:cNvPr id="13" name="TextBox 12"/>
+              <a:t>-15.07%</a:t>
+            </a:r>
+          </a:p>
+        </p:txBody>
+      </p:sp>
+      <p:sp>
+        <p:nvSpPr>
+          <p:cNvPr id="11" name="TextBox 10"/>
           <p:cNvSpPr txBox="1"/>
           <p:nvPr/>
         </p:nvSpPr>
         <p:spPr>
           <a:xfrm>
-            <a:off x="1428750" y="6102350"/>
-            <a:ext cx="2730500" cy="254000"/>
+            <a:off x="5905500" y="1905000"/>
+            <a:ext cx="2794000" cy="354584"/>
           </a:xfrm>
           <a:prstGeom prst="rect">
             <a:avLst/>
@@ -14956,50 +13619,8 @@
           <a:noFill/>
         </p:spPr>
         <p:txBody>
-          <a:bodyPr wrap="square" lIns="0" rIns="0" tIns="0" bIns="0" anchor="t">
-            <a:spAutoFit/>
-          </a:bodyPr>
-          <a:lstStyle/>
-          <a:p>
-            <a:pPr algn="ctr">
-              <a:spcBef>
-                <a:spcPts val="0"/>
-              </a:spcBef>
-              <a:spcAft>
-                <a:spcPts val="0"/>
-              </a:spcAft>
-            </a:pPr>
-            <a:r>
-              <a:rPr sz="1800" b="0">
-                <a:solidFill>
-                  <a:srgbClr val="91A5BA"/>
-                </a:solidFill>
-                <a:latin typeface="NanumSquare"/>
-              </a:rPr>
-              <a:t>p95 감소</a:t>
-            </a:r>
-          </a:p>
-        </p:txBody>
-      </p:sp>
-      <p:sp>
-        <p:nvSpPr>
-          <p:cNvPr id="14" name="TextBox 13"/>
-          <p:cNvSpPr txBox="1"/>
-          <p:nvPr/>
-        </p:nvSpPr>
-        <p:spPr>
-          <a:xfrm>
-            <a:off x="5905500" y="1778000"/>
-            <a:ext cx="2794000" cy="292100"/>
-          </a:xfrm>
-          <a:prstGeom prst="rect">
-            <a:avLst/>
-          </a:prstGeom>
-          <a:noFill/>
-        </p:spPr>
-        <p:txBody>
-          <a:bodyPr wrap="square" lIns="0" rIns="0" tIns="0" bIns="0" anchor="t">
-            <a:spAutoFit/>
+          <a:bodyPr wrap="none" lIns="0" rIns="0" tIns="0" bIns="0" anchor="t">
+            <a:normAutofit/>
           </a:bodyPr>
           <a:lstStyle/>
           <a:p>
@@ -15025,14 +13646,14 @@
       </p:sp>
       <p:sp>
         <p:nvSpPr>
-          <p:cNvPr id="15" name="Rounded Rectangle 14"/>
+          <p:cNvPr id="12" name="Rounded Rectangle 11"/>
           <p:cNvSpPr/>
           <p:nvPr/>
         </p:nvSpPr>
         <p:spPr>
           <a:xfrm>
-            <a:off x="6381750" y="2410544"/>
-            <a:ext cx="762000" cy="2732955"/>
+            <a:off x="6381750" y="2357168"/>
+            <a:ext cx="762000" cy="2786331"/>
           </a:xfrm>
           <a:prstGeom prst="roundRect">
             <a:avLst/>
@@ -15068,14 +13689,14 @@
       </p:sp>
       <p:sp>
         <p:nvSpPr>
-          <p:cNvPr id="16" name="TextBox 15"/>
+          <p:cNvPr id="13" name="TextBox 12"/>
           <p:cNvSpPr txBox="1"/>
           <p:nvPr/>
         </p:nvSpPr>
         <p:spPr>
           <a:xfrm>
-            <a:off x="6381750" y="5270500"/>
-            <a:ext cx="762000" cy="254000"/>
+            <a:off x="6381750" y="5175250"/>
+            <a:ext cx="762000" cy="299720"/>
           </a:xfrm>
           <a:prstGeom prst="rect">
             <a:avLst/>
@@ -15083,8 +13704,8 @@
           <a:noFill/>
         </p:spPr>
         <p:txBody>
-          <a:bodyPr wrap="square" lIns="0" rIns="0" tIns="0" bIns="0" anchor="t">
-            <a:spAutoFit/>
+          <a:bodyPr wrap="none" lIns="0" rIns="0" tIns="0" bIns="0" anchor="t">
+            <a:normAutofit/>
           </a:bodyPr>
           <a:lstStyle/>
           <a:p>
@@ -15110,56 +13731,14 @@
       </p:sp>
       <p:sp>
         <p:nvSpPr>
-          <p:cNvPr id="17" name="TextBox 16"/>
-          <p:cNvSpPr txBox="1"/>
-          <p:nvPr/>
-        </p:nvSpPr>
-        <p:spPr>
-          <a:xfrm>
-            <a:off x="6191250" y="2054944"/>
-            <a:ext cx="1143000" cy="279400"/>
-          </a:xfrm>
-          <a:prstGeom prst="rect">
-            <a:avLst/>
-          </a:prstGeom>
-          <a:noFill/>
-        </p:spPr>
-        <p:txBody>
-          <a:bodyPr wrap="square" lIns="0" rIns="0" tIns="0" bIns="0" anchor="t">
-            <a:spAutoFit/>
-          </a:bodyPr>
-          <a:lstStyle/>
-          <a:p>
-            <a:pPr algn="ctr">
-              <a:spcBef>
-                <a:spcPts val="0"/>
-              </a:spcBef>
-              <a:spcAft>
-                <a:spcPts val="0"/>
-              </a:spcAft>
-            </a:pPr>
-            <a:r>
-              <a:rPr sz="2100" b="1">
-                <a:solidFill>
-                  <a:srgbClr val="F4F7FB"/>
-                </a:solidFill>
-                <a:latin typeface="NanumSquare"/>
-              </a:rPr>
-              <a:t>302.2k</a:t>
-            </a:r>
-          </a:p>
-        </p:txBody>
-      </p:sp>
-      <p:sp>
-        <p:nvSpPr>
-          <p:cNvPr id="18" name="Rounded Rectangle 17"/>
+          <p:cNvPr id="14" name="Rounded Rectangle 13"/>
           <p:cNvSpPr/>
           <p:nvPr/>
         </p:nvSpPr>
         <p:spPr>
           <a:xfrm>
-            <a:off x="7524749" y="2906966"/>
-            <a:ext cx="762000" cy="2236533"/>
+            <a:off x="7524749" y="2764263"/>
+            <a:ext cx="762000" cy="2379236"/>
           </a:xfrm>
           <a:prstGeom prst="roundRect">
             <a:avLst/>
@@ -15195,14 +13774,14 @@
       </p:sp>
       <p:sp>
         <p:nvSpPr>
-          <p:cNvPr id="19" name="TextBox 18"/>
+          <p:cNvPr id="15" name="TextBox 14"/>
           <p:cNvSpPr txBox="1"/>
           <p:nvPr/>
         </p:nvSpPr>
         <p:spPr>
           <a:xfrm>
-            <a:off x="7524749" y="5270500"/>
-            <a:ext cx="762000" cy="254000"/>
+            <a:off x="7524749" y="5175250"/>
+            <a:ext cx="762000" cy="299720"/>
           </a:xfrm>
           <a:prstGeom prst="rect">
             <a:avLst/>
@@ -15210,8 +13789,8 @@
           <a:noFill/>
         </p:spPr>
         <p:txBody>
-          <a:bodyPr wrap="square" lIns="0" rIns="0" tIns="0" bIns="0" anchor="t">
-            <a:spAutoFit/>
+          <a:bodyPr wrap="none" lIns="0" rIns="0" tIns="0" bIns="0" anchor="t">
+            <a:normAutofit/>
           </a:bodyPr>
           <a:lstStyle/>
           <a:p>
@@ -15237,14 +13816,14 @@
       </p:sp>
       <p:sp>
         <p:nvSpPr>
-          <p:cNvPr id="20" name="TextBox 19"/>
+          <p:cNvPr id="16" name="TextBox 15"/>
           <p:cNvSpPr txBox="1"/>
           <p:nvPr/>
         </p:nvSpPr>
         <p:spPr>
           <a:xfrm>
-            <a:off x="7334250" y="2551366"/>
-            <a:ext cx="1143000" cy="279400"/>
+            <a:off x="5937250" y="5524500"/>
+            <a:ext cx="2730500" cy="519176"/>
           </a:xfrm>
           <a:prstGeom prst="rect">
             <a:avLst/>
@@ -15252,50 +13831,8 @@
           <a:noFill/>
         </p:spPr>
         <p:txBody>
-          <a:bodyPr wrap="square" lIns="0" rIns="0" tIns="0" bIns="0" anchor="t">
-            <a:spAutoFit/>
-          </a:bodyPr>
-          <a:lstStyle/>
-          <a:p>
-            <a:pPr algn="ctr">
-              <a:spcBef>
-                <a:spcPts val="0"/>
-              </a:spcBef>
-              <a:spcAft>
-                <a:spcPts val="0"/>
-              </a:spcAft>
-            </a:pPr>
-            <a:r>
-              <a:rPr sz="2100" b="1">
-                <a:solidFill>
-                  <a:srgbClr val="F4F7FB"/>
-                </a:solidFill>
-                <a:latin typeface="NanumSquare"/>
-              </a:rPr>
-              <a:t>247.3k</a:t>
-            </a:r>
-          </a:p>
-        </p:txBody>
-      </p:sp>
-      <p:sp>
-        <p:nvSpPr>
-          <p:cNvPr id="21" name="TextBox 20"/>
-          <p:cNvSpPr txBox="1"/>
-          <p:nvPr/>
-        </p:nvSpPr>
-        <p:spPr>
-          <a:xfrm>
-            <a:off x="5937250" y="5683250"/>
-            <a:ext cx="2730500" cy="444500"/>
-          </a:xfrm>
-          <a:prstGeom prst="rect">
-            <a:avLst/>
-          </a:prstGeom>
-          <a:noFill/>
-        </p:spPr>
-        <p:txBody>
-          <a:bodyPr wrap="square" lIns="0" rIns="0" tIns="0" bIns="0" anchor="t">
-            <a:spAutoFit/>
+          <a:bodyPr wrap="none" lIns="0" rIns="0" tIns="0" bIns="0" anchor="t">
+            <a:normAutofit/>
           </a:bodyPr>
           <a:lstStyle/>
           <a:p>
@@ -15314,56 +13851,14 @@
                 </a:solidFill>
                 <a:latin typeface="NanumSquare"/>
               </a:rPr>
-              <a:t>-18.16%</a:t>
-            </a:r>
-          </a:p>
-        </p:txBody>
-      </p:sp>
-      <p:sp>
-        <p:nvSpPr>
-          <p:cNvPr id="22" name="TextBox 21"/>
-          <p:cNvSpPr txBox="1"/>
-          <p:nvPr/>
-        </p:nvSpPr>
-        <p:spPr>
-          <a:xfrm>
-            <a:off x="5937250" y="6102350"/>
-            <a:ext cx="2730500" cy="254000"/>
-          </a:xfrm>
-          <a:prstGeom prst="rect">
-            <a:avLst/>
-          </a:prstGeom>
-          <a:noFill/>
-        </p:spPr>
-        <p:txBody>
-          <a:bodyPr wrap="square" lIns="0" rIns="0" tIns="0" bIns="0" anchor="t">
-            <a:spAutoFit/>
-          </a:bodyPr>
-          <a:lstStyle/>
-          <a:p>
-            <a:pPr algn="ctr">
-              <a:spcBef>
-                <a:spcPts val="0"/>
-              </a:spcBef>
-              <a:spcAft>
-                <a:spcPts val="0"/>
-              </a:spcAft>
-            </a:pPr>
-            <a:r>
-              <a:rPr sz="1800" b="0">
-                <a:solidFill>
-                  <a:srgbClr val="91A5BA"/>
-                </a:solidFill>
-                <a:latin typeface="NanumSquare"/>
-              </a:rPr>
-              <a:t>p99 감소</a:t>
+              <a:t>-14.61%</a:t>
             </a:r>
           </a:p>
         </p:txBody>
       </p:sp>
       <p:cxnSp>
         <p:nvCxnSpPr>
-          <p:cNvPr id="23" name="Connector 22"/>
+          <p:cNvPr id="17" name="Connector 16"/>
           <p:cNvCxnSpPr/>
           <p:nvPr/>
         </p:nvCxnSpPr>
@@ -15398,14 +13893,14 @@
       </p:cxnSp>
       <p:sp>
         <p:nvSpPr>
-          <p:cNvPr id="24" name="TextBox 23"/>
+          <p:cNvPr id="18" name="TextBox 17"/>
           <p:cNvSpPr txBox="1"/>
           <p:nvPr/>
         </p:nvSpPr>
         <p:spPr>
           <a:xfrm>
-            <a:off x="2730500" y="1555750"/>
-            <a:ext cx="6731000" cy="228600"/>
+            <a:off x="2730500" y="1492250"/>
+            <a:ext cx="6731000" cy="272288"/>
           </a:xfrm>
           <a:prstGeom prst="rect">
             <a:avLst/>
@@ -15413,8 +13908,8 @@
           <a:noFill/>
         </p:spPr>
         <p:txBody>
-          <a:bodyPr wrap="square" lIns="0" rIns="0" tIns="0" bIns="0" anchor="t">
-            <a:spAutoFit/>
+          <a:bodyPr wrap="none" lIns="0" rIns="0" tIns="0" bIns="0" anchor="t">
+            <a:normAutofit/>
           </a:bodyPr>
           <a:lstStyle/>
           <a:p>
@@ -15427,13 +13922,100 @@
               </a:spcAft>
             </a:pPr>
             <a:r>
-              <a:rPr sz="1500" b="1">
+              <a:rPr sz="1800" b="1">
                 <a:solidFill>
                   <a:srgbClr val="F1B44C"/>
                 </a:solidFill>
                 <a:latin typeface="NanumSquare"/>
               </a:rPr>
-              <a:t>실험 B · 제어된 치우침 스트레스 · 1,000개 작업 · 5개 seed 중앙값 · 분석 모델</a:t>
+              <a:t>실제 Gemma projection ledger · 5,856 jobs · 분석 replay</a:t>
+            </a:r>
+          </a:p>
+        </p:txBody>
+      </p:sp>
+      <p:sp>
+        <p:nvSpPr>
+          <p:cNvPr id="19" name="Rounded Rectangle 18"/>
+          <p:cNvSpPr/>
+          <p:nvPr/>
+        </p:nvSpPr>
+        <p:spPr>
+          <a:xfrm>
+            <a:off x="3619500" y="6159500"/>
+            <a:ext cx="4953000" cy="349250"/>
+          </a:xfrm>
+          <a:prstGeom prst="roundRect">
+            <a:avLst/>
+          </a:prstGeom>
+          <a:solidFill>
+            <a:srgbClr val="0B1627"/>
+          </a:solidFill>
+          <a:ln w="25400">
+            <a:solidFill>
+              <a:srgbClr val="28B6A6"/>
+            </a:solidFill>
+          </a:ln>
+        </p:spPr>
+        <p:style>
+          <a:lnRef idx="1">
+            <a:schemeClr val="accent1"/>
+          </a:lnRef>
+          <a:fillRef idx="3">
+            <a:schemeClr val="accent1"/>
+          </a:fillRef>
+          <a:effectRef idx="2">
+            <a:schemeClr val="accent1"/>
+          </a:effectRef>
+          <a:fontRef idx="minor">
+            <a:schemeClr val="lt1"/>
+          </a:fontRef>
+        </p:style>
+        <p:txBody>
+          <a:bodyPr rtlCol="0" anchor="ctr"/>
+          <a:lstStyle/>
+          <a:p>
+            <a:pPr algn="ctr"/>
+          </a:p>
+        </p:txBody>
+      </p:sp>
+      <p:sp>
+        <p:nvSpPr>
+          <p:cNvPr id="20" name="TextBox 19"/>
+          <p:cNvSpPr txBox="1"/>
+          <p:nvPr/>
+        </p:nvSpPr>
+        <p:spPr>
+          <a:xfrm>
+            <a:off x="3746500" y="6184900"/>
+            <a:ext cx="4699000" cy="279400"/>
+          </a:xfrm>
+          <a:prstGeom prst="rect">
+            <a:avLst/>
+          </a:prstGeom>
+          <a:noFill/>
+        </p:spPr>
+        <p:txBody>
+          <a:bodyPr wrap="none" lIns="0" rIns="0" tIns="0" bIns="0" anchor="t">
+            <a:normAutofit/>
+          </a:bodyPr>
+          <a:lstStyle/>
+          <a:p>
+            <a:pPr algn="ctr">
+              <a:spcBef>
+                <a:spcPts val="0"/>
+              </a:spcBef>
+              <a:spcAft>
+                <a:spcPts val="0"/>
+              </a:spcAft>
+            </a:pPr>
+            <a:r>
+              <a:rPr sz="1800" b="1">
+                <a:solidFill>
+                  <a:srgbClr val="28B6A6"/>
+                </a:solidFill>
+                <a:latin typeface="NanumSquare"/>
+              </a:rPr>
+              <a:t>별도 skew stress: p95 -18.12%</a:t>
             </a:r>
           </a:p>
         </p:txBody>
@@ -15524,8 +14106,8 @@
           <a:noFill/>
         </p:spPr>
         <p:txBody>
-          <a:bodyPr wrap="square" lIns="0" rIns="0" tIns="0" bIns="0" anchor="t">
-            <a:spAutoFit/>
+          <a:bodyPr wrap="none" lIns="0" rIns="0" tIns="0" bIns="0" anchor="t">
+            <a:normAutofit/>
           </a:bodyPr>
           <a:lstStyle/>
           <a:p>
@@ -15544,7 +14126,7 @@
                 </a:solidFill>
                 <a:latin typeface="NanumSquare"/>
               </a:rPr>
-              <a:t>Work Stealing은 병목을 없애지 않고 이동시킨다</a:t>
+              <a:t>Tail 감소의 비용은 원격 이동이다</a:t>
             </a:r>
           </a:p>
         </p:txBody>
@@ -15566,8 +14148,8 @@
           <a:noFill/>
         </p:spPr>
         <p:txBody>
-          <a:bodyPr wrap="square" lIns="0" rIns="0" tIns="0" bIns="0" anchor="t">
-            <a:spAutoFit/>
+          <a:bodyPr wrap="none" lIns="0" rIns="0" tIns="0" bIns="0" anchor="t">
+            <a:normAutofit/>
           </a:bodyPr>
           <a:lstStyle/>
           <a:p>
@@ -15586,7 +14168,7 @@
                 </a:solidFill>
                 <a:latin typeface="NanumSquare"/>
               </a:rPr>
-              <a:t>큐 대기는 줄어들지만 원격 가중치 이동으로 링크와 메모리 부담이 증가한다.</a:t>
+              <a:t>S3는 S2보다 원격 가중치를 줄이지만 마지막 completion은 조금 늦어진다.</a:t>
             </a:r>
           </a:p>
         </p:txBody>
@@ -15599,8 +14181,8 @@
         </p:nvSpPr>
         <p:spPr>
           <a:xfrm>
-            <a:off x="2730500" y="1638300"/>
-            <a:ext cx="6731000" cy="228600"/>
+            <a:off x="2159000" y="1600200"/>
+            <a:ext cx="7874000" cy="299720"/>
           </a:xfrm>
           <a:prstGeom prst="rect">
             <a:avLst/>
@@ -15608,8 +14190,8 @@
           <a:noFill/>
         </p:spPr>
         <p:txBody>
-          <a:bodyPr wrap="square" lIns="0" rIns="0" tIns="0" bIns="0" anchor="t">
-            <a:spAutoFit/>
+          <a:bodyPr wrap="none" lIns="0" rIns="0" tIns="0" bIns="0" anchor="t">
+            <a:normAutofit/>
           </a:bodyPr>
           <a:lstStyle/>
           <a:p>
@@ -15622,13 +14204,13 @@
               </a:spcAft>
             </a:pPr>
             <a:r>
-              <a:rPr sz="1500" b="1">
+              <a:rPr sz="2000" b="1">
                 <a:solidFill>
                   <a:srgbClr val="F1B44C"/>
                 </a:solidFill>
                 <a:latin typeface="NanumSquare"/>
               </a:rPr>
-              <a:t>실험 B · 제어된 치우침 스트레스 · 1,000개 작업 · 5개 seed 중앙값 · 분석 모델</a:t>
+              <a:t>합성 skew · 1,000 jobs · 5-seed 중앙값 · 분석 모델</a:t>
             </a:r>
           </a:p>
         </p:txBody>
@@ -15685,7 +14267,7 @@
         <p:spPr>
           <a:xfrm>
             <a:off x="952500" y="2254250"/>
-            <a:ext cx="469899" cy="330200"/>
+            <a:ext cx="469899" cy="354584"/>
           </a:xfrm>
           <a:prstGeom prst="rect">
             <a:avLst/>
@@ -15693,8 +14275,8 @@
           <a:noFill/>
         </p:spPr>
         <p:txBody>
-          <a:bodyPr wrap="square" lIns="0" rIns="0" tIns="0" bIns="0" anchor="ctr">
-            <a:spAutoFit/>
+          <a:bodyPr wrap="none" lIns="0" rIns="0" tIns="0" bIns="0" anchor="ctr">
+            <a:normAutofit/>
           </a:bodyPr>
           <a:lstStyle/>
           <a:p>
@@ -15727,7 +14309,7 @@
         <p:spPr>
           <a:xfrm>
             <a:off x="825500" y="2889250"/>
-            <a:ext cx="2476500" cy="330200"/>
+            <a:ext cx="2476500" cy="354584"/>
           </a:xfrm>
           <a:prstGeom prst="rect">
             <a:avLst/>
@@ -15735,8 +14317,8 @@
           <a:noFill/>
         </p:spPr>
         <p:txBody>
-          <a:bodyPr wrap="square" lIns="0" rIns="0" tIns="0" bIns="0" anchor="t">
-            <a:spAutoFit/>
+          <a:bodyPr wrap="none" lIns="0" rIns="0" tIns="0" bIns="0" anchor="t">
+            <a:normAutofit/>
           </a:bodyPr>
           <a:lstStyle/>
           <a:p>
@@ -15769,7 +14351,7 @@
         <p:spPr>
           <a:xfrm>
             <a:off x="825500" y="3397250"/>
-            <a:ext cx="2476500" cy="584200"/>
+            <a:ext cx="2476500" cy="628904"/>
           </a:xfrm>
           <a:prstGeom prst="rect">
             <a:avLst/>
@@ -15777,8 +14359,8 @@
           <a:noFill/>
         </p:spPr>
         <p:txBody>
-          <a:bodyPr wrap="square" lIns="0" rIns="0" tIns="0" bIns="0" anchor="t">
-            <a:spAutoFit/>
+          <a:bodyPr wrap="none" lIns="0" rIns="0" tIns="0" bIns="0" anchor="t">
+            <a:normAutofit/>
           </a:bodyPr>
           <a:lstStyle/>
           <a:p>
@@ -15819,8 +14401,8 @@
           <a:noFill/>
         </p:spPr>
         <p:txBody>
-          <a:bodyPr wrap="square" lIns="0" rIns="0" tIns="0" bIns="0" anchor="t">
-            <a:spAutoFit/>
+          <a:bodyPr wrap="none" lIns="0" rIns="0" tIns="0" bIns="0" anchor="t">
+            <a:normAutofit/>
           </a:bodyPr>
           <a:lstStyle/>
           <a:p>
@@ -15939,7 +14521,7 @@
         <p:spPr>
           <a:xfrm>
             <a:off x="4635500" y="2254250"/>
-            <a:ext cx="469899" cy="330200"/>
+            <a:ext cx="469899" cy="354584"/>
           </a:xfrm>
           <a:prstGeom prst="rect">
             <a:avLst/>
@@ -15947,8 +14529,8 @@
           <a:noFill/>
         </p:spPr>
         <p:txBody>
-          <a:bodyPr wrap="square" lIns="0" rIns="0" tIns="0" bIns="0" anchor="ctr">
-            <a:spAutoFit/>
+          <a:bodyPr wrap="none" lIns="0" rIns="0" tIns="0" bIns="0" anchor="ctr">
+            <a:normAutofit/>
           </a:bodyPr>
           <a:lstStyle/>
           <a:p>
@@ -15981,7 +14563,7 @@
         <p:spPr>
           <a:xfrm>
             <a:off x="4508500" y="2889250"/>
-            <a:ext cx="2476500" cy="330200"/>
+            <a:ext cx="2476500" cy="354584"/>
           </a:xfrm>
           <a:prstGeom prst="rect">
             <a:avLst/>
@@ -15989,8 +14571,8 @@
           <a:noFill/>
         </p:spPr>
         <p:txBody>
-          <a:bodyPr wrap="square" lIns="0" rIns="0" tIns="0" bIns="0" anchor="t">
-            <a:spAutoFit/>
+          <a:bodyPr wrap="none" lIns="0" rIns="0" tIns="0" bIns="0" anchor="t">
+            <a:normAutofit/>
           </a:bodyPr>
           <a:lstStyle/>
           <a:p>
@@ -16023,7 +14605,7 @@
         <p:spPr>
           <a:xfrm>
             <a:off x="4508500" y="3397250"/>
-            <a:ext cx="2476500" cy="584200"/>
+            <a:ext cx="2476500" cy="628904"/>
           </a:xfrm>
           <a:prstGeom prst="rect">
             <a:avLst/>
@@ -16031,8 +14613,8 @@
           <a:noFill/>
         </p:spPr>
         <p:txBody>
-          <a:bodyPr wrap="square" lIns="0" rIns="0" tIns="0" bIns="0" anchor="t">
-            <a:spAutoFit/>
+          <a:bodyPr wrap="none" lIns="0" rIns="0" tIns="0" bIns="0" anchor="t">
+            <a:normAutofit/>
           </a:bodyPr>
           <a:lstStyle/>
           <a:p>
@@ -16073,8 +14655,8 @@
           <a:noFill/>
         </p:spPr>
         <p:txBody>
-          <a:bodyPr wrap="square" lIns="0" rIns="0" tIns="0" bIns="0" anchor="t">
-            <a:spAutoFit/>
+          <a:bodyPr wrap="none" lIns="0" rIns="0" tIns="0" bIns="0" anchor="t">
+            <a:normAutofit/>
           </a:bodyPr>
           <a:lstStyle/>
           <a:p>
@@ -16193,7 +14775,7 @@
         <p:spPr>
           <a:xfrm>
             <a:off x="8318499" y="2254250"/>
-            <a:ext cx="469899" cy="330200"/>
+            <a:ext cx="469899" cy="354584"/>
           </a:xfrm>
           <a:prstGeom prst="rect">
             <a:avLst/>
@@ -16201,8 +14783,8 @@
           <a:noFill/>
         </p:spPr>
         <p:txBody>
-          <a:bodyPr wrap="square" lIns="0" rIns="0" tIns="0" bIns="0" anchor="ctr">
-            <a:spAutoFit/>
+          <a:bodyPr wrap="none" lIns="0" rIns="0" tIns="0" bIns="0" anchor="ctr">
+            <a:normAutofit/>
           </a:bodyPr>
           <a:lstStyle/>
           <a:p>
@@ -16235,7 +14817,7 @@
         <p:spPr>
           <a:xfrm>
             <a:off x="8191500" y="2889250"/>
-            <a:ext cx="2476500" cy="330200"/>
+            <a:ext cx="2476500" cy="354584"/>
           </a:xfrm>
           <a:prstGeom prst="rect">
             <a:avLst/>
@@ -16243,8 +14825,8 @@
           <a:noFill/>
         </p:spPr>
         <p:txBody>
-          <a:bodyPr wrap="square" lIns="0" rIns="0" tIns="0" bIns="0" anchor="t">
-            <a:spAutoFit/>
+          <a:bodyPr wrap="none" lIns="0" rIns="0" tIns="0" bIns="0" anchor="t">
+            <a:normAutofit/>
           </a:bodyPr>
           <a:lstStyle/>
           <a:p>
@@ -16277,7 +14859,7 @@
         <p:spPr>
           <a:xfrm>
             <a:off x="8191500" y="3397250"/>
-            <a:ext cx="2476500" cy="584200"/>
+            <a:ext cx="2476500" cy="628904"/>
           </a:xfrm>
           <a:prstGeom prst="rect">
             <a:avLst/>
@@ -16285,8 +14867,8 @@
           <a:noFill/>
         </p:spPr>
         <p:txBody>
-          <a:bodyPr wrap="square" lIns="0" rIns="0" tIns="0" bIns="0" anchor="t">
-            <a:spAutoFit/>
+          <a:bodyPr wrap="none" lIns="0" rIns="0" tIns="0" bIns="0" anchor="t">
+            <a:normAutofit/>
           </a:bodyPr>
           <a:lstStyle/>
           <a:p>
@@ -16327,8 +14909,8 @@
           <a:noFill/>
         </p:spPr>
         <p:txBody>
-          <a:bodyPr wrap="square" lIns="0" rIns="0" tIns="0" bIns="0" anchor="t">
-            <a:spAutoFit/>
+          <a:bodyPr wrap="none" lIns="0" rIns="0" tIns="0" bIns="0" anchor="t">
+            <a:normAutofit/>
           </a:bodyPr>
           <a:lstStyle/>
           <a:p>
@@ -16396,7 +14978,7 @@
         <p:spPr>
           <a:xfrm>
             <a:off x="1270000" y="5175250"/>
-            <a:ext cx="1968500" cy="304800"/>
+            <a:ext cx="1968500" cy="327152"/>
           </a:xfrm>
           <a:prstGeom prst="rect">
             <a:avLst/>
@@ -16404,8 +14986,8 @@
           <a:noFill/>
         </p:spPr>
         <p:txBody>
-          <a:bodyPr wrap="square" lIns="0" rIns="0" tIns="0" bIns="0" anchor="t">
-            <a:spAutoFit/>
+          <a:bodyPr wrap="none" lIns="0" rIns="0" tIns="0" bIns="0" anchor="t">
+            <a:normAutofit/>
           </a:bodyPr>
           <a:lstStyle/>
           <a:p>
@@ -16481,7 +15063,7 @@
         <p:spPr>
           <a:xfrm>
             <a:off x="4381500" y="5175250"/>
-            <a:ext cx="2603500" cy="304800"/>
+            <a:ext cx="2603500" cy="327152"/>
           </a:xfrm>
           <a:prstGeom prst="rect">
             <a:avLst/>
@@ -16489,8 +15071,8 @@
           <a:noFill/>
         </p:spPr>
         <p:txBody>
-          <a:bodyPr wrap="square" lIns="0" rIns="0" tIns="0" bIns="0" anchor="t">
-            <a:spAutoFit/>
+          <a:bodyPr wrap="none" lIns="0" rIns="0" tIns="0" bIns="0" anchor="t">
+            <a:normAutofit/>
           </a:bodyPr>
           <a:lstStyle/>
           <a:p>
@@ -16566,7 +15148,7 @@
         <p:spPr>
           <a:xfrm>
             <a:off x="8128000" y="5175250"/>
-            <a:ext cx="2667000" cy="304800"/>
+            <a:ext cx="2667000" cy="327152"/>
           </a:xfrm>
           <a:prstGeom prst="rect">
             <a:avLst/>
@@ -16574,8 +15156,8 @@
           <a:noFill/>
         </p:spPr>
         <p:txBody>
-          <a:bodyPr wrap="square" lIns="0" rIns="0" tIns="0" bIns="0" anchor="t">
-            <a:spAutoFit/>
+          <a:bodyPr wrap="none" lIns="0" rIns="0" tIns="0" bIns="0" anchor="t">
+            <a:normAutofit/>
           </a:bodyPr>
           <a:lstStyle/>
           <a:p>
@@ -16595,6 +15177,48 @@
                 <a:latin typeface="NanumSquare"/>
               </a:rPr>
               <a:t>링크·메모리 부담</a:t>
+            </a:r>
+          </a:p>
+        </p:txBody>
+      </p:sp>
+      <p:sp>
+        <p:nvSpPr>
+          <p:cNvPr id="29" name="TextBox 28"/>
+          <p:cNvSpPr txBox="1"/>
+          <p:nvPr/>
+        </p:nvSpPr>
+        <p:spPr>
+          <a:xfrm>
+            <a:off x="1651000" y="5905500"/>
+            <a:ext cx="8890000" cy="299720"/>
+          </a:xfrm>
+          <a:prstGeom prst="rect">
+            <a:avLst/>
+          </a:prstGeom>
+          <a:noFill/>
+        </p:spPr>
+        <p:txBody>
+          <a:bodyPr wrap="none" lIns="0" rIns="0" tIns="0" bIns="0" anchor="t">
+            <a:normAutofit/>
+          </a:bodyPr>
+          <a:lstStyle/>
+          <a:p>
+            <a:pPr algn="ctr">
+              <a:spcBef>
+                <a:spcPts val="0"/>
+              </a:spcBef>
+              <a:spcAft>
+                <a:spcPts val="0"/>
+              </a:spcAft>
+            </a:pPr>
+            <a:r>
+              <a:rPr sz="2000" b="1">
+                <a:solidFill>
+                  <a:srgbClr val="F1B44C"/>
+                </a:solidFill>
+                <a:latin typeface="NanumSquare"/>
+              </a:rPr>
+              <a:t>Sequential 경계에서는 skew의 S2/S3 p95 순위 역전</a:t>
             </a:r>
           </a:p>
         </p:txBody>
@@ -16685,8 +15309,8 @@
           <a:noFill/>
         </p:spPr>
         <p:txBody>
-          <a:bodyPr wrap="square" lIns="0" rIns="0" tIns="0" bIns="0" anchor="t">
-            <a:spAutoFit/>
+          <a:bodyPr wrap="none" lIns="0" rIns="0" tIns="0" bIns="0" anchor="t">
+            <a:normAutofit/>
           </a:bodyPr>
           <a:lstStyle/>
           <a:p>
@@ -16705,7 +15329,7 @@
                 </a:solidFill>
                 <a:latin typeface="NanumSquare"/>
               </a:rPr>
-              <a:t>알고리즘을 실제 보드 인터페이스로 내렸다</a:t>
+              <a:t>물리 참조 설계로 다음 검증 범위를 고정했다</a:t>
             </a:r>
           </a:p>
         </p:txBody>
@@ -16727,8 +15351,8 @@
           <a:noFill/>
         </p:spPr>
         <p:txBody>
-          <a:bodyPr wrap="square" lIns="0" rIns="0" tIns="0" bIns="0" anchor="t">
-            <a:spAutoFit/>
+          <a:bodyPr wrap="none" lIns="0" rIns="0" tIns="0" bIns="0" anchor="t">
+            <a:normAutofit/>
           </a:bodyPr>
           <a:lstStyle/>
           <a:p>
@@ -16747,7 +15371,7 @@
                 </a:solidFill>
                 <a:latin typeface="NanumSquare"/>
               </a:rPr>
-              <a:t>K26과 Memory FPGA 사이의 링크를 실제 KiCad 객체와 라우팅 쿠폰으로 구체화했다.</a:t>
+              <a:t>Native KiCad coupon으로 링크와 제한 검증 범위를 고정했다.</a:t>
             </a:r>
           </a:p>
         </p:txBody>
@@ -16899,7 +15523,7 @@
         <p:spPr>
           <a:xfrm>
             <a:off x="8699500" y="2546350"/>
-            <a:ext cx="2794000" cy="241300"/>
+            <a:ext cx="2794000" cy="258572"/>
           </a:xfrm>
           <a:prstGeom prst="rect">
             <a:avLst/>
@@ -16907,8 +15531,8 @@
           <a:noFill/>
         </p:spPr>
         <p:txBody>
-          <a:bodyPr wrap="square" lIns="0" rIns="0" tIns="0" bIns="0" anchor="t">
-            <a:spAutoFit/>
+          <a:bodyPr wrap="none" lIns="0" rIns="0" tIns="0" bIns="0" anchor="t">
+            <a:normAutofit/>
           </a:bodyPr>
           <a:lstStyle/>
           <a:p>
@@ -17114,8 +15738,8 @@
         </p:nvSpPr>
         <p:spPr>
           <a:xfrm>
-            <a:off x="9271000" y="3295650"/>
-            <a:ext cx="177800" cy="158750"/>
+            <a:off x="9271000" y="3181350"/>
+            <a:ext cx="190500" cy="203708"/>
           </a:xfrm>
           <a:prstGeom prst="rect">
             <a:avLst/>
@@ -17123,8 +15747,8 @@
           <a:noFill/>
         </p:spPr>
         <p:txBody>
-          <a:bodyPr wrap="square" lIns="0" rIns="0" tIns="0" bIns="0" anchor="t">
-            <a:spAutoFit/>
+          <a:bodyPr wrap="none" lIns="0" rIns="0" tIns="0" bIns="0" anchor="t">
+            <a:normAutofit/>
           </a:bodyPr>
           <a:lstStyle/>
           <a:p>
@@ -17137,7 +15761,7 @@
               </a:spcAft>
             </a:pPr>
             <a:r>
-              <a:rPr sz="1100" b="1">
+              <a:rPr sz="1300" b="1">
                 <a:solidFill>
                   <a:srgbClr val="36D7E7"/>
                 </a:solidFill>
@@ -17156,8 +15780,8 @@
         </p:nvSpPr>
         <p:spPr>
           <a:xfrm>
-            <a:off x="9271000" y="3384550"/>
-            <a:ext cx="177800" cy="158750"/>
+            <a:off x="9271000" y="3498850"/>
+            <a:ext cx="190500" cy="203708"/>
           </a:xfrm>
           <a:prstGeom prst="rect">
             <a:avLst/>
@@ -17165,8 +15789,8 @@
           <a:noFill/>
         </p:spPr>
         <p:txBody>
-          <a:bodyPr wrap="square" lIns="0" rIns="0" tIns="0" bIns="0" anchor="t">
-            <a:spAutoFit/>
+          <a:bodyPr wrap="none" lIns="0" rIns="0" tIns="0" bIns="0" anchor="t">
+            <a:normAutofit/>
           </a:bodyPr>
           <a:lstStyle/>
           <a:p>
@@ -17179,7 +15803,7 @@
               </a:spcAft>
             </a:pPr>
             <a:r>
-              <a:rPr sz="1100" b="1">
+              <a:rPr sz="1300" b="1">
                 <a:solidFill>
                   <a:srgbClr val="F1B44C"/>
                 </a:solidFill>
@@ -17199,7 +15823,7 @@
         <p:spPr>
           <a:xfrm>
             <a:off x="8699500" y="3943350"/>
-            <a:ext cx="2794000" cy="241300"/>
+            <a:ext cx="2794000" cy="258572"/>
           </a:xfrm>
           <a:prstGeom prst="rect">
             <a:avLst/>
@@ -17207,8 +15831,8 @@
           <a:noFill/>
         </p:spPr>
         <p:txBody>
-          <a:bodyPr wrap="square" lIns="0" rIns="0" tIns="0" bIns="0" anchor="t">
-            <a:spAutoFit/>
+          <a:bodyPr wrap="none" lIns="0" rIns="0" tIns="0" bIns="0" anchor="t">
+            <a:normAutofit/>
           </a:bodyPr>
           <a:lstStyle/>
           <a:p>
@@ -17345,7 +15969,7 @@
         <p:spPr>
           <a:xfrm>
             <a:off x="8699500" y="5340350"/>
-            <a:ext cx="2794000" cy="241300"/>
+            <a:ext cx="2794000" cy="258572"/>
           </a:xfrm>
           <a:prstGeom prst="rect">
             <a:avLst/>
@@ -17353,8 +15977,8 @@
           <a:noFill/>
         </p:spPr>
         <p:txBody>
-          <a:bodyPr wrap="square" lIns="0" rIns="0" tIns="0" bIns="0" anchor="t">
-            <a:spAutoFit/>
+          <a:bodyPr wrap="none" lIns="0" rIns="0" tIns="0" bIns="0" anchor="t">
+            <a:normAutofit/>
           </a:bodyPr>
           <a:lstStyle/>
           <a:p>
@@ -17467,7 +16091,7 @@
         <p:spPr>
           <a:xfrm>
             <a:off x="838200" y="5956300"/>
-            <a:ext cx="1752600" cy="241300"/>
+            <a:ext cx="1752600" cy="258572"/>
           </a:xfrm>
           <a:prstGeom prst="rect">
             <a:avLst/>
@@ -17475,8 +16099,8 @@
           <a:noFill/>
         </p:spPr>
         <p:txBody>
-          <a:bodyPr wrap="square" lIns="0" rIns="0" tIns="0" bIns="0" anchor="t">
-            <a:spAutoFit/>
+          <a:bodyPr wrap="none" lIns="0" rIns="0" tIns="0" bIns="0" anchor="t">
+            <a:normAutofit/>
           </a:bodyPr>
           <a:lstStyle/>
           <a:p>
@@ -17554,7 +16178,7 @@
         <p:spPr>
           <a:xfrm>
             <a:off x="2895600" y="5956300"/>
-            <a:ext cx="2324100" cy="241300"/>
+            <a:ext cx="2324100" cy="258572"/>
           </a:xfrm>
           <a:prstGeom prst="rect">
             <a:avLst/>
@@ -17562,8 +16186,8 @@
           <a:noFill/>
         </p:spPr>
         <p:txBody>
-          <a:bodyPr wrap="square" lIns="0" rIns="0" tIns="0" bIns="0" anchor="t">
-            <a:spAutoFit/>
+          <a:bodyPr wrap="none" lIns="0" rIns="0" tIns="0" bIns="0" anchor="t">
+            <a:normAutofit/>
           </a:bodyPr>
           <a:lstStyle/>
           <a:p>
@@ -17641,7 +16265,7 @@
         <p:spPr>
           <a:xfrm>
             <a:off x="5524500" y="5956300"/>
-            <a:ext cx="2514600" cy="241300"/>
+            <a:ext cx="2514600" cy="258572"/>
           </a:xfrm>
           <a:prstGeom prst="rect">
             <a:avLst/>
@@ -17649,8 +16273,8 @@
           <a:noFill/>
         </p:spPr>
         <p:txBody>
-          <a:bodyPr wrap="square" lIns="0" rIns="0" tIns="0" bIns="0" anchor="t">
-            <a:spAutoFit/>
+          <a:bodyPr wrap="none" lIns="0" rIns="0" tIns="0" bIns="0" anchor="t">
+            <a:normAutofit/>
           </a:bodyPr>
           <a:lstStyle/>
           <a:p>
@@ -17669,7 +16293,7 @@
                 </a:solidFill>
                 <a:latin typeface="NanumSquare"/>
               </a:rPr>
-              <a:t>쿠폰 ERC 0 · 부분 DRC 0</a:t>
+              <a:t>ERC 0 · 부분 DRC 0</a:t>
             </a:r>
           </a:p>
         </p:txBody>
@@ -17691,8 +16315,8 @@
           <a:noFill/>
         </p:spPr>
         <p:txBody>
-          <a:bodyPr wrap="square" lIns="0" rIns="0" tIns="0" bIns="0" anchor="t">
-            <a:spAutoFit/>
+          <a:bodyPr wrap="none" lIns="0" rIns="0" tIns="0" bIns="0" anchor="t">
+            <a:normAutofit/>
           </a:bodyPr>
           <a:lstStyle/>
           <a:p>
